--- a/docs-src/slides/conteudoAssembler.pptx
+++ b/docs-src/slides/conteudoAssembler.pptx
@@ -590,7 +590,7 @@
           <a:p>
             <a:fld id="{17B2933F-D0FD-7240-A363-4A10A64C6792}" type="datetimeFigureOut">
               <a:rPr lang="en-US" smtClean="0"/>
-              <a:t>4/22/2026</a:t>
+              <a:t>10/5/26</a:t>
             </a:fld>
             <a:endParaRPr lang="en-US"/>
           </a:p>
@@ -755,7 +755,7 @@
           <a:p>
             <a:fld id="{8E9F3387-6852-4167-A065-1B417E5289FE}" type="datetimeFigureOut">
               <a:rPr lang="pt-BR" smtClean="0"/>
-              <a:t>22/04/2026</a:t>
+              <a:t>05/10/2026</a:t>
             </a:fld>
             <a:endParaRPr lang="pt-BR"/>
           </a:p>
@@ -1179,7 +1179,7 @@
             </a:r>
             <a:r>
               <a:rPr lang="pt-BR" baseline="0" dirty="0"/>
-              <a:t> na memória de dados, quanto na memória de instruções.</a:t>
+              <a:t> na memória de dados, quanto na memória de instruções. </a:t>
             </a:r>
             <a:endParaRPr lang="pt-BR" dirty="0"/>
           </a:p>
@@ -3582,7 +3582,7 @@
           <a:p>
             <a:fld id="{CC8788FA-9D8F-3C45-9A7B-393163C83DF0}" type="datetime1">
               <a:rPr lang="en-US" smtClean="0"/>
-              <a:t>4/22/2026</a:t>
+              <a:t>10/5/26</a:t>
             </a:fld>
             <a:endParaRPr lang="pt-BR" dirty="0"/>
           </a:p>
@@ -4115,7 +4115,7 @@
           <a:p>
             <a:fld id="{AB1C2149-89A1-2143-B6CB-10E4BD2D3370}" type="datetime1">
               <a:rPr lang="en-US" smtClean="0"/>
-              <a:t>4/22/2026</a:t>
+              <a:t>10/5/26</a:t>
             </a:fld>
             <a:endParaRPr lang="pt-BR"/>
           </a:p>
@@ -4663,7 +4663,7 @@
           <a:p>
             <a:fld id="{372D7956-45FE-0B43-9FB1-4BE9D905D684}" type="datetime1">
               <a:rPr lang="en-US" smtClean="0"/>
-              <a:t>4/22/2026</a:t>
+              <a:t>10/5/26</a:t>
             </a:fld>
             <a:endParaRPr lang="pt-BR"/>
           </a:p>
@@ -4988,7 +4988,7 @@
           <a:p>
             <a:fld id="{2316C89B-46A1-944B-8294-819B08567B54}" type="datetime1">
               <a:rPr lang="en-US" smtClean="0"/>
-              <a:t>4/22/2026</a:t>
+              <a:t>10/5/26</a:t>
             </a:fld>
             <a:endParaRPr lang="pt-BR"/>
           </a:p>
@@ -5514,7 +5514,7 @@
           <a:p>
             <a:fld id="{02FE0B43-6A8C-D94C-A4F4-9A1865BE9A40}" type="datetime1">
               <a:rPr lang="en-US" smtClean="0"/>
-              <a:t>4/22/2026</a:t>
+              <a:t>10/5/26</a:t>
             </a:fld>
             <a:endParaRPr lang="pt-BR"/>
           </a:p>
@@ -5984,7 +5984,7 @@
           <a:p>
             <a:fld id="{A8EA56D1-9008-324A-AE78-6F3716B85DF9}" type="datetime1">
               <a:rPr lang="en-US" smtClean="0"/>
-              <a:t>4/22/2026</a:t>
+              <a:t>10/5/26</a:t>
             </a:fld>
             <a:endParaRPr lang="pt-BR" dirty="0"/>
           </a:p>
@@ -6381,7 +6381,7 @@
         </p:spPr>
         <p:txBody>
           <a:bodyPr>
-            <a:normAutofit fontScale="25000" lnSpcReduction="20000"/>
+            <a:normAutofit fontScale="32500" lnSpcReduction="20000"/>
           </a:bodyPr>
           <a:lstStyle/>
           <a:p>
@@ -6399,7 +6399,7 @@
                 <a:latin typeface="Verdana"/>
                 <a:cs typeface="Verdana"/>
               </a:rPr>
-              <a:t>Elementos de Sistemas</a:t>
+              <a:t>Bits e Processadores</a:t>
             </a:r>
           </a:p>
         </p:txBody>
@@ -6424,7 +6424,7 @@
                 <a:latin typeface="Verdana"/>
                 <a:cs typeface="Verdana"/>
               </a:rPr>
-              <a:t>Conteúdo 15 – Assembler</a:t>
+              <a:t>Assembler</a:t>
             </a:r>
           </a:p>
           <a:p>
@@ -6582,12 +6582,8 @@
           <a:p>
             <a:pPr algn="r"/>
             <a:r>
-              <a:rPr lang="pt-BR"/>
-              <a:t>Engenharia </a:t>
-            </a:r>
-            <a:r>
               <a:rPr lang="pt-BR" dirty="0"/>
-              <a:t>- Luciano Soares </a:t>
+              <a:t>Ciência da Computação - Luciano Soares </a:t>
             </a:r>
             <a:r>
               <a:rPr lang="pt-BR" dirty="0">
@@ -6682,7 +6678,12 @@
             <p:ph idx="1"/>
           </p:nvPr>
         </p:nvSpPr>
-        <p:spPr/>
+        <p:spPr>
+          <a:xfrm>
+            <a:off x="657225" y="1461516"/>
+            <a:ext cx="8029575" cy="1260229"/>
+          </a:xfrm>
+        </p:spPr>
         <p:txBody>
           <a:bodyPr>
             <a:normAutofit/>
@@ -6748,13 +6749,13 @@
           <p:nvPr>
             <p:extLst>
               <p:ext uri="{D42A27DB-BD31-4B8C-83A1-F6EECF244321}">
-                <p14:modId xmlns:p14="http://schemas.microsoft.com/office/powerpoint/2010/main" val="371337853"/>
+                <p14:modId xmlns:p14="http://schemas.microsoft.com/office/powerpoint/2010/main" val="1194128182"/>
               </p:ext>
             </p:extLst>
           </p:nvPr>
         </p:nvGraphicFramePr>
         <p:xfrm>
-          <a:off x="5923947" y="2693417"/>
+          <a:off x="5923947" y="2644649"/>
           <a:ext cx="1738983" cy="3889712"/>
         </p:xfrm>
         <a:graphic>
@@ -8055,7 +8056,7 @@
         </p:nvSpPr>
         <p:spPr>
           <a:xfrm>
-            <a:off x="4520485" y="2693417"/>
+            <a:off x="4520485" y="2644649"/>
             <a:ext cx="1442434" cy="1077218"/>
           </a:xfrm>
           <a:prstGeom prst="rect">
@@ -8108,7 +8109,7 @@
         </p:nvCxnSpPr>
         <p:spPr>
           <a:xfrm rot="16200000" flipH="1">
-            <a:off x="5326528" y="3685809"/>
+            <a:off x="5326528" y="3637041"/>
             <a:ext cx="1000121" cy="1169772"/>
           </a:xfrm>
           <a:prstGeom prst="curvedConnector2">
@@ -8144,7 +8145,7 @@
         </p:nvSpPr>
         <p:spPr>
           <a:xfrm>
-            <a:off x="6647557" y="4585718"/>
+            <a:off x="6647557" y="4536950"/>
             <a:ext cx="393056" cy="338554"/>
           </a:xfrm>
           <a:prstGeom prst="rect">
@@ -8173,13 +8174,13 @@
           <p:nvPr>
             <p:extLst>
               <p:ext uri="{D42A27DB-BD31-4B8C-83A1-F6EECF244321}">
-                <p14:modId xmlns:p14="http://schemas.microsoft.com/office/powerpoint/2010/main" val="1557449248"/>
+                <p14:modId xmlns:p14="http://schemas.microsoft.com/office/powerpoint/2010/main" val="2973855420"/>
               </p:ext>
             </p:extLst>
           </p:nvPr>
         </p:nvGraphicFramePr>
         <p:xfrm>
-          <a:off x="1958802" y="2693417"/>
+          <a:off x="1958802" y="2644649"/>
           <a:ext cx="1738983" cy="3889712"/>
         </p:xfrm>
         <a:graphic>
@@ -9480,7 +9481,7 @@
         </p:nvSpPr>
         <p:spPr>
           <a:xfrm>
-            <a:off x="2395471" y="3118717"/>
+            <a:off x="2395471" y="3069949"/>
             <a:ext cx="1262129" cy="584775"/>
           </a:xfrm>
           <a:prstGeom prst="rect">
@@ -9522,7 +9523,7 @@
         </p:nvCxnSpPr>
         <p:spPr>
           <a:xfrm rot="10800000" flipH="1" flipV="1">
-            <a:off x="2395471" y="3411105"/>
+            <a:off x="2395471" y="3362337"/>
             <a:ext cx="65822" cy="1590318"/>
           </a:xfrm>
           <a:prstGeom prst="curvedConnector3">
@@ -9560,7 +9561,7 @@
         </p:nvSpPr>
         <p:spPr>
           <a:xfrm>
-            <a:off x="2461293" y="4816757"/>
+            <a:off x="2461293" y="4767989"/>
             <a:ext cx="743083" cy="369332"/>
           </a:xfrm>
           <a:prstGeom prst="rect">
@@ -9582,6 +9583,80 @@
               <a:rPr lang="pt-BR" dirty="0"/>
               <a:t>         </a:t>
             </a:r>
+          </a:p>
+        </p:txBody>
+      </p:sp>
+      <p:sp>
+        <p:nvSpPr>
+          <p:cNvPr id="10" name="TextBox 9">
+            <a:extLst>
+              <a:ext uri="{FF2B5EF4-FFF2-40B4-BE49-F238E27FC236}">
+                <a16:creationId xmlns:a16="http://schemas.microsoft.com/office/drawing/2014/main" id="{2AF4310F-12EA-4645-1348-0C9F454CCEB5}"/>
+              </a:ext>
+            </a:extLst>
+          </p:cNvPr>
+          <p:cNvSpPr txBox="1"/>
+          <p:nvPr/>
+        </p:nvSpPr>
+        <p:spPr>
+          <a:xfrm>
+            <a:off x="2157043" y="6549750"/>
+            <a:ext cx="1738983" cy="276999"/>
+          </a:xfrm>
+          <a:prstGeom prst="rect">
+            <a:avLst/>
+          </a:prstGeom>
+          <a:noFill/>
+        </p:spPr>
+        <p:txBody>
+          <a:bodyPr wrap="square">
+            <a:spAutoFit/>
+          </a:bodyPr>
+          <a:lstStyle/>
+          <a:p>
+            <a:pPr algn="ctr"/>
+            <a:r>
+              <a:rPr lang="pt-BR" sz="1200" baseline="0" dirty="0"/>
+              <a:t>Memória de instruções</a:t>
+            </a:r>
+            <a:endParaRPr lang="en-US" dirty="0"/>
+          </a:p>
+        </p:txBody>
+      </p:sp>
+      <p:sp>
+        <p:nvSpPr>
+          <p:cNvPr id="15" name="TextBox 14">
+            <a:extLst>
+              <a:ext uri="{FF2B5EF4-FFF2-40B4-BE49-F238E27FC236}">
+                <a16:creationId xmlns:a16="http://schemas.microsoft.com/office/drawing/2014/main" id="{F771D1D7-6AE5-80BB-DCE5-6483455E2BD2}"/>
+              </a:ext>
+            </a:extLst>
+          </p:cNvPr>
+          <p:cNvSpPr txBox="1"/>
+          <p:nvPr/>
+        </p:nvSpPr>
+        <p:spPr>
+          <a:xfrm>
+            <a:off x="6134545" y="6549749"/>
+            <a:ext cx="1738983" cy="276999"/>
+          </a:xfrm>
+          <a:prstGeom prst="rect">
+            <a:avLst/>
+          </a:prstGeom>
+          <a:noFill/>
+        </p:spPr>
+        <p:txBody>
+          <a:bodyPr wrap="square">
+            <a:spAutoFit/>
+          </a:bodyPr>
+          <a:lstStyle/>
+          <a:p>
+            <a:pPr algn="ctr"/>
+            <a:r>
+              <a:rPr lang="pt-BR" sz="1200" baseline="0" dirty="0"/>
+              <a:t>Memória de dados</a:t>
+            </a:r>
+            <a:endParaRPr lang="en-US" dirty="0"/>
           </a:p>
         </p:txBody>
       </p:sp>
@@ -9649,7 +9724,7 @@
         </p:nvSpPr>
         <p:spPr>
           <a:xfrm>
-            <a:off x="657225" y="1485900"/>
+            <a:off x="657225" y="1461516"/>
             <a:ext cx="8029575" cy="992227"/>
           </a:xfrm>
         </p:spPr>
@@ -9669,7 +9744,7 @@
             </a:r>
             <a:r>
               <a:rPr lang="pt-BR" sz="2000" dirty="0"/>
-              <a:t> podem gerenciar posições de memórias usando símbolos para isso. Por exemplo:</a:t>
+              <a:t> podem gerenciar posições de memória usando símbolos para isso. Por exemplo:</a:t>
             </a:r>
           </a:p>
         </p:txBody>
@@ -9726,13 +9801,13 @@
           <p:nvPr>
             <p:extLst>
               <p:ext uri="{D42A27DB-BD31-4B8C-83A1-F6EECF244321}">
-                <p14:modId xmlns:p14="http://schemas.microsoft.com/office/powerpoint/2010/main" val="302505878"/>
+                <p14:modId xmlns:p14="http://schemas.microsoft.com/office/powerpoint/2010/main" val="2644528863"/>
               </p:ext>
             </p:extLst>
           </p:nvPr>
         </p:nvGraphicFramePr>
         <p:xfrm>
-          <a:off x="5923947" y="2693417"/>
+          <a:off x="5923947" y="2644649"/>
           <a:ext cx="1738983" cy="3889712"/>
         </p:xfrm>
         <a:graphic>
@@ -11033,7 +11108,7 @@
         </p:nvSpPr>
         <p:spPr>
           <a:xfrm>
-            <a:off x="4520485" y="2693417"/>
+            <a:off x="4520485" y="2644649"/>
             <a:ext cx="1442434" cy="1077218"/>
           </a:xfrm>
           <a:prstGeom prst="rect">
@@ -11086,7 +11161,7 @@
         </p:nvCxnSpPr>
         <p:spPr>
           <a:xfrm rot="16200000" flipH="1">
-            <a:off x="5326528" y="3685809"/>
+            <a:off x="5326528" y="3637041"/>
             <a:ext cx="1000121" cy="1169772"/>
           </a:xfrm>
           <a:prstGeom prst="curvedConnector2">
@@ -11122,7 +11197,7 @@
         </p:nvSpPr>
         <p:spPr>
           <a:xfrm>
-            <a:off x="6647557" y="4585718"/>
+            <a:off x="6647557" y="4536950"/>
             <a:ext cx="393056" cy="338554"/>
           </a:xfrm>
           <a:prstGeom prst="rect">
@@ -11151,13 +11226,13 @@
           <p:nvPr>
             <p:extLst>
               <p:ext uri="{D42A27DB-BD31-4B8C-83A1-F6EECF244321}">
-                <p14:modId xmlns:p14="http://schemas.microsoft.com/office/powerpoint/2010/main" val="1122499097"/>
+                <p14:modId xmlns:p14="http://schemas.microsoft.com/office/powerpoint/2010/main" val="2849528993"/>
               </p:ext>
             </p:extLst>
           </p:nvPr>
         </p:nvGraphicFramePr>
         <p:xfrm>
-          <a:off x="1958802" y="2693417"/>
+          <a:off x="1958802" y="2644649"/>
           <a:ext cx="1738983" cy="3889712"/>
         </p:xfrm>
         <a:graphic>
@@ -12458,7 +12533,7 @@
         </p:nvSpPr>
         <p:spPr>
           <a:xfrm>
-            <a:off x="2395471" y="3118717"/>
+            <a:off x="2395471" y="3069949"/>
             <a:ext cx="1262129" cy="584775"/>
           </a:xfrm>
           <a:prstGeom prst="rect">
@@ -12497,7 +12572,7 @@
         </p:nvCxnSpPr>
         <p:spPr>
           <a:xfrm rot="10800000" flipH="1" flipV="1">
-            <a:off x="2395471" y="3411105"/>
+            <a:off x="2395471" y="3362337"/>
             <a:ext cx="65822" cy="1590318"/>
           </a:xfrm>
           <a:prstGeom prst="curvedConnector3">
@@ -12535,7 +12610,7 @@
         </p:nvSpPr>
         <p:spPr>
           <a:xfrm>
-            <a:off x="2461293" y="4816757"/>
+            <a:off x="2461293" y="4767989"/>
             <a:ext cx="743083" cy="369332"/>
           </a:xfrm>
           <a:prstGeom prst="rect">
@@ -12568,7 +12643,7 @@
         </p:nvSpPr>
         <p:spPr>
           <a:xfrm>
-            <a:off x="7619094" y="4549663"/>
+            <a:off x="7619094" y="4500895"/>
             <a:ext cx="389850" cy="369332"/>
           </a:xfrm>
           <a:prstGeom prst="rect">
@@ -12596,7 +12671,7 @@
         </p:nvSpPr>
         <p:spPr>
           <a:xfrm>
-            <a:off x="3677255" y="4781227"/>
+            <a:off x="3677255" y="4732459"/>
             <a:ext cx="349776" cy="369332"/>
           </a:xfrm>
           <a:prstGeom prst="rect">
@@ -12614,6 +12689,80 @@
               <a:t>w</a:t>
             </a:r>
             <a:endParaRPr lang="pt-BR" u="sng" dirty="0"/>
+          </a:p>
+        </p:txBody>
+      </p:sp>
+      <p:sp>
+        <p:nvSpPr>
+          <p:cNvPr id="6" name="TextBox 5">
+            <a:extLst>
+              <a:ext uri="{FF2B5EF4-FFF2-40B4-BE49-F238E27FC236}">
+                <a16:creationId xmlns:a16="http://schemas.microsoft.com/office/drawing/2014/main" id="{C40919F7-EDAD-4D12-0AD9-ABF6333F47DD}"/>
+              </a:ext>
+            </a:extLst>
+          </p:cNvPr>
+          <p:cNvSpPr txBox="1"/>
+          <p:nvPr/>
+        </p:nvSpPr>
+        <p:spPr>
+          <a:xfrm>
+            <a:off x="2157043" y="6549750"/>
+            <a:ext cx="1738983" cy="276999"/>
+          </a:xfrm>
+          <a:prstGeom prst="rect">
+            <a:avLst/>
+          </a:prstGeom>
+          <a:noFill/>
+        </p:spPr>
+        <p:txBody>
+          <a:bodyPr wrap="square">
+            <a:spAutoFit/>
+          </a:bodyPr>
+          <a:lstStyle/>
+          <a:p>
+            <a:pPr algn="ctr"/>
+            <a:r>
+              <a:rPr lang="pt-BR" sz="1200" baseline="0" dirty="0"/>
+              <a:t>Memória de instruções</a:t>
+            </a:r>
+            <a:endParaRPr lang="en-US" dirty="0"/>
+          </a:p>
+        </p:txBody>
+      </p:sp>
+      <p:sp>
+        <p:nvSpPr>
+          <p:cNvPr id="7" name="TextBox 6">
+            <a:extLst>
+              <a:ext uri="{FF2B5EF4-FFF2-40B4-BE49-F238E27FC236}">
+                <a16:creationId xmlns:a16="http://schemas.microsoft.com/office/drawing/2014/main" id="{2B34232E-0DE2-CA3F-5F6D-D5E813038059}"/>
+              </a:ext>
+            </a:extLst>
+          </p:cNvPr>
+          <p:cNvSpPr txBox="1"/>
+          <p:nvPr/>
+        </p:nvSpPr>
+        <p:spPr>
+          <a:xfrm>
+            <a:off x="6134545" y="6549749"/>
+            <a:ext cx="1738983" cy="276999"/>
+          </a:xfrm>
+          <a:prstGeom prst="rect">
+            <a:avLst/>
+          </a:prstGeom>
+          <a:noFill/>
+        </p:spPr>
+        <p:txBody>
+          <a:bodyPr wrap="square">
+            <a:spAutoFit/>
+          </a:bodyPr>
+          <a:lstStyle/>
+          <a:p>
+            <a:pPr algn="ctr"/>
+            <a:r>
+              <a:rPr lang="pt-BR" sz="1200" baseline="0" dirty="0"/>
+              <a:t>Memória de dados</a:t>
+            </a:r>
+            <a:endParaRPr lang="en-US" dirty="0"/>
           </a:p>
         </p:txBody>
       </p:sp>
@@ -12679,21 +12828,28 @@
             <p:ph idx="1"/>
           </p:nvPr>
         </p:nvSpPr>
-        <p:spPr/>
+        <p:spPr>
+          <a:xfrm>
+            <a:off x="268225" y="1485900"/>
+            <a:ext cx="8875776" cy="4724400"/>
+          </a:xfrm>
+        </p:spPr>
         <p:txBody>
           <a:bodyPr/>
           <a:lstStyle/>
           <a:p>
             <a:r>
+              <a:rPr lang="en-BR" dirty="0"/>
+              <a:t>Símbolos de dados (</a:t>
+            </a:r>
+            <a:r>
               <a:rPr lang="pt-BR" b="1" dirty="0"/>
-              <a:t>Variáveis :</a:t>
-            </a:r>
-            <a:r>
-              <a:rPr lang="pt-BR" dirty="0"/>
-              <a:t> valores para dados.</a:t>
-            </a:r>
-          </a:p>
-          <a:p>
+              <a:t>variáveis</a:t>
+            </a:r>
+            <a:r>
+              <a:rPr lang="en-BR" dirty="0"/>
+              <a:t>): identificam posições de armazenamento</a:t>
+            </a:r>
             <a:endParaRPr lang="pt-BR" dirty="0"/>
           </a:p>
           <a:p>
@@ -12709,30 +12865,25 @@
             <a:endParaRPr lang="pt-BR" dirty="0"/>
           </a:p>
           <a:p>
+            <a:endParaRPr lang="pt-BR" dirty="0"/>
+          </a:p>
+          <a:p>
+            <a:endParaRPr lang="pt-BR" dirty="0"/>
+          </a:p>
+          <a:p>
+            <a:r>
+              <a:rPr lang="en-BR" dirty="0"/>
+              <a:t>Rótulos de código (</a:t>
+            </a:r>
             <a:r>
               <a:rPr lang="pt-BR" b="1" i="1" dirty="0" err="1"/>
-              <a:t>Labels</a:t>
-            </a:r>
-            <a:r>
-              <a:rPr lang="pt-BR" b="1" i="1" dirty="0"/>
-              <a:t> </a:t>
-            </a:r>
-            <a:r>
-              <a:rPr lang="pt-BR" b="1" dirty="0"/>
-              <a:t>:</a:t>
-            </a:r>
-            <a:r>
-              <a:rPr lang="pt-BR" dirty="0"/>
-              <a:t> valores para saltos (</a:t>
-            </a:r>
-            <a:r>
-              <a:rPr lang="pt-BR" dirty="0" err="1"/>
-              <a:t>jump</a:t>
-            </a:r>
-            <a:r>
-              <a:rPr lang="pt-BR" dirty="0"/>
-              <a:t>)</a:t>
-            </a:r>
+              <a:t>labels</a:t>
+            </a:r>
+            <a:r>
+              <a:rPr lang="en-BR" dirty="0"/>
+              <a:t>): identificam posições no programa, que podem ser usadas como destinos de saltos.</a:t>
+            </a:r>
+            <a:endParaRPr lang="pt-BR" dirty="0"/>
           </a:p>
         </p:txBody>
       </p:sp>
@@ -12787,10 +12938,10 @@
         </p:nvGrpSpPr>
         <p:grpSpPr>
           <a:xfrm>
-            <a:off x="3598788" y="2165945"/>
-            <a:ext cx="1985452" cy="825836"/>
-            <a:chOff x="3672768" y="3064829"/>
-            <a:chExt cx="1985452" cy="825836"/>
+            <a:off x="3111108" y="2088138"/>
+            <a:ext cx="2581156" cy="1124885"/>
+            <a:chOff x="3672768" y="2950446"/>
+            <a:chExt cx="2581156" cy="1124885"/>
           </a:xfrm>
         </p:grpSpPr>
         <p:sp>
@@ -12802,7 +12953,7 @@
           <p:spPr>
             <a:xfrm>
               <a:off x="3672768" y="3244334"/>
-              <a:ext cx="1985452" cy="646331"/>
+              <a:ext cx="2581156" cy="830997"/>
             </a:xfrm>
             <a:prstGeom prst="rect">
               <a:avLst/>
@@ -12821,53 +12972,21 @@
             <a:lstStyle/>
             <a:p>
               <a:r>
-                <a:rPr lang="en-US" dirty="0" err="1">
+                <a:rPr lang="en-US" sz="2400" noProof="1">
                   <a:latin typeface="Courier New"/>
                   <a:cs typeface="Courier New"/>
                 </a:rPr>
-                <a:t>int</a:t>
-              </a:r>
-              <a:r>
-                <a:rPr lang="en-US" dirty="0">
-                  <a:latin typeface="Courier New"/>
-                  <a:cs typeface="Courier New"/>
-                </a:rPr>
-                <a:t> </a:t>
-              </a:r>
-              <a:r>
-                <a:rPr lang="en-US" dirty="0" err="1">
-                  <a:latin typeface="Courier New"/>
-                  <a:cs typeface="Courier New"/>
-                </a:rPr>
-                <a:t>dez</a:t>
-              </a:r>
-              <a:r>
-                <a:rPr lang="en-US" dirty="0">
-                  <a:latin typeface="Courier New"/>
-                  <a:cs typeface="Courier New"/>
-                </a:rPr>
-                <a:t> = 10;</a:t>
+                <a:t>int dez = 10;</a:t>
               </a:r>
             </a:p>
             <a:p>
               <a:r>
-                <a:rPr lang="es-ES_tradnl" dirty="0" err="1">
+                <a:rPr lang="en-US" sz="2400" noProof="1">
                   <a:latin typeface="Courier New"/>
                   <a:cs typeface="Courier New"/>
                 </a:rPr>
-                <a:t>char</a:t>
+                <a:t>char a = 'a';</a:t>
               </a:r>
-              <a:r>
-                <a:rPr lang="es-ES_tradnl" dirty="0">
-                  <a:latin typeface="Courier New"/>
-                  <a:cs typeface="Courier New"/>
-                </a:rPr>
-                <a:t> a = 'a';</a:t>
-              </a:r>
-              <a:endParaRPr lang="pt-BR" dirty="0">
-                <a:latin typeface="Courier New"/>
-                <a:cs typeface="Courier New"/>
-              </a:endParaRPr>
             </a:p>
           </p:txBody>
         </p:sp>
@@ -12879,8 +12998,8 @@
           </p:nvSpPr>
           <p:spPr>
             <a:xfrm>
-              <a:off x="4430316" y="3064829"/>
-              <a:ext cx="470356" cy="276999"/>
+              <a:off x="4685140" y="2950446"/>
+              <a:ext cx="553037" cy="369332"/>
             </a:xfrm>
             <a:prstGeom prst="rect">
               <a:avLst/>
@@ -12897,7 +13016,7 @@
             <a:p>
               <a:pPr algn="ctr"/>
               <a:r>
-                <a:rPr lang="pt-BR" i="1" dirty="0"/>
+                <a:rPr lang="pt-BR" sz="2400" i="1" dirty="0"/>
                 <a:t>Java</a:t>
               </a:r>
             </a:p>
@@ -12940,10 +13059,10 @@
         </p:nvGrpSpPr>
         <p:grpSpPr>
           <a:xfrm>
-            <a:off x="2906178" y="4635741"/>
-            <a:ext cx="3370672" cy="825836"/>
-            <a:chOff x="3672768" y="3064829"/>
-            <a:chExt cx="3370672" cy="825836"/>
+            <a:off x="2418498" y="4575526"/>
+            <a:ext cx="4424609" cy="1107293"/>
+            <a:chOff x="3672768" y="2968038"/>
+            <a:chExt cx="4424609" cy="1107293"/>
           </a:xfrm>
         </p:grpSpPr>
         <p:sp>
@@ -12955,7 +13074,7 @@
           <p:spPr>
             <a:xfrm>
               <a:off x="3672768" y="3244334"/>
-              <a:ext cx="3370672" cy="646331"/>
+              <a:ext cx="4424609" cy="830997"/>
             </a:xfrm>
             <a:prstGeom prst="rect">
               <a:avLst/>
@@ -12974,7 +13093,7 @@
             <a:lstStyle/>
             <a:p>
               <a:r>
-                <a:rPr lang="en-US" dirty="0">
+                <a:rPr lang="en-US" sz="2400" dirty="0">
                   <a:latin typeface="Courier New"/>
                   <a:cs typeface="Courier New"/>
                 </a:rPr>
@@ -12983,7 +13102,7 @@
             </a:p>
             <a:p>
               <a:r>
-                <a:rPr lang="en-US" dirty="0">
+                <a:rPr lang="en-US" sz="2400" dirty="0">
                   <a:latin typeface="Courier New"/>
                   <a:cs typeface="Courier New"/>
                 </a:rPr>
@@ -13000,8 +13119,8 @@
           </p:nvSpPr>
           <p:spPr>
             <a:xfrm>
-              <a:off x="5088324" y="3064829"/>
-              <a:ext cx="539561" cy="276999"/>
+              <a:off x="5504066" y="2968038"/>
+              <a:ext cx="644407" cy="369332"/>
             </a:xfrm>
             <a:prstGeom prst="rect">
               <a:avLst/>
@@ -13018,7 +13137,7 @@
             <a:p>
               <a:pPr algn="ctr"/>
               <a:r>
-                <a:rPr lang="pt-BR" i="1" dirty="0"/>
+                <a:rPr lang="pt-BR" sz="2400" i="1" dirty="0"/>
                 <a:t>Basic</a:t>
               </a:r>
             </a:p>
@@ -13071,7 +13190,7 @@
           <a:lstStyle/>
           <a:p>
             <a:r>
-              <a:rPr lang="pt-BR" dirty="0"/>
+              <a:rPr lang="en-US" noProof="1"/>
               <a:t>Passos do Assembler</a:t>
             </a:r>
           </a:p>
@@ -13089,8 +13208,8 @@
         </p:nvSpPr>
         <p:spPr>
           <a:xfrm>
-            <a:off x="657225" y="1485900"/>
-            <a:ext cx="8320520" cy="4724400"/>
+            <a:off x="84172" y="1485900"/>
+            <a:ext cx="9059827" cy="4724400"/>
           </a:xfrm>
         </p:spPr>
         <p:txBody>
@@ -13104,15 +13223,15 @@
               <a:buChar char="•"/>
             </a:pPr>
             <a:r>
-              <a:rPr lang="pt-BR" sz="2000" dirty="0"/>
+              <a:rPr lang="en-US" sz="1900" noProof="1"/>
               <a:t>Assembler de </a:t>
             </a:r>
             <a:r>
-              <a:rPr lang="pt-BR" sz="2000" b="1" dirty="0"/>
+              <a:rPr lang="en-US" sz="1900" b="1" noProof="1"/>
               <a:t>um passo: </a:t>
             </a:r>
             <a:r>
-              <a:rPr lang="pt-BR" sz="2000" dirty="0"/>
+              <a:rPr lang="en-US" sz="1900" noProof="1"/>
               <a:t>percorrer o código-fonte uma vez. </a:t>
             </a:r>
           </a:p>
@@ -13121,52 +13240,67 @@
               <a:buFont typeface="Arial"/>
               <a:buChar char="•"/>
             </a:pPr>
-            <a:endParaRPr lang="pt-BR" sz="2000" dirty="0"/>
+            <a:endParaRPr lang="en-US" sz="1900" noProof="1"/>
           </a:p>
           <a:p>
             <a:pPr marL="285750" indent="-285750">
               <a:buFont typeface="Arial"/>
               <a:buChar char="•"/>
             </a:pPr>
-            <a:endParaRPr lang="pt-BR" sz="2000" dirty="0"/>
+            <a:endParaRPr lang="en-US" sz="1900" noProof="1"/>
           </a:p>
           <a:p>
             <a:pPr marL="285750" indent="-285750">
               <a:buFont typeface="Arial"/>
               <a:buChar char="•"/>
             </a:pPr>
-            <a:endParaRPr lang="pt-BR" sz="2000" dirty="0"/>
+            <a:endParaRPr lang="en-US" sz="1900" noProof="1"/>
           </a:p>
           <a:p>
             <a:pPr marL="285750" indent="-285750">
               <a:buFont typeface="Arial"/>
               <a:buChar char="•"/>
             </a:pPr>
-            <a:endParaRPr lang="pt-BR" sz="2000" dirty="0"/>
+            <a:endParaRPr lang="en-US" sz="1900" noProof="1"/>
           </a:p>
           <a:p>
             <a:pPr marL="285750" indent="-285750">
               <a:buFont typeface="Arial"/>
               <a:buChar char="•"/>
             </a:pPr>
-            <a:endParaRPr lang="pt-BR" sz="3200" dirty="0"/>
+            <a:endParaRPr lang="en-US" sz="1900" noProof="1"/>
           </a:p>
           <a:p>
             <a:pPr marL="285750" indent="-285750">
               <a:buFont typeface="Arial"/>
               <a:buChar char="•"/>
             </a:pPr>
-            <a:r>
-              <a:rPr lang="pt-BR" sz="2000" dirty="0"/>
+            <a:endParaRPr lang="en-US" sz="1900" noProof="1"/>
+          </a:p>
+          <a:p>
+            <a:pPr marL="285750" indent="-285750">
+              <a:buFont typeface="Arial"/>
+              <a:buChar char="•"/>
+            </a:pPr>
+            <a:r>
+              <a:rPr lang="en-US" sz="1900" noProof="1"/>
               <a:t>Assembler de </a:t>
             </a:r>
             <a:r>
-              <a:rPr lang="pt-BR" sz="2000" b="1" dirty="0"/>
+              <a:rPr lang="en-US" sz="1900" b="1" noProof="1"/>
               <a:t>múltiplos passos: </a:t>
             </a:r>
             <a:r>
-              <a:rPr lang="pt-BR" sz="2000" dirty="0"/>
-              <a:t>em uma primeira passagem criar a tabela de símbolo e depois usa.</a:t>
+              <a:rPr lang="en-US" sz="1900" noProof="1"/>
+              <a:t>em uma primeira passagem criar a </a:t>
+            </a:r>
+            <a:r>
+              <a:rPr lang="en-BR" sz="1900" dirty="0"/>
+              <a:t>tabela de símbolos e, na passagem seguinte, utiliza essa tabela</a:t>
+            </a:r>
+            <a:r>
+              <a:rPr lang="en-US" sz="1900" noProof="1"/>
+              <a:t>.</a:t>
             </a:r>
           </a:p>
         </p:txBody>
@@ -13186,7 +13320,7 @@
           <a:bodyPr/>
           <a:lstStyle/>
           <a:p>
-            <a:endParaRPr lang="pt-BR"/>
+            <a:endParaRPr lang="en-US" noProof="1"/>
           </a:p>
         </p:txBody>
       </p:sp>
@@ -13206,11 +13340,11 @@
           <a:lstStyle/>
           <a:p>
             <a:fld id="{7FFE5E5C-C80A-4D8D-A711-3102A7BA9258}" type="slidenum">
-              <a:rPr lang="pt-BR" smtClean="0"/>
+              <a:rPr lang="en-US" noProof="1" smtClean="0"/>
               <a:pPr/>
               <a:t>13</a:t>
             </a:fld>
-            <a:endParaRPr lang="pt-BR" dirty="0"/>
+            <a:endParaRPr lang="en-US" noProof="1"/>
           </a:p>
         </p:txBody>
       </p:sp>
@@ -13223,7 +13357,7 @@
           <p:nvPr>
             <p:extLst>
               <p:ext uri="{D42A27DB-BD31-4B8C-83A1-F6EECF244321}">
-                <p14:modId xmlns:p14="http://schemas.microsoft.com/office/powerpoint/2010/main" val="1634937309"/>
+                <p14:modId xmlns:p14="http://schemas.microsoft.com/office/powerpoint/2010/main" val="1342682102"/>
               </p:ext>
             </p:extLst>
           </p:nvPr>
@@ -13254,93 +13388,56 @@
                     <a:lstStyle/>
                     <a:p>
                       <a:r>
-                        <a:rPr lang="de-DE" sz="1100" b="1" dirty="0">
+                        <a:rPr lang="en-US" sz="1100" b="1" noProof="1">
                           <a:solidFill>
                             <a:schemeClr val="tx1"/>
                           </a:solidFill>
                           <a:latin typeface="Courier New"/>
                           <a:cs typeface="Courier New"/>
                         </a:rPr>
-                        <a:t>    </a:t>
-                      </a:r>
-                      <a:r>
-                        <a:rPr lang="de-DE" sz="1100" b="1" dirty="0" err="1">
+                        <a:t>    leaw</a:t>
+                      </a:r>
+                      <a:r>
+                        <a:rPr lang="en-US" sz="1100" b="1" baseline="0" noProof="1">
                           <a:solidFill>
                             <a:schemeClr val="tx1"/>
                           </a:solidFill>
                           <a:latin typeface="Courier New"/>
                           <a:cs typeface="Courier New"/>
                         </a:rPr>
-                        <a:t>leaw</a:t>
-                      </a:r>
-                      <a:r>
-                        <a:rPr lang="de-DE" sz="1100" b="1" baseline="0" dirty="0">
+                        <a:t> $</a:t>
+                      </a:r>
+                      <a:r>
+                        <a:rPr lang="en-US" sz="1100" b="1" noProof="1">
+                          <a:solidFill>
+                            <a:srgbClr val="FF0000"/>
+                          </a:solidFill>
+                          <a:latin typeface="Courier New"/>
+                          <a:cs typeface="Courier New"/>
+                        </a:rPr>
+                        <a:t>i</a:t>
+                      </a:r>
+                      <a:r>
+                        <a:rPr lang="en-US" sz="1100" b="1" noProof="1">
                           <a:solidFill>
                             <a:schemeClr val="tx1"/>
                           </a:solidFill>
                           <a:latin typeface="Courier New"/>
                           <a:cs typeface="Courier New"/>
                         </a:rPr>
-                        <a:t> $</a:t>
-                      </a:r>
-                      <a:r>
-                        <a:rPr lang="de-DE" sz="1100" b="1" dirty="0" err="1">
-                          <a:solidFill>
-                            <a:srgbClr val="FF0000"/>
-                          </a:solidFill>
-                          <a:latin typeface="Courier New"/>
-                          <a:cs typeface="Courier New"/>
-                        </a:rPr>
-                        <a:t>i</a:t>
-                      </a:r>
-                      <a:r>
-                        <a:rPr lang="de-DE" sz="1100" b="1" dirty="0" err="1">
+                        <a:t>,%A</a:t>
+                      </a:r>
+                    </a:p>
+                    <a:p>
+                      <a:r>
+                        <a:rPr lang="en-US" sz="1100" b="1" noProof="1">
                           <a:solidFill>
                             <a:schemeClr val="tx1"/>
                           </a:solidFill>
                           <a:latin typeface="Courier New"/>
                           <a:cs typeface="Courier New"/>
                         </a:rPr>
-                        <a:t>,%A</a:t>
-                      </a:r>
-                      <a:endParaRPr lang="de-DE" sz="1100" b="1" dirty="0">
-                        <a:solidFill>
-                          <a:schemeClr val="tx1"/>
-                        </a:solidFill>
-                        <a:latin typeface="Courier New"/>
-                        <a:cs typeface="Courier New"/>
-                      </a:endParaRPr>
-                    </a:p>
-                    <a:p>
-                      <a:r>
-                        <a:rPr lang="de-DE" sz="1100" b="1" dirty="0">
-                          <a:solidFill>
-                            <a:schemeClr val="tx1"/>
-                          </a:solidFill>
-                          <a:latin typeface="Courier New"/>
-                          <a:cs typeface="Courier New"/>
-                        </a:rPr>
-                        <a:t>    </a:t>
-                      </a:r>
-                      <a:r>
-                        <a:rPr lang="de-DE" sz="1100" b="1" dirty="0" err="1">
-                          <a:solidFill>
-                            <a:schemeClr val="tx1"/>
-                          </a:solidFill>
-                          <a:latin typeface="Courier New"/>
-                          <a:cs typeface="Courier New"/>
-                        </a:rPr>
-                        <a:t>movw</a:t>
-                      </a:r>
-                      <a:r>
-                        <a:rPr lang="de-DE" sz="1100" b="1" dirty="0">
-                          <a:solidFill>
-                            <a:schemeClr val="tx1"/>
-                          </a:solidFill>
-                          <a:latin typeface="Courier New"/>
-                          <a:cs typeface="Courier New"/>
-                        </a:rPr>
-                        <a:t> $1,(%A)</a:t>
+                        <a:t>    movw $1,(%A)</a:t>
                       </a:r>
                     </a:p>
                     <a:p>
@@ -13362,199 +13459,132 @@
                         <a:defRPr/>
                       </a:pPr>
                       <a:r>
-                        <a:rPr lang="de-DE" sz="1100" b="1" dirty="0">
+                        <a:rPr lang="en-US" sz="1100" b="1" noProof="1">
                           <a:solidFill>
                             <a:schemeClr val="tx1"/>
                           </a:solidFill>
                           <a:latin typeface="Courier New"/>
                           <a:cs typeface="Courier New"/>
                         </a:rPr>
-                        <a:t>    </a:t>
-                      </a:r>
-                      <a:r>
-                        <a:rPr lang="de-DE" sz="1100" b="1" dirty="0" err="1">
+                        <a:t>    leaw</a:t>
+                      </a:r>
+                      <a:r>
+                        <a:rPr lang="en-US" sz="1100" b="1" baseline="0" noProof="1">
                           <a:solidFill>
                             <a:schemeClr val="tx1"/>
                           </a:solidFill>
                           <a:latin typeface="Courier New"/>
                           <a:cs typeface="Courier New"/>
                         </a:rPr>
-                        <a:t>leaw</a:t>
-                      </a:r>
-                      <a:r>
-                        <a:rPr lang="de-DE" sz="1100" b="1" baseline="0" dirty="0">
+                        <a:t> $</a:t>
+                      </a:r>
+                      <a:r>
+                        <a:rPr lang="en-US" sz="1100" b="1" baseline="0" noProof="1">
+                          <a:solidFill>
+                            <a:srgbClr val="FF0000"/>
+                          </a:solidFill>
+                          <a:latin typeface="Courier New"/>
+                          <a:cs typeface="Courier New"/>
+                        </a:rPr>
+                        <a:t>sum</a:t>
+                      </a:r>
+                      <a:r>
+                        <a:rPr lang="en-US" sz="1100" b="1" noProof="1">
                           <a:solidFill>
                             <a:schemeClr val="tx1"/>
                           </a:solidFill>
                           <a:latin typeface="Courier New"/>
                           <a:cs typeface="Courier New"/>
                         </a:rPr>
-                        <a:t> $</a:t>
-                      </a:r>
-                      <a:r>
-                        <a:rPr lang="de-DE" sz="1100" b="1" baseline="0" dirty="0" err="1">
+                        <a:t>,%A</a:t>
+                      </a:r>
+                    </a:p>
+                    <a:p>
+                      <a:r>
+                        <a:rPr lang="en-US" sz="1100" b="1" noProof="1">
+                          <a:solidFill>
+                            <a:schemeClr val="tx1"/>
+                          </a:solidFill>
+                          <a:latin typeface="Courier New"/>
+                          <a:cs typeface="Courier New"/>
+                        </a:rPr>
+                        <a:t>    movw $0,(%A)</a:t>
+                      </a:r>
+                    </a:p>
+                    <a:p>
+                      <a:r>
+                        <a:rPr lang="en-US" sz="1100" b="1" noProof="1">
                           <a:solidFill>
                             <a:srgbClr val="FF0000"/>
                           </a:solidFill>
                           <a:latin typeface="Courier New"/>
                           <a:cs typeface="Courier New"/>
                         </a:rPr>
-                        <a:t>sum</a:t>
-                      </a:r>
-                      <a:r>
-                        <a:rPr lang="de-DE" sz="1100" b="1" dirty="0">
+                        <a:t>LOOP</a:t>
+                      </a:r>
+                      <a:r>
+                        <a:rPr lang="en-US" sz="1100" b="1" noProof="1">
                           <a:solidFill>
                             <a:schemeClr val="tx1"/>
                           </a:solidFill>
                           <a:latin typeface="Courier New"/>
                           <a:cs typeface="Courier New"/>
                         </a:rPr>
-                        <a:t>,%A</a:t>
-                      </a:r>
-                    </a:p>
-                    <a:p>
-                      <a:r>
-                        <a:rPr lang="de-DE" sz="1100" b="1" dirty="0">
+                        <a:t>:</a:t>
+                      </a:r>
+                    </a:p>
+                    <a:p>
+                      <a:r>
+                        <a:rPr lang="en-US" sz="1100" b="1" noProof="1">
                           <a:solidFill>
                             <a:schemeClr val="tx1"/>
                           </a:solidFill>
                           <a:latin typeface="Courier New"/>
                           <a:cs typeface="Courier New"/>
                         </a:rPr>
-                        <a:t>    </a:t>
-                      </a:r>
-                      <a:r>
-                        <a:rPr lang="de-DE" sz="1100" b="1" dirty="0" err="1">
+                        <a:t>    leaw</a:t>
+                      </a:r>
+                      <a:r>
+                        <a:rPr lang="en-US" sz="1100" b="1" baseline="0" noProof="1">
                           <a:solidFill>
                             <a:schemeClr val="tx1"/>
                           </a:solidFill>
                           <a:latin typeface="Courier New"/>
                           <a:cs typeface="Courier New"/>
                         </a:rPr>
-                        <a:t>movw</a:t>
-                      </a:r>
-                      <a:r>
-                        <a:rPr lang="de-DE" sz="1100" b="1" dirty="0">
+                        <a:t> $</a:t>
+                      </a:r>
+                      <a:r>
+                        <a:rPr lang="en-US" sz="1100" b="1" noProof="1">
+                          <a:solidFill>
+                            <a:srgbClr val="FF0000"/>
+                          </a:solidFill>
+                          <a:latin typeface="Courier New"/>
+                          <a:cs typeface="Courier New"/>
+                        </a:rPr>
+                        <a:t>i</a:t>
+                      </a:r>
+                      <a:r>
+                        <a:rPr lang="en-US" sz="1100" b="1" noProof="1">
                           <a:solidFill>
                             <a:schemeClr val="tx1"/>
                           </a:solidFill>
                           <a:latin typeface="Courier New"/>
                           <a:cs typeface="Courier New"/>
                         </a:rPr>
-                        <a:t> $0,(%A)</a:t>
-                      </a:r>
-                    </a:p>
-                    <a:p>
-                      <a:r>
-                        <a:rPr lang="de-DE" sz="1100" b="1" dirty="0">
-                          <a:solidFill>
-                            <a:srgbClr val="FF0000"/>
-                          </a:solidFill>
-                          <a:latin typeface="Courier New"/>
-                          <a:cs typeface="Courier New"/>
-                        </a:rPr>
-                        <a:t>LOOP</a:t>
-                      </a:r>
-                      <a:r>
-                        <a:rPr lang="de-DE" sz="1100" b="1" dirty="0">
+                        <a:t>,%A</a:t>
+                      </a:r>
+                    </a:p>
+                    <a:p>
+                      <a:r>
+                        <a:rPr lang="en-US" sz="1100" b="1" noProof="1">
                           <a:solidFill>
                             <a:schemeClr val="tx1"/>
                           </a:solidFill>
                           <a:latin typeface="Courier New"/>
                           <a:cs typeface="Courier New"/>
                         </a:rPr>
-                        <a:t>:</a:t>
-                      </a:r>
-                    </a:p>
-                    <a:p>
-                      <a:r>
-                        <a:rPr lang="de-DE" sz="1100" b="1" dirty="0">
-                          <a:solidFill>
-                            <a:schemeClr val="tx1"/>
-                          </a:solidFill>
-                          <a:latin typeface="Courier New"/>
-                          <a:cs typeface="Courier New"/>
-                        </a:rPr>
-                        <a:t>    </a:t>
-                      </a:r>
-                      <a:r>
-                        <a:rPr lang="de-DE" sz="1100" b="1" dirty="0" err="1">
-                          <a:solidFill>
-                            <a:schemeClr val="tx1"/>
-                          </a:solidFill>
-                          <a:latin typeface="Courier New"/>
-                          <a:cs typeface="Courier New"/>
-                        </a:rPr>
-                        <a:t>leaw</a:t>
-                      </a:r>
-                      <a:r>
-                        <a:rPr lang="de-DE" sz="1100" b="1" baseline="0" dirty="0">
-                          <a:solidFill>
-                            <a:schemeClr val="tx1"/>
-                          </a:solidFill>
-                          <a:latin typeface="Courier New"/>
-                          <a:cs typeface="Courier New"/>
-                        </a:rPr>
-                        <a:t> $</a:t>
-                      </a:r>
-                      <a:r>
-                        <a:rPr lang="de-DE" sz="1100" b="1" dirty="0" err="1">
-                          <a:solidFill>
-                            <a:srgbClr val="FF0000"/>
-                          </a:solidFill>
-                          <a:latin typeface="Courier New"/>
-                          <a:cs typeface="Courier New"/>
-                        </a:rPr>
-                        <a:t>i</a:t>
-                      </a:r>
-                      <a:r>
-                        <a:rPr lang="de-DE" sz="1100" b="1" dirty="0" err="1">
-                          <a:solidFill>
-                            <a:schemeClr val="tx1"/>
-                          </a:solidFill>
-                          <a:latin typeface="Courier New"/>
-                          <a:cs typeface="Courier New"/>
-                        </a:rPr>
-                        <a:t>,%A</a:t>
-                      </a:r>
-                      <a:endParaRPr lang="de-DE" sz="1100" b="1" dirty="0">
-                        <a:solidFill>
-                          <a:schemeClr val="tx1"/>
-                        </a:solidFill>
-                        <a:latin typeface="Courier New"/>
-                        <a:cs typeface="Courier New"/>
-                      </a:endParaRPr>
-                    </a:p>
-                    <a:p>
-                      <a:r>
-                        <a:rPr lang="de-DE" sz="1100" b="1" dirty="0">
-                          <a:solidFill>
-                            <a:schemeClr val="tx1"/>
-                          </a:solidFill>
-                          <a:latin typeface="Courier New"/>
-                          <a:cs typeface="Courier New"/>
-                        </a:rPr>
-                        <a:t>    </a:t>
-                      </a:r>
-                      <a:r>
-                        <a:rPr lang="de-DE" sz="1100" b="1" dirty="0" err="1">
-                          <a:solidFill>
-                            <a:schemeClr val="tx1"/>
-                          </a:solidFill>
-                          <a:latin typeface="Courier New"/>
-                          <a:cs typeface="Courier New"/>
-                        </a:rPr>
-                        <a:t>movw</a:t>
-                      </a:r>
-                      <a:r>
-                        <a:rPr lang="de-DE" sz="1100" b="1" dirty="0">
-                          <a:solidFill>
-                            <a:schemeClr val="tx1"/>
-                          </a:solidFill>
-                          <a:latin typeface="Courier New"/>
-                          <a:cs typeface="Courier New"/>
-                        </a:rPr>
-                        <a:t> (%A),%D</a:t>
+                        <a:t>    movw (%A),%D</a:t>
                       </a:r>
                     </a:p>
                     <a:p>
@@ -13576,37 +13606,27 @@
                         <a:defRPr/>
                       </a:pPr>
                       <a:r>
-                        <a:rPr lang="de-DE" sz="1100" b="1" dirty="0">
+                        <a:rPr lang="en-US" sz="1100" b="1" noProof="1">
                           <a:solidFill>
                             <a:schemeClr val="tx1"/>
                           </a:solidFill>
                           <a:latin typeface="Courier New"/>
                           <a:cs typeface="Courier New"/>
                         </a:rPr>
-                        <a:t>    </a:t>
-                      </a:r>
-                      <a:r>
-                        <a:rPr lang="de-DE" sz="1100" b="1" dirty="0" err="1">
+                        <a:t>    leaw</a:t>
+                      </a:r>
+                      <a:r>
+                        <a:rPr lang="en-US" sz="1100" b="1" baseline="0" noProof="1">
                           <a:solidFill>
                             <a:schemeClr val="tx1"/>
                           </a:solidFill>
                           <a:latin typeface="Courier New"/>
                           <a:cs typeface="Courier New"/>
                         </a:rPr>
-                        <a:t>leaw</a:t>
-                      </a:r>
-                      <a:r>
-                        <a:rPr lang="de-DE" sz="1100" b="1" baseline="0" dirty="0">
-                          <a:solidFill>
-                            <a:schemeClr val="tx1"/>
-                          </a:solidFill>
-                          <a:latin typeface="Courier New"/>
-                          <a:cs typeface="Courier New"/>
-                        </a:rPr>
                         <a:t> $</a:t>
                       </a:r>
                       <a:r>
-                        <a:rPr lang="de-DE" sz="1100" b="1" dirty="0">
+                        <a:rPr lang="en-US" sz="1100" b="1" noProof="1">
                           <a:solidFill>
                             <a:srgbClr val="FF0000"/>
                           </a:solidFill>
@@ -13616,7 +13636,7 @@
                         <a:t>R0</a:t>
                       </a:r>
                       <a:r>
-                        <a:rPr lang="de-DE" sz="1100" b="1" dirty="0">
+                        <a:rPr lang="en-US" sz="1100" b="1" noProof="1">
                           <a:solidFill>
                             <a:schemeClr val="tx1"/>
                           </a:solidFill>
@@ -13645,27 +13665,17 @@
                         <a:defRPr/>
                       </a:pPr>
                       <a:r>
-                        <a:rPr lang="de-DE" sz="1100" b="1" dirty="0">
+                        <a:rPr lang="en-US" sz="1100" b="1" noProof="1">
                           <a:solidFill>
                             <a:schemeClr val="tx1"/>
                           </a:solidFill>
                           <a:latin typeface="Courier New"/>
                           <a:cs typeface="Courier New"/>
                         </a:rPr>
-                        <a:t>    </a:t>
-                      </a:r>
-                      <a:r>
-                        <a:rPr lang="de-DE" sz="1100" b="1" dirty="0" err="1">
-                          <a:solidFill>
-                            <a:schemeClr val="tx1"/>
-                          </a:solidFill>
-                          <a:latin typeface="Courier New"/>
-                          <a:cs typeface="Courier New"/>
-                        </a:rPr>
-                        <a:t>subw</a:t>
-                      </a:r>
-                      <a:r>
-                        <a:rPr lang="de-DE" sz="1100" b="1" baseline="0" dirty="0">
+                        <a:t>    subw</a:t>
+                      </a:r>
+                      <a:r>
+                        <a:rPr lang="en-US" sz="1100" b="1" baseline="0" noProof="1">
                           <a:solidFill>
                             <a:schemeClr val="tx1"/>
                           </a:solidFill>
@@ -13694,56 +13704,36 @@
                         <a:defRPr/>
                       </a:pPr>
                       <a:r>
-                        <a:rPr lang="de-DE" sz="1100" b="1" baseline="0" dirty="0">
+                        <a:rPr lang="en-US" sz="1100" b="1" baseline="0" noProof="1">
                           <a:solidFill>
                             <a:schemeClr val="tx1"/>
                           </a:solidFill>
                           <a:latin typeface="Courier New"/>
                           <a:cs typeface="Courier New"/>
                         </a:rPr>
-                        <a:t>    </a:t>
-                      </a:r>
-                      <a:r>
-                        <a:rPr lang="de-DE" sz="1100" b="1" baseline="0" dirty="0" err="1">
+                        <a:t>    leaw $</a:t>
+                      </a:r>
+                      <a:r>
+                        <a:rPr lang="en-US" sz="1100" b="1" baseline="0" noProof="1">
+                          <a:solidFill>
+                            <a:srgbClr val="FF0000"/>
+                          </a:solidFill>
+                          <a:latin typeface="Courier New"/>
+                          <a:cs typeface="Courier New"/>
+                        </a:rPr>
+                        <a:t>LOOP</a:t>
+                      </a:r>
+                      <a:r>
+                        <a:rPr lang="en-US" sz="1100" b="1" baseline="0" noProof="1">
                           <a:solidFill>
                             <a:schemeClr val="tx1"/>
                           </a:solidFill>
                           <a:latin typeface="Courier New"/>
                           <a:cs typeface="Courier New"/>
                         </a:rPr>
-                        <a:t>leaw</a:t>
-                      </a:r>
-                      <a:r>
-                        <a:rPr lang="de-DE" sz="1100" b="1" baseline="0" dirty="0">
-                          <a:solidFill>
-                            <a:schemeClr val="tx1"/>
-                          </a:solidFill>
-                          <a:latin typeface="Courier New"/>
-                          <a:cs typeface="Courier New"/>
-                        </a:rPr>
-                        <a:t> $</a:t>
-                      </a:r>
-                      <a:r>
-                        <a:rPr lang="de-DE" sz="1100" b="1" baseline="0" dirty="0">
-                          <a:solidFill>
-                            <a:srgbClr val="FF0000"/>
-                          </a:solidFill>
-                          <a:latin typeface="Courier New"/>
-                          <a:cs typeface="Courier New"/>
-                        </a:rPr>
-                        <a:t>LOOP</a:t>
-                      </a:r>
-                      <a:r>
-                        <a:rPr lang="de-DE" sz="1100" b="1" baseline="0" dirty="0">
-                          <a:solidFill>
-                            <a:schemeClr val="tx1"/>
-                          </a:solidFill>
-                          <a:latin typeface="Courier New"/>
-                          <a:cs typeface="Courier New"/>
-                        </a:rPr>
                         <a:t>,%A</a:t>
                       </a:r>
-                      <a:endParaRPr lang="de-DE" sz="1100" b="1" dirty="0">
+                      <a:endParaRPr lang="en-US" sz="1100" b="1" noProof="1">
                         <a:solidFill>
                           <a:schemeClr val="tx1"/>
                         </a:solidFill>
@@ -13753,32 +13743,15 @@
                     </a:p>
                     <a:p>
                       <a:r>
-                        <a:rPr lang="de-DE" sz="1100" b="1" dirty="0">
+                        <a:rPr lang="en-US" sz="1100" b="1" noProof="1">
                           <a:solidFill>
                             <a:schemeClr val="tx1"/>
                           </a:solidFill>
                           <a:latin typeface="Courier New"/>
                           <a:cs typeface="Courier New"/>
                         </a:rPr>
-                        <a:t>    </a:t>
-                      </a:r>
-                      <a:r>
-                        <a:rPr lang="de-DE" sz="1100" b="1" dirty="0" err="1">
-                          <a:solidFill>
-                            <a:schemeClr val="tx1"/>
-                          </a:solidFill>
-                          <a:latin typeface="Courier New"/>
-                          <a:cs typeface="Courier New"/>
-                        </a:rPr>
-                        <a:t>jg</a:t>
-                      </a:r>
-                      <a:endParaRPr lang="pt-BR" sz="1100" b="1" dirty="0">
-                        <a:solidFill>
-                          <a:schemeClr val="tx1"/>
-                        </a:solidFill>
-                        <a:latin typeface="Courier New"/>
-                        <a:cs typeface="Courier New"/>
-                      </a:endParaRPr>
+                        <a:t>    jg   %D</a:t>
+                      </a:r>
                     </a:p>
                   </a:txBody>
                   <a:tcPr>
@@ -13842,7 +13815,7 @@
           <p:nvPr>
             <p:extLst>
               <p:ext uri="{D42A27DB-BD31-4B8C-83A1-F6EECF244321}">
-                <p14:modId xmlns:p14="http://schemas.microsoft.com/office/powerpoint/2010/main" val="796904690"/>
+                <p14:modId xmlns:p14="http://schemas.microsoft.com/office/powerpoint/2010/main" val="2760812945"/>
               </p:ext>
             </p:extLst>
           </p:nvPr>
@@ -13873,83 +13846,46 @@
                     <a:lstStyle/>
                     <a:p>
                       <a:r>
-                        <a:rPr lang="de-DE" sz="1100" b="1" dirty="0">
+                        <a:rPr lang="en-US" sz="1100" b="1" noProof="1">
                           <a:solidFill>
                             <a:schemeClr val="tx1"/>
                           </a:solidFill>
                           <a:latin typeface="Courier New"/>
                           <a:cs typeface="Courier New"/>
                         </a:rPr>
-                        <a:t>    </a:t>
-                      </a:r>
-                      <a:r>
-                        <a:rPr lang="de-DE" sz="1100" b="1" dirty="0" err="1">
+                        <a:t>    leaw</a:t>
+                      </a:r>
+                      <a:r>
+                        <a:rPr lang="en-US" sz="1100" b="1" baseline="0" noProof="1">
                           <a:solidFill>
                             <a:schemeClr val="tx1"/>
                           </a:solidFill>
                           <a:latin typeface="Courier New"/>
                           <a:cs typeface="Courier New"/>
                         </a:rPr>
-                        <a:t>leaw</a:t>
-                      </a:r>
-                      <a:r>
-                        <a:rPr lang="de-DE" sz="1100" b="1" baseline="0" dirty="0">
+                        <a:t> $</a:t>
+                      </a:r>
+                      <a:r>
+                        <a:rPr lang="en-US" sz="1100" b="1" noProof="1">
                           <a:solidFill>
                             <a:schemeClr val="tx1"/>
                           </a:solidFill>
                           <a:latin typeface="Courier New"/>
                           <a:cs typeface="Courier New"/>
                         </a:rPr>
-                        <a:t> $</a:t>
-                      </a:r>
-                      <a:r>
-                        <a:rPr lang="de-DE" sz="1100" b="1" dirty="0" err="1">
+                        <a:t>i,%A</a:t>
+                      </a:r>
+                    </a:p>
+                    <a:p>
+                      <a:r>
+                        <a:rPr lang="en-US" sz="1100" b="1" noProof="1">
                           <a:solidFill>
                             <a:schemeClr val="tx1"/>
                           </a:solidFill>
                           <a:latin typeface="Courier New"/>
                           <a:cs typeface="Courier New"/>
                         </a:rPr>
-                        <a:t>i,%A</a:t>
-                      </a:r>
-                      <a:endParaRPr lang="de-DE" sz="1100" b="1" dirty="0">
-                        <a:solidFill>
-                          <a:schemeClr val="tx1"/>
-                        </a:solidFill>
-                        <a:latin typeface="Courier New"/>
-                        <a:cs typeface="Courier New"/>
-                      </a:endParaRPr>
-                    </a:p>
-                    <a:p>
-                      <a:r>
-                        <a:rPr lang="de-DE" sz="1100" b="1" dirty="0">
-                          <a:solidFill>
-                            <a:schemeClr val="tx1"/>
-                          </a:solidFill>
-                          <a:latin typeface="Courier New"/>
-                          <a:cs typeface="Courier New"/>
-                        </a:rPr>
-                        <a:t>    </a:t>
-                      </a:r>
-                      <a:r>
-                        <a:rPr lang="de-DE" sz="1100" b="1" dirty="0" err="1">
-                          <a:solidFill>
-                            <a:schemeClr val="tx1"/>
-                          </a:solidFill>
-                          <a:latin typeface="Courier New"/>
-                          <a:cs typeface="Courier New"/>
-                        </a:rPr>
-                        <a:t>movw</a:t>
-                      </a:r>
-                      <a:r>
-                        <a:rPr lang="de-DE" sz="1100" b="1" dirty="0">
-                          <a:solidFill>
-                            <a:schemeClr val="tx1"/>
-                          </a:solidFill>
-                          <a:latin typeface="Courier New"/>
-                          <a:cs typeface="Courier New"/>
-                        </a:rPr>
-                        <a:t> $1,(%A)</a:t>
+                        <a:t>    movw $1,(%A)</a:t>
                       </a:r>
                     </a:p>
                     <a:p>
@@ -13971,189 +13907,112 @@
                         <a:defRPr/>
                       </a:pPr>
                       <a:r>
-                        <a:rPr lang="de-DE" sz="1100" b="1" dirty="0">
+                        <a:rPr lang="en-US" sz="1100" b="1" noProof="1">
                           <a:solidFill>
                             <a:schemeClr val="tx1"/>
                           </a:solidFill>
                           <a:latin typeface="Courier New"/>
                           <a:cs typeface="Courier New"/>
                         </a:rPr>
-                        <a:t>    </a:t>
-                      </a:r>
-                      <a:r>
-                        <a:rPr lang="de-DE" sz="1100" b="1" dirty="0" err="1">
+                        <a:t>    leaw</a:t>
+                      </a:r>
+                      <a:r>
+                        <a:rPr lang="en-US" sz="1100" b="1" baseline="0" noProof="1">
                           <a:solidFill>
                             <a:schemeClr val="tx1"/>
                           </a:solidFill>
                           <a:latin typeface="Courier New"/>
                           <a:cs typeface="Courier New"/>
                         </a:rPr>
-                        <a:t>leaw</a:t>
-                      </a:r>
-                      <a:r>
-                        <a:rPr lang="de-DE" sz="1100" b="1" baseline="0" dirty="0">
+                        <a:t> $sum</a:t>
+                      </a:r>
+                      <a:r>
+                        <a:rPr lang="en-US" sz="1100" b="1" noProof="1">
                           <a:solidFill>
                             <a:schemeClr val="tx1"/>
                           </a:solidFill>
                           <a:latin typeface="Courier New"/>
                           <a:cs typeface="Courier New"/>
                         </a:rPr>
-                        <a:t> $</a:t>
-                      </a:r>
-                      <a:r>
-                        <a:rPr lang="de-DE" sz="1100" b="1" baseline="0" dirty="0" err="1">
+                        <a:t>,%A</a:t>
+                      </a:r>
+                    </a:p>
+                    <a:p>
+                      <a:r>
+                        <a:rPr lang="en-US" sz="1100" b="1" noProof="1">
                           <a:solidFill>
                             <a:schemeClr val="tx1"/>
                           </a:solidFill>
                           <a:latin typeface="Courier New"/>
                           <a:cs typeface="Courier New"/>
                         </a:rPr>
-                        <a:t>sum</a:t>
-                      </a:r>
-                      <a:r>
-                        <a:rPr lang="de-DE" sz="1100" b="1" dirty="0">
+                        <a:t>    movw $0,(%A)</a:t>
+                      </a:r>
+                    </a:p>
+                    <a:p>
+                      <a:r>
+                        <a:rPr lang="en-US" sz="1100" b="1" noProof="1">
+                          <a:solidFill>
+                            <a:srgbClr val="FF0000"/>
+                          </a:solidFill>
+                          <a:latin typeface="Courier New"/>
+                          <a:cs typeface="Courier New"/>
+                        </a:rPr>
+                        <a:t>LOOP</a:t>
+                      </a:r>
+                      <a:r>
+                        <a:rPr lang="en-US" sz="1100" b="1" noProof="1">
                           <a:solidFill>
                             <a:schemeClr val="tx1"/>
                           </a:solidFill>
                           <a:latin typeface="Courier New"/>
                           <a:cs typeface="Courier New"/>
                         </a:rPr>
-                        <a:t>,%A</a:t>
-                      </a:r>
-                    </a:p>
-                    <a:p>
-                      <a:r>
-                        <a:rPr lang="de-DE" sz="1100" b="1" dirty="0">
+                        <a:t>:</a:t>
+                      </a:r>
+                    </a:p>
+                    <a:p>
+                      <a:r>
+                        <a:rPr lang="en-US" sz="1100" b="1" noProof="1">
                           <a:solidFill>
                             <a:schemeClr val="tx1"/>
                           </a:solidFill>
                           <a:latin typeface="Courier New"/>
                           <a:cs typeface="Courier New"/>
                         </a:rPr>
-                        <a:t>    </a:t>
-                      </a:r>
-                      <a:r>
-                        <a:rPr lang="de-DE" sz="1100" b="1" dirty="0" err="1">
+                        <a:t>    leaw</a:t>
+                      </a:r>
+                      <a:r>
+                        <a:rPr lang="en-US" sz="1100" b="1" baseline="0" noProof="1">
                           <a:solidFill>
                             <a:schemeClr val="tx1"/>
                           </a:solidFill>
                           <a:latin typeface="Courier New"/>
                           <a:cs typeface="Courier New"/>
                         </a:rPr>
-                        <a:t>movw</a:t>
-                      </a:r>
-                      <a:r>
-                        <a:rPr lang="de-DE" sz="1100" b="1" dirty="0">
+                        <a:t> $</a:t>
+                      </a:r>
+                      <a:r>
+                        <a:rPr lang="en-US" sz="1100" b="1" noProof="1">
                           <a:solidFill>
                             <a:schemeClr val="tx1"/>
                           </a:solidFill>
                           <a:latin typeface="Courier New"/>
                           <a:cs typeface="Courier New"/>
                         </a:rPr>
-                        <a:t> $0,(%A)</a:t>
-                      </a:r>
-                    </a:p>
-                    <a:p>
-                      <a:r>
-                        <a:rPr lang="de-DE" sz="1100" b="1" dirty="0">
-                          <a:solidFill>
-                            <a:srgbClr val="FF0000"/>
-                          </a:solidFill>
-                          <a:latin typeface="Courier New"/>
-                          <a:cs typeface="Courier New"/>
-                        </a:rPr>
-                        <a:t>LOOP</a:t>
-                      </a:r>
-                      <a:r>
-                        <a:rPr lang="de-DE" sz="1100" b="1" dirty="0">
+                        <a:t>i,%A</a:t>
+                      </a:r>
+                    </a:p>
+                    <a:p>
+                      <a:r>
+                        <a:rPr lang="en-US" sz="1100" b="1" noProof="1">
                           <a:solidFill>
                             <a:schemeClr val="tx1"/>
                           </a:solidFill>
                           <a:latin typeface="Courier New"/>
                           <a:cs typeface="Courier New"/>
                         </a:rPr>
-                        <a:t>:</a:t>
-                      </a:r>
-                    </a:p>
-                    <a:p>
-                      <a:r>
-                        <a:rPr lang="de-DE" sz="1100" b="1" dirty="0">
-                          <a:solidFill>
-                            <a:schemeClr val="tx1"/>
-                          </a:solidFill>
-                          <a:latin typeface="Courier New"/>
-                          <a:cs typeface="Courier New"/>
-                        </a:rPr>
-                        <a:t>    </a:t>
-                      </a:r>
-                      <a:r>
-                        <a:rPr lang="de-DE" sz="1100" b="1" dirty="0" err="1">
-                          <a:solidFill>
-                            <a:schemeClr val="tx1"/>
-                          </a:solidFill>
-                          <a:latin typeface="Courier New"/>
-                          <a:cs typeface="Courier New"/>
-                        </a:rPr>
-                        <a:t>leaw</a:t>
-                      </a:r>
-                      <a:r>
-                        <a:rPr lang="de-DE" sz="1100" b="1" baseline="0" dirty="0">
-                          <a:solidFill>
-                            <a:schemeClr val="tx1"/>
-                          </a:solidFill>
-                          <a:latin typeface="Courier New"/>
-                          <a:cs typeface="Courier New"/>
-                        </a:rPr>
-                        <a:t> $</a:t>
-                      </a:r>
-                      <a:r>
-                        <a:rPr lang="de-DE" sz="1100" b="1" dirty="0" err="1">
-                          <a:solidFill>
-                            <a:schemeClr val="tx1"/>
-                          </a:solidFill>
-                          <a:latin typeface="Courier New"/>
-                          <a:cs typeface="Courier New"/>
-                        </a:rPr>
-                        <a:t>i,%A</a:t>
-                      </a:r>
-                      <a:endParaRPr lang="de-DE" sz="1100" b="1" dirty="0">
-                        <a:solidFill>
-                          <a:schemeClr val="tx1"/>
-                        </a:solidFill>
-                        <a:latin typeface="Courier New"/>
-                        <a:cs typeface="Courier New"/>
-                      </a:endParaRPr>
-                    </a:p>
-                    <a:p>
-                      <a:r>
-                        <a:rPr lang="de-DE" sz="1100" b="1" dirty="0">
-                          <a:solidFill>
-                            <a:schemeClr val="tx1"/>
-                          </a:solidFill>
-                          <a:latin typeface="Courier New"/>
-                          <a:cs typeface="Courier New"/>
-                        </a:rPr>
-                        <a:t>    </a:t>
-                      </a:r>
-                      <a:r>
-                        <a:rPr lang="de-DE" sz="1100" b="1" dirty="0" err="1">
-                          <a:solidFill>
-                            <a:schemeClr val="tx1"/>
-                          </a:solidFill>
-                          <a:latin typeface="Courier New"/>
-                          <a:cs typeface="Courier New"/>
-                        </a:rPr>
-                        <a:t>movw</a:t>
-                      </a:r>
-                      <a:r>
-                        <a:rPr lang="de-DE" sz="1100" b="1" dirty="0">
-                          <a:solidFill>
-                            <a:schemeClr val="tx1"/>
-                          </a:solidFill>
-                          <a:latin typeface="Courier New"/>
-                          <a:cs typeface="Courier New"/>
-                        </a:rPr>
-                        <a:t> (%A),%D</a:t>
+                        <a:t>    movw (%A),%D</a:t>
                       </a:r>
                     </a:p>
                     <a:p>
@@ -14175,37 +14034,27 @@
                         <a:defRPr/>
                       </a:pPr>
                       <a:r>
-                        <a:rPr lang="de-DE" sz="1100" b="1" dirty="0">
+                        <a:rPr lang="en-US" sz="1100" b="1" noProof="1">
                           <a:solidFill>
                             <a:schemeClr val="tx1"/>
                           </a:solidFill>
                           <a:latin typeface="Courier New"/>
                           <a:cs typeface="Courier New"/>
                         </a:rPr>
-                        <a:t>    </a:t>
-                      </a:r>
-                      <a:r>
-                        <a:rPr lang="de-DE" sz="1100" b="1" dirty="0" err="1">
+                        <a:t>    leaw</a:t>
+                      </a:r>
+                      <a:r>
+                        <a:rPr lang="en-US" sz="1100" b="1" baseline="0" noProof="1">
                           <a:solidFill>
                             <a:schemeClr val="tx1"/>
                           </a:solidFill>
                           <a:latin typeface="Courier New"/>
                           <a:cs typeface="Courier New"/>
                         </a:rPr>
-                        <a:t>leaw</a:t>
-                      </a:r>
-                      <a:r>
-                        <a:rPr lang="de-DE" sz="1100" b="1" baseline="0" dirty="0">
-                          <a:solidFill>
-                            <a:schemeClr val="tx1"/>
-                          </a:solidFill>
-                          <a:latin typeface="Courier New"/>
-                          <a:cs typeface="Courier New"/>
-                        </a:rPr>
                         <a:t> $</a:t>
                       </a:r>
                       <a:r>
-                        <a:rPr lang="de-DE" sz="1100" b="1" dirty="0">
+                        <a:rPr lang="en-US" sz="1100" b="1" noProof="1">
                           <a:solidFill>
                             <a:schemeClr val="tx1"/>
                           </a:solidFill>
@@ -14234,27 +14083,17 @@
                         <a:defRPr/>
                       </a:pPr>
                       <a:r>
-                        <a:rPr lang="de-DE" sz="1100" b="1" dirty="0">
+                        <a:rPr lang="en-US" sz="1100" b="1" noProof="1">
                           <a:solidFill>
                             <a:schemeClr val="tx1"/>
                           </a:solidFill>
                           <a:latin typeface="Courier New"/>
                           <a:cs typeface="Courier New"/>
                         </a:rPr>
-                        <a:t>    </a:t>
-                      </a:r>
-                      <a:r>
-                        <a:rPr lang="de-DE" sz="1100" b="1" dirty="0" err="1">
-                          <a:solidFill>
-                            <a:schemeClr val="tx1"/>
-                          </a:solidFill>
-                          <a:latin typeface="Courier New"/>
-                          <a:cs typeface="Courier New"/>
-                        </a:rPr>
-                        <a:t>subw</a:t>
-                      </a:r>
-                      <a:r>
-                        <a:rPr lang="de-DE" sz="1100" b="1" baseline="0" dirty="0">
+                        <a:t>    subw</a:t>
+                      </a:r>
+                      <a:r>
+                        <a:rPr lang="en-US" sz="1100" b="1" baseline="0" noProof="1">
                           <a:solidFill>
                             <a:schemeClr val="tx1"/>
                           </a:solidFill>
@@ -14283,36 +14122,16 @@
                         <a:defRPr/>
                       </a:pPr>
                       <a:r>
-                        <a:rPr lang="de-DE" sz="1100" b="1" baseline="0" dirty="0">
+                        <a:rPr lang="en-US" sz="1100" b="1" baseline="0" noProof="1">
                           <a:solidFill>
                             <a:schemeClr val="tx1"/>
                           </a:solidFill>
                           <a:latin typeface="Courier New"/>
                           <a:cs typeface="Courier New"/>
                         </a:rPr>
-                        <a:t>    </a:t>
-                      </a:r>
-                      <a:r>
-                        <a:rPr lang="de-DE" sz="1100" b="1" baseline="0" dirty="0" err="1">
-                          <a:solidFill>
-                            <a:schemeClr val="tx1"/>
-                          </a:solidFill>
-                          <a:latin typeface="Courier New"/>
-                          <a:cs typeface="Courier New"/>
-                        </a:rPr>
-                        <a:t>leaw</a:t>
-                      </a:r>
-                      <a:r>
-                        <a:rPr lang="de-DE" sz="1100" b="1" baseline="0" dirty="0">
-                          <a:solidFill>
-                            <a:schemeClr val="tx1"/>
-                          </a:solidFill>
-                          <a:latin typeface="Courier New"/>
-                          <a:cs typeface="Courier New"/>
-                        </a:rPr>
-                        <a:t> $LOOP,%A</a:t>
-                      </a:r>
-                      <a:endParaRPr lang="de-DE" sz="1100" b="1" dirty="0">
+                        <a:t>    leaw $LOOP,%A</a:t>
+                      </a:r>
+                      <a:endParaRPr lang="en-US" sz="1100" b="1" noProof="1">
                         <a:solidFill>
                           <a:schemeClr val="tx1"/>
                         </a:solidFill>
@@ -14322,32 +14141,15 @@
                     </a:p>
                     <a:p>
                       <a:r>
-                        <a:rPr lang="de-DE" sz="1100" b="1" dirty="0">
+                        <a:rPr lang="en-US" sz="1100" b="1" noProof="1">
                           <a:solidFill>
                             <a:schemeClr val="tx1"/>
                           </a:solidFill>
                           <a:latin typeface="Courier New"/>
                           <a:cs typeface="Courier New"/>
                         </a:rPr>
-                        <a:t>    </a:t>
-                      </a:r>
-                      <a:r>
-                        <a:rPr lang="de-DE" sz="1100" b="1" dirty="0" err="1">
-                          <a:solidFill>
-                            <a:schemeClr val="tx1"/>
-                          </a:solidFill>
-                          <a:latin typeface="Courier New"/>
-                          <a:cs typeface="Courier New"/>
-                        </a:rPr>
-                        <a:t>jg</a:t>
-                      </a:r>
-                      <a:endParaRPr lang="pt-BR" sz="1100" b="1" dirty="0">
-                        <a:solidFill>
-                          <a:schemeClr val="tx1"/>
-                        </a:solidFill>
-                        <a:latin typeface="Courier New"/>
-                        <a:cs typeface="Courier New"/>
-                      </a:endParaRPr>
+                        <a:t>    jg   %D</a:t>
+                      </a:r>
                     </a:p>
                   </a:txBody>
                   <a:tcPr>
@@ -14411,7 +14213,7 @@
           <p:nvPr>
             <p:extLst>
               <p:ext uri="{D42A27DB-BD31-4B8C-83A1-F6EECF244321}">
-                <p14:modId xmlns:p14="http://schemas.microsoft.com/office/powerpoint/2010/main" val="1869102138"/>
+                <p14:modId xmlns:p14="http://schemas.microsoft.com/office/powerpoint/2010/main" val="1863076519"/>
               </p:ext>
             </p:extLst>
           </p:nvPr>
@@ -14442,93 +14244,56 @@
                     <a:lstStyle/>
                     <a:p>
                       <a:r>
-                        <a:rPr lang="de-DE" sz="1100" b="1" dirty="0">
+                        <a:rPr lang="en-US" sz="1100" b="1" noProof="1">
                           <a:solidFill>
                             <a:schemeClr val="tx1"/>
                           </a:solidFill>
                           <a:latin typeface="Courier New"/>
                           <a:cs typeface="Courier New"/>
                         </a:rPr>
-                        <a:t>    </a:t>
-                      </a:r>
-                      <a:r>
-                        <a:rPr lang="de-DE" sz="1100" b="1" dirty="0" err="1">
+                        <a:t>    leaw</a:t>
+                      </a:r>
+                      <a:r>
+                        <a:rPr lang="en-US" sz="1100" b="1" baseline="0" noProof="1">
                           <a:solidFill>
                             <a:schemeClr val="tx1"/>
                           </a:solidFill>
                           <a:latin typeface="Courier New"/>
                           <a:cs typeface="Courier New"/>
                         </a:rPr>
-                        <a:t>leaw</a:t>
-                      </a:r>
-                      <a:r>
-                        <a:rPr lang="de-DE" sz="1100" b="1" baseline="0" dirty="0">
+                        <a:t> $</a:t>
+                      </a:r>
+                      <a:r>
+                        <a:rPr lang="en-US" sz="1100" b="1" noProof="1">
+                          <a:solidFill>
+                            <a:srgbClr val="00B050"/>
+                          </a:solidFill>
+                          <a:latin typeface="Courier New"/>
+                          <a:cs typeface="Courier New"/>
+                        </a:rPr>
+                        <a:t>i</a:t>
+                      </a:r>
+                      <a:r>
+                        <a:rPr lang="en-US" sz="1100" b="1" noProof="1">
                           <a:solidFill>
                             <a:schemeClr val="tx1"/>
                           </a:solidFill>
                           <a:latin typeface="Courier New"/>
                           <a:cs typeface="Courier New"/>
                         </a:rPr>
-                        <a:t> $</a:t>
-                      </a:r>
-                      <a:r>
-                        <a:rPr lang="de-DE" sz="1100" b="1" dirty="0" err="1">
-                          <a:solidFill>
-                            <a:srgbClr val="00B050"/>
-                          </a:solidFill>
-                          <a:latin typeface="Courier New"/>
-                          <a:cs typeface="Courier New"/>
-                        </a:rPr>
-                        <a:t>i</a:t>
-                      </a:r>
-                      <a:r>
-                        <a:rPr lang="de-DE" sz="1100" b="1" dirty="0" err="1">
+                        <a:t>,%A</a:t>
+                      </a:r>
+                    </a:p>
+                    <a:p>
+                      <a:r>
+                        <a:rPr lang="en-US" sz="1100" b="1" noProof="1">
                           <a:solidFill>
                             <a:schemeClr val="tx1"/>
                           </a:solidFill>
                           <a:latin typeface="Courier New"/>
                           <a:cs typeface="Courier New"/>
                         </a:rPr>
-                        <a:t>,%A</a:t>
-                      </a:r>
-                      <a:endParaRPr lang="de-DE" sz="1100" b="1" dirty="0">
-                        <a:solidFill>
-                          <a:schemeClr val="tx1"/>
-                        </a:solidFill>
-                        <a:latin typeface="Courier New"/>
-                        <a:cs typeface="Courier New"/>
-                      </a:endParaRPr>
-                    </a:p>
-                    <a:p>
-                      <a:r>
-                        <a:rPr lang="de-DE" sz="1100" b="1" dirty="0">
-                          <a:solidFill>
-                            <a:schemeClr val="tx1"/>
-                          </a:solidFill>
-                          <a:latin typeface="Courier New"/>
-                          <a:cs typeface="Courier New"/>
-                        </a:rPr>
-                        <a:t>    </a:t>
-                      </a:r>
-                      <a:r>
-                        <a:rPr lang="de-DE" sz="1100" b="1" dirty="0" err="1">
-                          <a:solidFill>
-                            <a:schemeClr val="tx1"/>
-                          </a:solidFill>
-                          <a:latin typeface="Courier New"/>
-                          <a:cs typeface="Courier New"/>
-                        </a:rPr>
-                        <a:t>movw</a:t>
-                      </a:r>
-                      <a:r>
-                        <a:rPr lang="de-DE" sz="1100" b="1" dirty="0">
-                          <a:solidFill>
-                            <a:schemeClr val="tx1"/>
-                          </a:solidFill>
-                          <a:latin typeface="Courier New"/>
-                          <a:cs typeface="Courier New"/>
-                        </a:rPr>
-                        <a:t> $1,(%A)</a:t>
+                        <a:t>    movw $1,(%A)</a:t>
                       </a:r>
                     </a:p>
                     <a:p>
@@ -14550,47 +14315,113 @@
                         <a:defRPr/>
                       </a:pPr>
                       <a:r>
-                        <a:rPr lang="de-DE" sz="1100" b="1" dirty="0">
+                        <a:rPr lang="en-US" sz="1100" b="1" noProof="1">
                           <a:solidFill>
                             <a:schemeClr val="tx1"/>
                           </a:solidFill>
                           <a:latin typeface="Courier New"/>
                           <a:cs typeface="Courier New"/>
                         </a:rPr>
-                        <a:t>    </a:t>
-                      </a:r>
-                      <a:r>
-                        <a:rPr lang="de-DE" sz="1100" b="1" dirty="0" err="1">
+                        <a:t>    leaw</a:t>
+                      </a:r>
+                      <a:r>
+                        <a:rPr lang="en-US" sz="1100" b="1" baseline="0" noProof="1">
                           <a:solidFill>
                             <a:schemeClr val="tx1"/>
                           </a:solidFill>
                           <a:latin typeface="Courier New"/>
                           <a:cs typeface="Courier New"/>
                         </a:rPr>
-                        <a:t>leaw</a:t>
-                      </a:r>
-                      <a:r>
-                        <a:rPr lang="de-DE" sz="1100" b="1" baseline="0" dirty="0">
+                        <a:t> $</a:t>
+                      </a:r>
+                      <a:r>
+                        <a:rPr lang="en-US" sz="1100" b="1" baseline="0" noProof="1">
+                          <a:solidFill>
+                            <a:srgbClr val="00B050"/>
+                          </a:solidFill>
+                          <a:latin typeface="Courier New"/>
+                          <a:cs typeface="Courier New"/>
+                        </a:rPr>
+                        <a:t>sum</a:t>
+                      </a:r>
+                      <a:r>
+                        <a:rPr lang="en-US" sz="1100" b="1" noProof="1">
                           <a:solidFill>
                             <a:schemeClr val="tx1"/>
                           </a:solidFill>
                           <a:latin typeface="Courier New"/>
                           <a:cs typeface="Courier New"/>
                         </a:rPr>
+                        <a:t>,%A</a:t>
+                      </a:r>
+                    </a:p>
+                    <a:p>
+                      <a:r>
+                        <a:rPr lang="en-US" sz="1100" b="1" noProof="1">
+                          <a:solidFill>
+                            <a:schemeClr val="tx1"/>
+                          </a:solidFill>
+                          <a:latin typeface="Courier New"/>
+                          <a:cs typeface="Courier New"/>
+                        </a:rPr>
+                        <a:t>    movw $0,(%A)</a:t>
+                      </a:r>
+                    </a:p>
+                    <a:p>
+                      <a:r>
+                        <a:rPr lang="en-US" sz="1100" b="1" noProof="1">
+                          <a:solidFill>
+                            <a:srgbClr val="FF0000"/>
+                          </a:solidFill>
+                          <a:latin typeface="Courier New"/>
+                          <a:cs typeface="Courier New"/>
+                        </a:rPr>
+                        <a:t>LOOP</a:t>
+                      </a:r>
+                      <a:r>
+                        <a:rPr lang="en-US" sz="1100" b="1" noProof="1">
+                          <a:solidFill>
+                            <a:schemeClr val="tx1"/>
+                          </a:solidFill>
+                          <a:latin typeface="Courier New"/>
+                          <a:cs typeface="Courier New"/>
+                        </a:rPr>
+                        <a:t>:</a:t>
+                      </a:r>
+                    </a:p>
+                    <a:p>
+                      <a:r>
+                        <a:rPr lang="en-US" sz="1100" b="1" noProof="1">
+                          <a:solidFill>
+                            <a:schemeClr val="tx1"/>
+                          </a:solidFill>
+                          <a:latin typeface="Courier New"/>
+                          <a:cs typeface="Courier New"/>
+                        </a:rPr>
+                        <a:t>    leaw</a:t>
+                      </a:r>
+                      <a:r>
+                        <a:rPr lang="en-US" sz="1100" b="1" baseline="0" noProof="1">
+                          <a:solidFill>
+                            <a:schemeClr val="tx1"/>
+                          </a:solidFill>
+                          <a:latin typeface="Courier New"/>
+                          <a:cs typeface="Courier New"/>
+                        </a:rPr>
                         <a:t> $</a:t>
                       </a:r>
                       <a:r>
-                        <a:rPr lang="de-DE" sz="1100" b="1" baseline="0" dirty="0" err="1">
+                        <a:rPr lang="en-US" sz="1100" b="1" noProof="1">
                           <a:solidFill>
                             <a:srgbClr val="00B050"/>
                           </a:solidFill>
                           <a:latin typeface="Courier New"/>
                           <a:cs typeface="Courier New"/>
                         </a:rPr>
-                        <a:t>sum</a:t>
-                      </a:r>
-                      <a:r>
-                        <a:rPr lang="de-DE" sz="1100" b="1" dirty="0">
+                        <a:t>i</a:t>
+                      </a:r>
+                      <a:r>
+                        <a:rPr lang="en-US" sz="1100" b="1" noProof="1">
                           <a:solidFill>
                             <a:schemeClr val="tx1"/>
                           </a:solidFill>
@@ -14602,147 +14433,14 @@
                     </a:p>
                     <a:p>
                       <a:r>
-                        <a:rPr lang="de-DE" sz="1100" b="1" dirty="0">
+                        <a:rPr lang="en-US" sz="1100" b="1" noProof="1">
                           <a:solidFill>
                             <a:schemeClr val="tx1"/>
                           </a:solidFill>
                           <a:latin typeface="Courier New"/>
                           <a:cs typeface="Courier New"/>
                         </a:rPr>
-                        <a:t>    </a:t>
-                      </a:r>
-                      <a:r>
-                        <a:rPr lang="de-DE" sz="1100" b="1" dirty="0" err="1">
-                          <a:solidFill>
-                            <a:schemeClr val="tx1"/>
-                          </a:solidFill>
-                          <a:latin typeface="Courier New"/>
-                          <a:cs typeface="Courier New"/>
-                        </a:rPr>
-                        <a:t>movw</a:t>
-                      </a:r>
-                      <a:r>
-                        <a:rPr lang="de-DE" sz="1100" b="1" dirty="0">
-                          <a:solidFill>
-                            <a:schemeClr val="tx1"/>
-                          </a:solidFill>
-                          <a:latin typeface="Courier New"/>
-                          <a:cs typeface="Courier New"/>
-                        </a:rPr>
-                        <a:t> $0,(%A)</a:t>
-                      </a:r>
-                    </a:p>
-                    <a:p>
-                      <a:r>
-                        <a:rPr lang="de-DE" sz="1100" b="1" dirty="0">
-                          <a:solidFill>
-                            <a:srgbClr val="FF0000"/>
-                          </a:solidFill>
-                          <a:latin typeface="Courier New"/>
-                          <a:cs typeface="Courier New"/>
-                        </a:rPr>
-                        <a:t>LOOP</a:t>
-                      </a:r>
-                      <a:r>
-                        <a:rPr lang="de-DE" sz="1100" b="1" dirty="0">
-                          <a:solidFill>
-                            <a:schemeClr val="tx1"/>
-                          </a:solidFill>
-                          <a:latin typeface="Courier New"/>
-                          <a:cs typeface="Courier New"/>
-                        </a:rPr>
-                        <a:t>:</a:t>
-                      </a:r>
-                    </a:p>
-                    <a:p>
-                      <a:r>
-                        <a:rPr lang="de-DE" sz="1100" b="1" dirty="0">
-                          <a:solidFill>
-                            <a:schemeClr val="tx1"/>
-                          </a:solidFill>
-                          <a:latin typeface="Courier New"/>
-                          <a:cs typeface="Courier New"/>
-                        </a:rPr>
-                        <a:t>    </a:t>
-                      </a:r>
-                      <a:r>
-                        <a:rPr lang="de-DE" sz="1100" b="1" dirty="0" err="1">
-                          <a:solidFill>
-                            <a:schemeClr val="tx1"/>
-                          </a:solidFill>
-                          <a:latin typeface="Courier New"/>
-                          <a:cs typeface="Courier New"/>
-                        </a:rPr>
-                        <a:t>leaw</a:t>
-                      </a:r>
-                      <a:r>
-                        <a:rPr lang="de-DE" sz="1100" b="1" baseline="0" dirty="0">
-                          <a:solidFill>
-                            <a:schemeClr val="tx1"/>
-                          </a:solidFill>
-                          <a:latin typeface="Courier New"/>
-                          <a:cs typeface="Courier New"/>
-                        </a:rPr>
-                        <a:t> $</a:t>
-                      </a:r>
-                      <a:r>
-                        <a:rPr lang="de-DE" sz="1100" b="1" dirty="0" err="1">
-                          <a:solidFill>
-                            <a:srgbClr val="00B050"/>
-                          </a:solidFill>
-                          <a:latin typeface="Courier New"/>
-                          <a:cs typeface="Courier New"/>
-                        </a:rPr>
-                        <a:t>i</a:t>
-                      </a:r>
-                      <a:r>
-                        <a:rPr lang="de-DE" sz="1100" b="1" dirty="0" err="1">
-                          <a:solidFill>
-                            <a:schemeClr val="tx1"/>
-                          </a:solidFill>
-                          <a:latin typeface="Courier New"/>
-                          <a:cs typeface="Courier New"/>
-                        </a:rPr>
-                        <a:t>,%A</a:t>
-                      </a:r>
-                      <a:endParaRPr lang="de-DE" sz="1100" b="1" dirty="0">
-                        <a:solidFill>
-                          <a:schemeClr val="tx1"/>
-                        </a:solidFill>
-                        <a:latin typeface="Courier New"/>
-                        <a:cs typeface="Courier New"/>
-                      </a:endParaRPr>
-                    </a:p>
-                    <a:p>
-                      <a:r>
-                        <a:rPr lang="de-DE" sz="1100" b="1" dirty="0">
-                          <a:solidFill>
-                            <a:schemeClr val="tx1"/>
-                          </a:solidFill>
-                          <a:latin typeface="Courier New"/>
-                          <a:cs typeface="Courier New"/>
-                        </a:rPr>
-                        <a:t>    </a:t>
-                      </a:r>
-                      <a:r>
-                        <a:rPr lang="de-DE" sz="1100" b="1" dirty="0" err="1">
-                          <a:solidFill>
-                            <a:schemeClr val="tx1"/>
-                          </a:solidFill>
-                          <a:latin typeface="Courier New"/>
-                          <a:cs typeface="Courier New"/>
-                        </a:rPr>
-                        <a:t>movw</a:t>
-                      </a:r>
-                      <a:r>
-                        <a:rPr lang="de-DE" sz="1100" b="1" dirty="0">
-                          <a:solidFill>
-                            <a:schemeClr val="tx1"/>
-                          </a:solidFill>
-                          <a:latin typeface="Courier New"/>
-                          <a:cs typeface="Courier New"/>
-                        </a:rPr>
-                        <a:t> (%A),%D</a:t>
+                        <a:t>    movw (%A),%D</a:t>
                       </a:r>
                     </a:p>
                     <a:p>
@@ -14764,37 +14462,27 @@
                         <a:defRPr/>
                       </a:pPr>
                       <a:r>
-                        <a:rPr lang="de-DE" sz="1100" b="1" dirty="0">
+                        <a:rPr lang="en-US" sz="1100" b="1" noProof="1">
                           <a:solidFill>
                             <a:schemeClr val="tx1"/>
                           </a:solidFill>
                           <a:latin typeface="Courier New"/>
                           <a:cs typeface="Courier New"/>
                         </a:rPr>
-                        <a:t>    </a:t>
-                      </a:r>
-                      <a:r>
-                        <a:rPr lang="de-DE" sz="1100" b="1" dirty="0" err="1">
+                        <a:t>    leaw</a:t>
+                      </a:r>
+                      <a:r>
+                        <a:rPr lang="en-US" sz="1100" b="1" baseline="0" noProof="1">
                           <a:solidFill>
                             <a:schemeClr val="tx1"/>
                           </a:solidFill>
                           <a:latin typeface="Courier New"/>
                           <a:cs typeface="Courier New"/>
                         </a:rPr>
-                        <a:t>leaw</a:t>
-                      </a:r>
-                      <a:r>
-                        <a:rPr lang="de-DE" sz="1100" b="1" baseline="0" dirty="0">
-                          <a:solidFill>
-                            <a:schemeClr val="tx1"/>
-                          </a:solidFill>
-                          <a:latin typeface="Courier New"/>
-                          <a:cs typeface="Courier New"/>
-                        </a:rPr>
                         <a:t> $</a:t>
                       </a:r>
                       <a:r>
-                        <a:rPr lang="de-DE" sz="1100" b="1" dirty="0">
+                        <a:rPr lang="en-US" sz="1100" b="1" noProof="1">
                           <a:solidFill>
                             <a:srgbClr val="00B050"/>
                           </a:solidFill>
@@ -14804,7 +14492,7 @@
                         <a:t>R0</a:t>
                       </a:r>
                       <a:r>
-                        <a:rPr lang="de-DE" sz="1100" b="1" dirty="0">
+                        <a:rPr lang="en-US" sz="1100" b="1" noProof="1">
                           <a:solidFill>
                             <a:schemeClr val="tx1"/>
                           </a:solidFill>
@@ -14833,27 +14521,17 @@
                         <a:defRPr/>
                       </a:pPr>
                       <a:r>
-                        <a:rPr lang="de-DE" sz="1100" b="1" dirty="0">
+                        <a:rPr lang="en-US" sz="1100" b="1" noProof="1">
                           <a:solidFill>
                             <a:schemeClr val="tx1"/>
                           </a:solidFill>
                           <a:latin typeface="Courier New"/>
                           <a:cs typeface="Courier New"/>
                         </a:rPr>
-                        <a:t>    </a:t>
-                      </a:r>
-                      <a:r>
-                        <a:rPr lang="de-DE" sz="1100" b="1" dirty="0" err="1">
-                          <a:solidFill>
-                            <a:schemeClr val="tx1"/>
-                          </a:solidFill>
-                          <a:latin typeface="Courier New"/>
-                          <a:cs typeface="Courier New"/>
-                        </a:rPr>
-                        <a:t>subw</a:t>
-                      </a:r>
-                      <a:r>
-                        <a:rPr lang="de-DE" sz="1100" b="1" baseline="0" dirty="0">
+                        <a:t>    subw</a:t>
+                      </a:r>
+                      <a:r>
+                        <a:rPr lang="en-US" sz="1100" b="1" baseline="0" noProof="1">
                           <a:solidFill>
                             <a:schemeClr val="tx1"/>
                           </a:solidFill>
@@ -14882,56 +14560,36 @@
                         <a:defRPr/>
                       </a:pPr>
                       <a:r>
-                        <a:rPr lang="de-DE" sz="1100" b="1" baseline="0" dirty="0">
+                        <a:rPr lang="en-US" sz="1100" b="1" baseline="0" noProof="1">
                           <a:solidFill>
                             <a:schemeClr val="tx1"/>
                           </a:solidFill>
                           <a:latin typeface="Courier New"/>
                           <a:cs typeface="Courier New"/>
                         </a:rPr>
-                        <a:t>    </a:t>
-                      </a:r>
-                      <a:r>
-                        <a:rPr lang="de-DE" sz="1100" b="1" baseline="0" dirty="0" err="1">
+                        <a:t>    leaw $</a:t>
+                      </a:r>
+                      <a:r>
+                        <a:rPr lang="en-US" sz="1100" b="1" baseline="0" noProof="1">
+                          <a:solidFill>
+                            <a:srgbClr val="00B050"/>
+                          </a:solidFill>
+                          <a:latin typeface="Courier New"/>
+                          <a:cs typeface="Courier New"/>
+                        </a:rPr>
+                        <a:t>LOOP</a:t>
+                      </a:r>
+                      <a:r>
+                        <a:rPr lang="en-US" sz="1100" b="1" baseline="0" noProof="1">
                           <a:solidFill>
                             <a:schemeClr val="tx1"/>
                           </a:solidFill>
                           <a:latin typeface="Courier New"/>
                           <a:cs typeface="Courier New"/>
                         </a:rPr>
-                        <a:t>leaw</a:t>
-                      </a:r>
-                      <a:r>
-                        <a:rPr lang="de-DE" sz="1100" b="1" baseline="0" dirty="0">
-                          <a:solidFill>
-                            <a:schemeClr val="tx1"/>
-                          </a:solidFill>
-                          <a:latin typeface="Courier New"/>
-                          <a:cs typeface="Courier New"/>
-                        </a:rPr>
-                        <a:t> $</a:t>
-                      </a:r>
-                      <a:r>
-                        <a:rPr lang="de-DE" sz="1100" b="1" baseline="0" dirty="0">
-                          <a:solidFill>
-                            <a:srgbClr val="00B050"/>
-                          </a:solidFill>
-                          <a:latin typeface="Courier New"/>
-                          <a:cs typeface="Courier New"/>
-                        </a:rPr>
-                        <a:t>LOOP</a:t>
-                      </a:r>
-                      <a:r>
-                        <a:rPr lang="de-DE" sz="1100" b="1" baseline="0" dirty="0">
-                          <a:solidFill>
-                            <a:schemeClr val="tx1"/>
-                          </a:solidFill>
-                          <a:latin typeface="Courier New"/>
-                          <a:cs typeface="Courier New"/>
-                        </a:rPr>
                         <a:t>,%A</a:t>
                       </a:r>
-                      <a:endParaRPr lang="de-DE" sz="1100" b="1" dirty="0">
+                      <a:endParaRPr lang="en-US" sz="1100" b="1" noProof="1">
                         <a:solidFill>
                           <a:schemeClr val="tx1"/>
                         </a:solidFill>
@@ -14941,32 +14599,15 @@
                     </a:p>
                     <a:p>
                       <a:r>
-                        <a:rPr lang="de-DE" sz="1100" b="1" dirty="0">
+                        <a:rPr lang="en-US" sz="1100" b="1" noProof="1">
                           <a:solidFill>
                             <a:schemeClr val="tx1"/>
                           </a:solidFill>
                           <a:latin typeface="Courier New"/>
                           <a:cs typeface="Courier New"/>
                         </a:rPr>
-                        <a:t>    </a:t>
-                      </a:r>
-                      <a:r>
-                        <a:rPr lang="de-DE" sz="1100" b="1" dirty="0" err="1">
-                          <a:solidFill>
-                            <a:schemeClr val="tx1"/>
-                          </a:solidFill>
-                          <a:latin typeface="Courier New"/>
-                          <a:cs typeface="Courier New"/>
-                        </a:rPr>
-                        <a:t>jg</a:t>
-                      </a:r>
-                      <a:endParaRPr lang="pt-BR" sz="1100" b="1" dirty="0">
-                        <a:solidFill>
-                          <a:schemeClr val="tx1"/>
-                        </a:solidFill>
-                        <a:latin typeface="Courier New"/>
-                        <a:cs typeface="Courier New"/>
-                      </a:endParaRPr>
+                        <a:t>    jg   %D</a:t>
+                      </a:r>
                     </a:p>
                   </a:txBody>
                   <a:tcPr>
@@ -15043,7 +14684,7 @@
           <a:lstStyle/>
           <a:p>
             <a:r>
-              <a:rPr lang="pt-BR"/>
+              <a:rPr lang="en-US" noProof="1"/>
               <a:t>1º </a:t>
             </a:r>
           </a:p>
@@ -15071,7 +14712,7 @@
           <a:lstStyle/>
           <a:p>
             <a:r>
-              <a:rPr lang="pt-BR" dirty="0"/>
+              <a:rPr lang="en-US" noProof="1"/>
               <a:t>2º </a:t>
             </a:r>
           </a:p>
@@ -15350,7 +14991,7 @@
           <a:p>
             <a:r>
               <a:rPr lang="pt-BR" dirty="0"/>
-              <a:t>Por que aprender Assembly ?</a:t>
+              <a:t>Por que aprender Assembly?</a:t>
             </a:r>
           </a:p>
         </p:txBody>
@@ -15430,8 +15071,8 @@
         </p:nvSpPr>
         <p:spPr>
           <a:xfrm>
-            <a:off x="272254" y="2247879"/>
-            <a:ext cx="8604448" cy="3785652"/>
+            <a:off x="269776" y="2060466"/>
+            <a:ext cx="8604448" cy="4278094"/>
           </a:xfrm>
           <a:prstGeom prst="rect">
             <a:avLst/>
@@ -15450,7 +15091,7 @@
           <a:lstStyle/>
           <a:p>
             <a:r>
-              <a:rPr lang="en-US" sz="1500" b="1" dirty="0">
+              <a:rPr lang="en-US" sz="1600" b="1" noProof="1">
                 <a:latin typeface="Courier New"/>
                 <a:cs typeface="Courier New"/>
               </a:rPr>
@@ -15459,7 +15100,7 @@
           </a:p>
           <a:p>
             <a:r>
-              <a:rPr lang="en-US" sz="1500" b="1" dirty="0">
+              <a:rPr lang="en-US" sz="1600" b="1" noProof="1">
                 <a:latin typeface="Courier New"/>
                 <a:cs typeface="Courier New"/>
               </a:rPr>
@@ -15468,7 +15109,7 @@
           </a:p>
           <a:p>
             <a:r>
-              <a:rPr lang="en-US" sz="1500" b="1" dirty="0">
+              <a:rPr lang="en-US" sz="1600" b="1" noProof="1">
                 <a:latin typeface="Courier New"/>
                 <a:cs typeface="Courier New"/>
               </a:rPr>
@@ -15477,7 +15118,7 @@
           </a:p>
           <a:p>
             <a:r>
-              <a:rPr lang="en-US" sz="1500" b="1" dirty="0">
+              <a:rPr lang="en-US" sz="1600" b="1" noProof="1">
                 <a:latin typeface="Courier New"/>
                 <a:cs typeface="Courier New"/>
               </a:rPr>
@@ -15486,7 +15127,7 @@
           </a:p>
           <a:p>
             <a:r>
-              <a:rPr lang="en-US" sz="1500" b="1" dirty="0">
+              <a:rPr lang="en-US" sz="1600" b="1" noProof="1">
                 <a:latin typeface="Courier New"/>
                 <a:cs typeface="Courier New"/>
               </a:rPr>
@@ -15494,79 +15135,51 @@
             </a:r>
           </a:p>
           <a:p>
-            <a:endParaRPr lang="en-US" sz="1500" b="1" dirty="0">
+            <a:endParaRPr lang="en-US" sz="1600" b="1" noProof="1">
               <a:latin typeface="Courier New"/>
               <a:cs typeface="Courier New"/>
             </a:endParaRPr>
           </a:p>
           <a:p>
             <a:r>
-              <a:rPr lang="en-US" sz="1500" b="1" dirty="0">
+              <a:rPr lang="en-US" sz="1600" b="1" noProof="1">
                 <a:latin typeface="Courier New"/>
                 <a:cs typeface="Courier New"/>
               </a:rPr>
-              <a:t>#define __</a:t>
-            </a:r>
-            <a:r>
-              <a:rPr lang="en-US" sz="1500" b="1" dirty="0" err="1">
-                <a:latin typeface="Courier New"/>
-                <a:cs typeface="Courier New"/>
-              </a:rPr>
-              <a:t>xg</a:t>
-            </a:r>
-            <a:r>
-              <a:rPr lang="en-US" sz="1500" b="1" dirty="0">
-                <a:latin typeface="Courier New"/>
-                <a:cs typeface="Courier New"/>
-              </a:rPr>
-              <a:t>(x) ((volatile long *)(x))</a:t>
-            </a:r>
-          </a:p>
-          <a:p>
-            <a:endParaRPr lang="en-US" sz="1500" b="1" dirty="0">
+              <a:t>#define __xg(x) ((volatile long *)(x))</a:t>
+            </a:r>
+          </a:p>
+          <a:p>
+            <a:endParaRPr lang="en-US" sz="1600" b="1" noProof="1">
               <a:latin typeface="Courier New"/>
               <a:cs typeface="Courier New"/>
             </a:endParaRPr>
           </a:p>
           <a:p>
             <a:r>
-              <a:rPr lang="en-US" sz="1500" b="1" dirty="0">
+              <a:rPr lang="en-US" sz="1600" b="1" noProof="1">
                 <a:latin typeface="Courier New"/>
                 <a:cs typeface="Courier New"/>
               </a:rPr>
               <a:t>static inline unsigned long </a:t>
             </a:r>
             <a:br>
-              <a:rPr lang="en-US" sz="1500" b="1" dirty="0">
+              <a:rPr lang="en-US" sz="1600" b="1" noProof="1">
                 <a:latin typeface="Courier New"/>
                 <a:cs typeface="Courier New"/>
               </a:rPr>
             </a:br>
             <a:r>
-              <a:rPr lang="en-US" sz="1500" b="1" dirty="0">
+              <a:rPr lang="en-US" sz="1600" b="1" noProof="1">
                 <a:latin typeface="Courier New"/>
                 <a:cs typeface="Courier New"/>
               </a:rPr>
-              <a:t>   __</a:t>
-            </a:r>
-            <a:r>
-              <a:rPr lang="en-US" sz="1500" b="1" dirty="0" err="1">
-                <a:latin typeface="Courier New"/>
-                <a:cs typeface="Courier New"/>
-              </a:rPr>
-              <a:t>cmpxchg</a:t>
-            </a:r>
-            <a:r>
-              <a:rPr lang="en-US" sz="1500" b="1" dirty="0">
-                <a:latin typeface="Courier New"/>
-                <a:cs typeface="Courier New"/>
-              </a:rPr>
-              <a:t>(volatile void *ptr, unsigned long old, unsigned long newv) {</a:t>
-            </a:r>
-          </a:p>
-          <a:p>
-            <a:r>
-              <a:rPr lang="en-US" sz="1500" b="1" dirty="0">
+              <a:t>  __cmpxchg(volatile void *ptr, uint32_t old, uint32_t newv) {</a:t>
+            </a:r>
+          </a:p>
+          <a:p>
+            <a:r>
+              <a:rPr lang="en-US" sz="1600" b="1" noProof="1">
                 <a:latin typeface="Courier New"/>
                 <a:cs typeface="Courier New"/>
               </a:rPr>
@@ -15575,47 +15188,33 @@
           </a:p>
           <a:p>
             <a:r>
-              <a:rPr lang="en-US" sz="1500" b="1" dirty="0">
+              <a:rPr lang="en-US" sz="1600" b="1" noProof="1">
                 <a:latin typeface="Courier New"/>
                 <a:cs typeface="Courier New"/>
               </a:rPr>
-              <a:t>	__</a:t>
-            </a:r>
-            <a:r>
-              <a:rPr lang="en-US" sz="1500" b="1" dirty="0" err="1">
-                <a:latin typeface="Courier New"/>
-                <a:cs typeface="Courier New"/>
-              </a:rPr>
-              <a:t>asm</a:t>
-            </a:r>
-            <a:r>
-              <a:rPr lang="en-US" sz="1500" b="1" dirty="0">
-                <a:latin typeface="Courier New"/>
-                <a:cs typeface="Courier New"/>
-              </a:rPr>
-              <a:t>__ __volatile__(LOCK_PREFIX "</a:t>
-            </a:r>
-            <a:r>
-              <a:rPr lang="en-US" sz="1500" b="1" dirty="0">
+              <a:t>	__asm__ __volatile__(LOCK_PREFIX "</a:t>
+            </a:r>
+            <a:r>
+              <a:rPr lang="en-US" sz="1600" b="1" noProof="1">
                 <a:solidFill>
                   <a:srgbClr val="FF0000"/>
                 </a:solidFill>
                 <a:latin typeface="Courier New"/>
                 <a:cs typeface="Courier New"/>
               </a:rPr>
-              <a:t>cmpxchgb %b1,%2</a:t>
-            </a:r>
-            <a:r>
-              <a:rPr lang="en-US" sz="1500" b="1" dirty="0">
+              <a:t>cmpxchgl %2,%1</a:t>
+            </a:r>
+            <a:r>
+              <a:rPr lang="en-US" sz="1600" b="1" noProof="1">
                 <a:latin typeface="Courier New"/>
                 <a:cs typeface="Courier New"/>
               </a:rPr>
-              <a:t>”</a:t>
-            </a:r>
-          </a:p>
-          <a:p>
-            <a:r>
-              <a:rPr lang="en-US" sz="1500" b="1" dirty="0">
+              <a:t>"</a:t>
+            </a:r>
+          </a:p>
+          <a:p>
+            <a:r>
+              <a:rPr lang="en-US" sz="1600" b="1" noProof="1">
                 <a:latin typeface="Courier New"/>
                 <a:cs typeface="Courier New"/>
               </a:rPr>
@@ -15624,30 +15223,16 @@
           </a:p>
           <a:p>
             <a:r>
-              <a:rPr lang="en-US" sz="1500" b="1" dirty="0">
+              <a:rPr lang="en-US" sz="1600" b="1" noProof="1">
                 <a:latin typeface="Courier New"/>
                 <a:cs typeface="Courier New"/>
               </a:rPr>
-              <a:t>							: "q"(newv), "m"(*__</a:t>
-            </a:r>
-            <a:r>
-              <a:rPr lang="en-US" sz="1500" b="1" dirty="0" err="1">
-                <a:latin typeface="Courier New"/>
-                <a:cs typeface="Courier New"/>
-              </a:rPr>
-              <a:t>xg</a:t>
-            </a:r>
-            <a:r>
-              <a:rPr lang="en-US" sz="1500" b="1" dirty="0">
-                <a:latin typeface="Courier New"/>
-                <a:cs typeface="Courier New"/>
-              </a:rPr>
-              <a:t>(ptr)), "0"(old)</a:t>
-            </a:r>
-          </a:p>
-          <a:p>
-            <a:r>
-              <a:rPr lang="en-US" sz="1500" b="1" dirty="0">
+              <a:t>							: "q"(newv), "m"(*__xg(ptr)), "0"(old)</a:t>
+            </a:r>
+          </a:p>
+          <a:p>
+            <a:r>
+              <a:rPr lang="en-US" sz="1600" b="1" noProof="1">
                 <a:latin typeface="Courier New"/>
                 <a:cs typeface="Courier New"/>
               </a:rPr>
@@ -15656,16 +15241,21 @@
           </a:p>
           <a:p>
             <a:r>
-              <a:rPr lang="en-US" sz="1500" b="1" dirty="0">
+              <a:rPr lang="en-US" sz="1600" b="1" noProof="1">
                 <a:latin typeface="Courier New"/>
                 <a:cs typeface="Courier New"/>
               </a:rPr>
               <a:t>	return prev;</a:t>
             </a:r>
-            <a:endParaRPr lang="pt-BR" sz="1500" b="1" dirty="0">
-              <a:latin typeface="Courier New"/>
-              <a:cs typeface="Courier New"/>
-            </a:endParaRPr>
+          </a:p>
+          <a:p>
+            <a:r>
+              <a:rPr lang="en-US" sz="1600" b="1" noProof="1">
+                <a:latin typeface="Courier New"/>
+                <a:cs typeface="Courier New"/>
+              </a:rPr>
+              <a:t>}</a:t>
+            </a:r>
           </a:p>
         </p:txBody>
       </p:sp>
@@ -15794,8 +15384,12 @@
               <a:buChar char="•"/>
             </a:pPr>
             <a:r>
+              <a:rPr lang="en-BR" sz="2000" dirty="0"/>
+              <a:t>Grava a instrução de máquina no arquivo de saída</a:t>
+            </a:r>
+            <a:r>
               <a:rPr lang="pt-BR" sz="2000" dirty="0"/>
-              <a:t>Grava a instrução de máquina em um arquivo executável;</a:t>
+              <a:t>;</a:t>
             </a:r>
           </a:p>
         </p:txBody>
@@ -15954,7 +15548,7 @@
             </a:pPr>
             <a:r>
               <a:rPr lang="pt-BR" sz="2400" dirty="0" err="1"/>
-              <a:t>auto-descritivos</a:t>
+              <a:t>autodescritivos</a:t>
             </a:r>
             <a:endParaRPr lang="pt-BR" sz="2400" dirty="0"/>
           </a:p>
@@ -16235,40 +15829,8 @@
               <a:t>O EDSAC (</a:t>
             </a:r>
             <a:r>
-              <a:rPr lang="pt-BR" sz="2000" dirty="0" err="1"/>
-              <a:t>Electronic</a:t>
-            </a:r>
-            <a:r>
-              <a:rPr lang="pt-BR" sz="2000" dirty="0"/>
-              <a:t> </a:t>
-            </a:r>
-            <a:r>
-              <a:rPr lang="pt-BR" sz="2000" dirty="0" err="1"/>
-              <a:t>Delay</a:t>
-            </a:r>
-            <a:r>
-              <a:rPr lang="pt-BR" sz="2000" dirty="0"/>
-              <a:t> </a:t>
-            </a:r>
-            <a:r>
-              <a:rPr lang="pt-BR" sz="2000" dirty="0" err="1"/>
-              <a:t>Storage</a:t>
-            </a:r>
-            <a:r>
-              <a:rPr lang="pt-BR" sz="2000" dirty="0"/>
-              <a:t> </a:t>
-            </a:r>
-            <a:r>
-              <a:rPr lang="pt-BR" sz="2000" dirty="0" err="1"/>
-              <a:t>Automatic</a:t>
-            </a:r>
-            <a:r>
-              <a:rPr lang="pt-BR" sz="2000" dirty="0"/>
-              <a:t> </a:t>
-            </a:r>
-            <a:r>
-              <a:rPr lang="pt-BR" sz="2000" dirty="0" err="1"/>
-              <a:t>Calculator</a:t>
+              <a:rPr lang="en-US" sz="2000" noProof="0" dirty="0"/>
+              <a:t>Electronic Delay Storage Automatic Calculator</a:t>
             </a:r>
             <a:r>
               <a:rPr lang="pt-BR" sz="2000" dirty="0"/>
@@ -16502,7 +16064,7 @@
         <p:spPr>
           <a:xfrm>
             <a:off x="457201" y="1485900"/>
-            <a:ext cx="8385034" cy="1237390"/>
+            <a:ext cx="8385034" cy="1647444"/>
           </a:xfrm>
         </p:spPr>
         <p:txBody>
@@ -16513,7 +16075,7 @@
           <a:p>
             <a:r>
               <a:rPr lang="pt-BR" sz="2400" dirty="0"/>
-              <a:t>Grace Hopper foi uma pioneira na Informática, desenvolvendo linguagens como o </a:t>
+              <a:t>Grace Hopper foi uma pioneira na Informática, contribuindo para o desenvolvimento da linguagem </a:t>
             </a:r>
             <a:r>
               <a:rPr lang="en-US" sz="2400" dirty="0"/>
@@ -16595,7 +16157,7 @@
         </p:blipFill>
         <p:spPr>
           <a:xfrm>
-            <a:off x="6835864" y="2533200"/>
+            <a:off x="6835864" y="2989086"/>
             <a:ext cx="1898810" cy="2857708"/>
           </a:xfrm>
           <a:prstGeom prst="rect">
@@ -16611,7 +16173,7 @@
         </p:nvSpPr>
         <p:spPr>
           <a:xfrm>
-            <a:off x="6835864" y="5361512"/>
+            <a:off x="6835864" y="5817398"/>
             <a:ext cx="2006371" cy="584776"/>
           </a:xfrm>
           <a:prstGeom prst="rect">
@@ -16671,7 +16233,7 @@
         <p:spPr>
           <a:xfrm>
             <a:off x="1117927" y="5405097"/>
-            <a:ext cx="5419060" cy="707886"/>
+            <a:ext cx="5419060" cy="1015663"/>
           </a:xfrm>
           <a:prstGeom prst="rect">
             <a:avLst/>
@@ -16686,7 +16248,7 @@
             <a:pPr algn="ctr"/>
             <a:r>
               <a:rPr lang="pt-BR" sz="2000" dirty="0"/>
-              <a:t>Primeiro caso de um bug (mariposa) sendo encontrado no Mark II por Grace Murray Hopper</a:t>
+              <a:t>Primeiro caso de um bug (mariposa) sendo encontrado no Mark II em 1947 e documentado no diário de operação.</a:t>
             </a:r>
           </a:p>
         </p:txBody>
@@ -16701,11 +16263,11 @@
   <p:clrMapOvr>
     <a:masterClrMapping/>
   </p:clrMapOvr>
-  <mc:AlternateContent xmlns:mc="http://schemas.openxmlformats.org/markup-compatibility/2006">
-    <mc:Choice xmlns:p14="http://schemas.microsoft.com/office/powerpoint/2010/main" Requires="p14">
+  <mc:AlternateContent xmlns:mc="http://schemas.openxmlformats.org/markup-compatibility/2006" xmlns:p14="http://schemas.microsoft.com/office/powerpoint/2010/main">
+    <mc:Choice Requires="p14">
       <p:transition p14:dur="10"/>
     </mc:Choice>
-    <mc:Fallback>
+    <mc:Fallback xmlns="">
       <p:transition/>
     </mc:Fallback>
   </mc:AlternateContent>
@@ -16775,13 +16337,8 @@
           <a:p>
             <a:r>
               <a:rPr lang="pt-BR" sz="2000" dirty="0"/>
-              <a:t>Linguagens Assembly </a:t>
-            </a:r>
-            <a:r>
-              <a:rPr lang="pt-BR" sz="2000"/>
-              <a:t>em notação AT&amp;A.</a:t>
-            </a:r>
-            <a:endParaRPr lang="pt-BR" sz="2000" dirty="0"/>
+              <a:t>Exemplo de linguagem Assembly para a arquitetura MIPS.</a:t>
+            </a:r>
           </a:p>
         </p:txBody>
       </p:sp>
@@ -17086,7 +16643,7 @@
                   <a:latin typeface="Courier New"/>
                   <a:cs typeface="Courier New"/>
                 </a:rPr>
-                <a:t>] = 0</a:t>
+                <a:t>] = MAX_SIZE</a:t>
               </a:r>
             </a:p>
             <a:p>
@@ -17419,30 +16976,16 @@
           <a:lstStyle/>
           <a:p>
             <a:r>
-              <a:rPr lang="it-IT" sz="1100" dirty="0">
+              <a:rPr lang="en-US" sz="1100" noProof="1">
                 <a:latin typeface="Courier"/>
                 <a:cs typeface="Courier"/>
               </a:rPr>
-              <a:t>ce fa ed </a:t>
-            </a:r>
-            <a:r>
-              <a:rPr lang="it-IT" sz="1100" dirty="0" err="1">
-                <a:latin typeface="Courier"/>
-                <a:cs typeface="Courier"/>
-              </a:rPr>
-              <a:t>fe</a:t>
-            </a:r>
-            <a:r>
-              <a:rPr lang="it-IT" sz="1100" dirty="0">
-                <a:latin typeface="Courier"/>
-                <a:cs typeface="Courier"/>
-              </a:rPr>
-              <a:t> 07 00 00 00 03 00 00 00 01 00 00 00</a:t>
-            </a:r>
-          </a:p>
-          <a:p>
-            <a:r>
-              <a:rPr lang="it-IT" sz="1100" dirty="0">
+              <a:t>ce fa ed fe 07 00 00 00 03 00 00 00 01 00 00 00</a:t>
+            </a:r>
+          </a:p>
+          <a:p>
+            <a:r>
+              <a:rPr lang="en-US" sz="1100" noProof="1">
                 <a:latin typeface="Courier"/>
                 <a:cs typeface="Courier"/>
               </a:rPr>
@@ -17451,7 +16994,7 @@
           </a:p>
           <a:p>
             <a:r>
-              <a:rPr lang="it-IT" sz="1100" dirty="0">
+              <a:rPr lang="en-US" sz="1100" noProof="1">
                 <a:latin typeface="Courier"/>
                 <a:cs typeface="Courier"/>
               </a:rPr>
@@ -17460,7 +17003,7 @@
           </a:p>
           <a:p>
             <a:r>
-              <a:rPr lang="it-IT" sz="1100" dirty="0">
+              <a:rPr lang="en-US" sz="1100" noProof="1">
                 <a:latin typeface="Courier"/>
                 <a:cs typeface="Courier"/>
               </a:rPr>
@@ -17469,7 +17012,7 @@
           </a:p>
           <a:p>
             <a:r>
-              <a:rPr lang="it-IT" sz="1100" dirty="0">
+              <a:rPr lang="en-US" sz="1100" noProof="1">
                 <a:latin typeface="Courier"/>
                 <a:cs typeface="Courier"/>
               </a:rPr>
@@ -17478,7 +17021,7 @@
           </a:p>
           <a:p>
             <a:r>
-              <a:rPr lang="it-IT" sz="1100" dirty="0">
+              <a:rPr lang="en-US" sz="1100" noProof="1">
                 <a:latin typeface="Courier"/>
                 <a:cs typeface="Courier"/>
               </a:rPr>
@@ -17487,7 +17030,7 @@
           </a:p>
           <a:p>
             <a:r>
-              <a:rPr lang="it-IT" sz="1100" dirty="0">
+              <a:rPr lang="en-US" sz="1100" noProof="1">
                 <a:latin typeface="Courier"/>
                 <a:cs typeface="Courier"/>
               </a:rPr>
@@ -17496,7 +17039,7 @@
           </a:p>
           <a:p>
             <a:r>
-              <a:rPr lang="it-IT" sz="1100" dirty="0">
+              <a:rPr lang="en-US" sz="1100" noProof="1">
                 <a:latin typeface="Courier"/>
                 <a:cs typeface="Courier"/>
               </a:rPr>
@@ -17505,7 +17048,7 @@
           </a:p>
           <a:p>
             <a:r>
-              <a:rPr lang="it-IT" sz="1100" dirty="0">
+              <a:rPr lang="en-US" sz="1100" noProof="1">
                 <a:latin typeface="Courier"/>
                 <a:cs typeface="Courier"/>
               </a:rPr>
@@ -17514,7 +17057,7 @@
           </a:p>
           <a:p>
             <a:r>
-              <a:rPr lang="it-IT" sz="1100" dirty="0">
+              <a:rPr lang="en-US" sz="1100" noProof="1">
                 <a:latin typeface="Courier"/>
                 <a:cs typeface="Courier"/>
               </a:rPr>
@@ -17523,7 +17066,7 @@
           </a:p>
           <a:p>
             <a:r>
-              <a:rPr lang="it-IT" sz="1100" dirty="0">
+              <a:rPr lang="en-US" sz="1100" noProof="1">
                 <a:latin typeface="Courier"/>
                 <a:cs typeface="Courier"/>
               </a:rPr>
@@ -17532,7 +17075,7 @@
           </a:p>
           <a:p>
             <a:r>
-              <a:rPr lang="it-IT" sz="1100" dirty="0">
+              <a:rPr lang="en-US" sz="1100" noProof="1">
                 <a:latin typeface="Courier"/>
                 <a:cs typeface="Courier"/>
               </a:rPr>
@@ -17541,7 +17084,7 @@
           </a:p>
           <a:p>
             <a:r>
-              <a:rPr lang="da-DK" sz="1100" dirty="0">
+              <a:rPr lang="en-US" sz="1100" noProof="1">
                 <a:latin typeface="Courier"/>
                 <a:cs typeface="Courier"/>
               </a:rPr>
@@ -17550,7 +17093,7 @@
           </a:p>
           <a:p>
             <a:r>
-              <a:rPr lang="da-DK" sz="1100" dirty="0">
+              <a:rPr lang="en-US" sz="1100" noProof="1">
                 <a:latin typeface="Courier"/>
                 <a:cs typeface="Courier"/>
               </a:rPr>
@@ -17559,7 +17102,7 @@
           </a:p>
           <a:p>
             <a:r>
-              <a:rPr lang="de-DE" sz="1100" dirty="0">
+              <a:rPr lang="en-US" sz="1100" noProof="1">
                 <a:latin typeface="Courier"/>
                 <a:cs typeface="Courier"/>
               </a:rPr>
@@ -17568,30 +17111,16 @@
           </a:p>
           <a:p>
             <a:r>
-              <a:rPr lang="cs-CZ" sz="1100" dirty="0">
+              <a:rPr lang="en-US" sz="1100" noProof="1">
                 <a:latin typeface="Courier"/>
                 <a:cs typeface="Courier"/>
               </a:rPr>
-              <a:t>18 00 00 00 8c 01 00 00 04 00 00 00 </a:t>
-            </a:r>
-            <a:r>
-              <a:rPr lang="cs-CZ" sz="1100" dirty="0" err="1">
-                <a:latin typeface="Courier"/>
-                <a:cs typeface="Courier"/>
-              </a:rPr>
-              <a:t>bc</a:t>
-            </a:r>
-            <a:r>
-              <a:rPr lang="cs-CZ" sz="1100" dirty="0">
-                <a:latin typeface="Courier"/>
-                <a:cs typeface="Courier"/>
-              </a:rPr>
-              <a:t> 01 00 00</a:t>
-            </a:r>
-          </a:p>
-          <a:p>
-            <a:r>
-              <a:rPr lang="cs-CZ" sz="1100" dirty="0">
+              <a:t>18 00 00 00 8c 01 00 00 04 00 00 00 bc 01 00 00</a:t>
+            </a:r>
+          </a:p>
+          <a:p>
+            <a:r>
+              <a:rPr lang="en-US" sz="1100" noProof="1">
                 <a:latin typeface="Courier"/>
                 <a:cs typeface="Courier"/>
               </a:rPr>
@@ -17600,7 +17129,7 @@
           </a:p>
           <a:p>
             <a:r>
-              <a:rPr lang="cs-CZ" sz="1100" dirty="0">
+              <a:rPr lang="en-US" sz="1100" noProof="1">
                 <a:latin typeface="Courier"/>
                 <a:cs typeface="Courier"/>
               </a:rPr>
@@ -17609,7 +17138,7 @@
           </a:p>
           <a:p>
             <a:r>
-              <a:rPr lang="cs-CZ" sz="1100" dirty="0">
+              <a:rPr lang="en-US" sz="1100" noProof="1">
                 <a:latin typeface="Courier"/>
                 <a:cs typeface="Courier"/>
               </a:rPr>
@@ -17618,16 +17147,12 @@
           </a:p>
           <a:p>
             <a:r>
-              <a:rPr lang="cs-CZ" sz="1100" dirty="0">
+              <a:rPr lang="en-US" sz="1100" noProof="1">
                 <a:latin typeface="Courier"/>
                 <a:cs typeface="Courier"/>
               </a:rPr>
               <a:t>00 00 00 00 00 00 00 00 00 00 00 00 00 00 00 00</a:t>
             </a:r>
-            <a:endParaRPr lang="pt-BR" sz="1100" dirty="0">
-              <a:latin typeface="Courier"/>
-              <a:cs typeface="Courier"/>
-            </a:endParaRPr>
           </a:p>
         </p:txBody>
       </p:sp>
@@ -17659,167 +17184,74 @@
           <a:lstStyle/>
           <a:p>
             <a:r>
-              <a:rPr lang="nl-NL" sz="2000" b="1" dirty="0" err="1">
+              <a:rPr lang="en-US" sz="2000" b="1" noProof="1">
                 <a:latin typeface="Courier New"/>
                 <a:cs typeface="Courier New"/>
               </a:rPr>
-              <a:t>mov</a:t>
-            </a:r>
-            <a:r>
-              <a:rPr lang="nl-NL" sz="2000" b="1" dirty="0">
+              <a:t>mov	edx,2	</a:t>
+            </a:r>
+          </a:p>
+          <a:p>
+            <a:r>
+              <a:rPr lang="en-US" sz="2000" b="1" noProof="1">
                 <a:latin typeface="Courier New"/>
                 <a:cs typeface="Courier New"/>
               </a:rPr>
-              <a:t>	edx,2	</a:t>
-            </a:r>
-          </a:p>
-          <a:p>
-            <a:r>
-              <a:rPr lang="nl-NL" sz="2000" b="1" dirty="0" err="1">
+              <a:t>mov	esi,4	</a:t>
+            </a:r>
+          </a:p>
+          <a:p>
+            <a:r>
+              <a:rPr lang="en-US" sz="2000" b="1" noProof="1">
                 <a:latin typeface="Courier New"/>
                 <a:cs typeface="Courier New"/>
               </a:rPr>
-              <a:t>mov</a:t>
-            </a:r>
-            <a:r>
-              <a:rPr lang="nl-NL" sz="2000" b="1" dirty="0">
+              <a:t>add	eax,ebx</a:t>
+            </a:r>
+          </a:p>
+          <a:p>
+            <a:r>
+              <a:rPr lang="en-US" sz="2000" b="1" noProof="1">
                 <a:latin typeface="Courier New"/>
                 <a:cs typeface="Courier New"/>
               </a:rPr>
-              <a:t>	esi,4	</a:t>
-            </a:r>
-          </a:p>
-          <a:p>
-            <a:r>
-              <a:rPr lang="nl-NL" sz="2000" b="1" dirty="0" err="1">
+              <a:t>sub	eax,ecx</a:t>
+            </a:r>
+          </a:p>
+          <a:p>
+            <a:r>
+              <a:rPr lang="en-US" sz="2000" b="1" noProof="1">
                 <a:latin typeface="Courier New"/>
                 <a:cs typeface="Courier New"/>
               </a:rPr>
-              <a:t>add</a:t>
-            </a:r>
-            <a:r>
-              <a:rPr lang="nl-NL" sz="2000" b="1" dirty="0">
+              <a:t>imul  edx,eax</a:t>
+            </a:r>
+          </a:p>
+          <a:p>
+            <a:r>
+              <a:rPr lang="en-US" sz="2000" b="1" noProof="1">
                 <a:latin typeface="Courier New"/>
                 <a:cs typeface="Courier New"/>
               </a:rPr>
-              <a:t>	</a:t>
-            </a:r>
-            <a:r>
-              <a:rPr lang="nl-NL" sz="2000" b="1" dirty="0" err="1">
+              <a:t>mov	eax,edx</a:t>
+            </a:r>
+          </a:p>
+          <a:p>
+            <a:r>
+              <a:rPr lang="en-US" sz="2000" b="1" noProof="1">
                 <a:latin typeface="Courier New"/>
                 <a:cs typeface="Courier New"/>
               </a:rPr>
-              <a:t>eax,ebx</a:t>
-            </a:r>
-            <a:endParaRPr lang="nl-NL" sz="2000" b="1" dirty="0">
-              <a:latin typeface="Courier New"/>
-              <a:cs typeface="Courier New"/>
-            </a:endParaRPr>
-          </a:p>
-          <a:p>
-            <a:r>
-              <a:rPr lang="nl-NL" sz="2000" b="1" dirty="0">
+              <a:t>mov	edx,0	</a:t>
+            </a:r>
+          </a:p>
+          <a:p>
+            <a:r>
+              <a:rPr lang="en-US" sz="2000" b="1" noProof="1">
                 <a:latin typeface="Courier New"/>
                 <a:cs typeface="Courier New"/>
               </a:rPr>
-              <a:t>sub	</a:t>
-            </a:r>
-            <a:r>
-              <a:rPr lang="nl-NL" sz="2000" b="1" dirty="0" err="1">
-                <a:latin typeface="Courier New"/>
-                <a:cs typeface="Courier New"/>
-              </a:rPr>
-              <a:t>eax,ecx</a:t>
-            </a:r>
-            <a:endParaRPr lang="nl-NL" sz="2000" b="1" dirty="0">
-              <a:latin typeface="Courier New"/>
-              <a:cs typeface="Courier New"/>
-            </a:endParaRPr>
-          </a:p>
-          <a:p>
-            <a:r>
-              <a:rPr lang="nl-NL" sz="2000" b="1" dirty="0" err="1">
-                <a:latin typeface="Courier New"/>
-                <a:cs typeface="Courier New"/>
-              </a:rPr>
-              <a:t>imul</a:t>
-            </a:r>
-            <a:r>
-              <a:rPr lang="nl-NL" sz="2000" b="1" dirty="0">
-                <a:latin typeface="Courier New"/>
-                <a:cs typeface="Courier New"/>
-              </a:rPr>
-              <a:t>  </a:t>
-            </a:r>
-            <a:r>
-              <a:rPr lang="nl-NL" sz="2000" b="1" dirty="0" err="1">
-                <a:latin typeface="Courier New"/>
-                <a:cs typeface="Courier New"/>
-              </a:rPr>
-              <a:t>edx,eax</a:t>
-            </a:r>
-            <a:endParaRPr lang="nl-NL" sz="2000" b="1" dirty="0">
-              <a:latin typeface="Courier New"/>
-              <a:cs typeface="Courier New"/>
-            </a:endParaRPr>
-          </a:p>
-          <a:p>
-            <a:r>
-              <a:rPr lang="nl-NL" sz="2000" b="1" dirty="0" err="1">
-                <a:latin typeface="Courier New"/>
-                <a:cs typeface="Courier New"/>
-              </a:rPr>
-              <a:t>mov</a:t>
-            </a:r>
-            <a:r>
-              <a:rPr lang="nl-NL" sz="2000" b="1" dirty="0">
-                <a:latin typeface="Courier New"/>
-                <a:cs typeface="Courier New"/>
-              </a:rPr>
-              <a:t>	</a:t>
-            </a:r>
-            <a:r>
-              <a:rPr lang="nl-NL" sz="2000" b="1" dirty="0" err="1">
-                <a:latin typeface="Courier New"/>
-                <a:cs typeface="Courier New"/>
-              </a:rPr>
-              <a:t>eax,edx</a:t>
-            </a:r>
-            <a:endParaRPr lang="nl-NL" sz="2000" b="1" dirty="0">
-              <a:latin typeface="Courier New"/>
-              <a:cs typeface="Courier New"/>
-            </a:endParaRPr>
-          </a:p>
-          <a:p>
-            <a:r>
-              <a:rPr lang="nl-NL" sz="2000" b="1" dirty="0" err="1">
-                <a:latin typeface="Courier New"/>
-                <a:cs typeface="Courier New"/>
-              </a:rPr>
-              <a:t>mov</a:t>
-            </a:r>
-            <a:r>
-              <a:rPr lang="nl-NL" sz="2000" b="1" dirty="0">
-                <a:latin typeface="Courier New"/>
-                <a:cs typeface="Courier New"/>
-              </a:rPr>
-              <a:t>	edx,0	</a:t>
-            </a:r>
-          </a:p>
-          <a:p>
-            <a:r>
-              <a:rPr lang="nl-NL" sz="2000" b="1" dirty="0" err="1">
-                <a:latin typeface="Courier New"/>
-                <a:cs typeface="Courier New"/>
-              </a:rPr>
-              <a:t>cmp</a:t>
-            </a:r>
-            <a:r>
-              <a:rPr lang="nl-NL" sz="2000" b="1" dirty="0">
-                <a:latin typeface="Courier New"/>
-                <a:cs typeface="Courier New"/>
-              </a:rPr>
-              <a:t>   esi,0</a:t>
+              <a:t>cmp   esi,0</a:t>
             </a:r>
           </a:p>
         </p:txBody>
@@ -17908,8 +17340,8 @@
         </p:nvSpPr>
         <p:spPr>
           <a:xfrm>
-            <a:off x="5530173" y="6058772"/>
-            <a:ext cx="1789097" cy="523220"/>
+            <a:off x="5220324" y="6058772"/>
+            <a:ext cx="2408801" cy="523220"/>
           </a:xfrm>
           <a:prstGeom prst="rect">
             <a:avLst/>
@@ -17928,7 +17360,7 @@
                   <a:srgbClr val="FF0000"/>
                 </a:solidFill>
               </a:rPr>
-              <a:t>Executável</a:t>
+              <a:t>Arquivo objeto</a:t>
             </a:r>
           </a:p>
         </p:txBody>
@@ -17980,13 +17412,8 @@
           <a:p>
             <a:r>
               <a:rPr lang="pt-BR" dirty="0"/>
-              <a:t>Tipos de </a:t>
-            </a:r>
-            <a:r>
-              <a:rPr lang="pt-BR" dirty="0" err="1"/>
-              <a:t>Assemblers</a:t>
-            </a:r>
-            <a:endParaRPr lang="pt-BR" dirty="0"/>
+              <a:t>Sintaxes de Assembly: exemplos x86</a:t>
+            </a:r>
           </a:p>
         </p:txBody>
       </p:sp>
@@ -18071,7 +17498,7 @@
           <p:nvPr>
             <p:extLst>
               <p:ext uri="{D42A27DB-BD31-4B8C-83A1-F6EECF244321}">
-                <p14:modId xmlns:p14="http://schemas.microsoft.com/office/powerpoint/2010/main" val="2067546026"/>
+                <p14:modId xmlns:p14="http://schemas.microsoft.com/office/powerpoint/2010/main" val="1912556920"/>
               </p:ext>
             </p:extLst>
           </p:nvPr>
@@ -18142,7 +17569,7 @@
                         </a:tabLst>
                       </a:pPr>
                       <a:r>
-                        <a:rPr lang="pt-BR" sz="1300" b="1" dirty="0">
+                        <a:rPr lang="en-US" sz="1300" b="1" noProof="1">
                           <a:solidFill>
                             <a:srgbClr val="000000"/>
                           </a:solidFill>
@@ -18182,7 +17609,7 @@
                         </a:tabLst>
                       </a:pPr>
                       <a:r>
-                        <a:rPr lang="pt-BR" sz="1300" b="1" dirty="0">
+                        <a:rPr lang="en-US" sz="1300" b="1" noProof="1">
                           <a:solidFill>
                             <a:srgbClr val="000000"/>
                           </a:solidFill>
@@ -18222,7 +17649,7 @@
                         </a:tabLst>
                       </a:pPr>
                       <a:r>
-                        <a:rPr lang="pt-BR" sz="1300" b="1" dirty="0">
+                        <a:rPr lang="en-US" sz="1300" b="1" noProof="1">
                           <a:solidFill>
                             <a:srgbClr val="000000"/>
                           </a:solidFill>
@@ -18262,7 +17689,7 @@
                         </a:tabLst>
                       </a:pPr>
                       <a:r>
-                        <a:rPr lang="pt-BR" sz="1300" b="1" dirty="0">
+                        <a:rPr lang="en-US" sz="1300" b="1" noProof="1">
                           <a:solidFill>
                             <a:srgbClr val="000000"/>
                           </a:solidFill>
@@ -18302,7 +17729,7 @@
                         </a:tabLst>
                       </a:pPr>
                       <a:r>
-                        <a:rPr lang="pt-BR" sz="1300" b="1" dirty="0">
+                        <a:rPr lang="en-US" sz="1300" b="1" noProof="1">
                           <a:solidFill>
                             <a:srgbClr val="000000"/>
                           </a:solidFill>
@@ -18342,7 +17769,7 @@
                         </a:tabLst>
                       </a:pPr>
                       <a:r>
-                        <a:rPr lang="pt-BR" sz="1300" b="1" dirty="0">
+                        <a:rPr lang="en-US" sz="1300" b="1" noProof="1">
                           <a:solidFill>
                             <a:srgbClr val="000000"/>
                           </a:solidFill>
@@ -18382,7 +17809,7 @@
                         </a:tabLst>
                       </a:pPr>
                       <a:r>
-                        <a:rPr lang="pt-BR" sz="1300" b="1" dirty="0">
+                        <a:rPr lang="en-US" sz="1300" b="1" noProof="1">
                           <a:solidFill>
                             <a:srgbClr val="000000"/>
                           </a:solidFill>
@@ -18422,7 +17849,7 @@
                         </a:tabLst>
                       </a:pPr>
                       <a:r>
-                        <a:rPr lang="pt-BR" sz="1300" b="1" dirty="0">
+                        <a:rPr lang="en-US" sz="1300" b="1" noProof="1">
                           <a:solidFill>
                             <a:srgbClr val="000000"/>
                           </a:solidFill>
@@ -18462,7 +17889,7 @@
                         </a:tabLst>
                       </a:pPr>
                       <a:r>
-                        <a:rPr lang="pt-BR" sz="1300" b="1" dirty="0">
+                        <a:rPr lang="en-US" sz="1300" b="1" noProof="1">
                           <a:solidFill>
                             <a:srgbClr val="000000"/>
                           </a:solidFill>
@@ -18502,7 +17929,7 @@
                         </a:tabLst>
                       </a:pPr>
                       <a:r>
-                        <a:rPr lang="pt-BR" sz="1300" b="1" dirty="0">
+                        <a:rPr lang="en-US" sz="1300" b="1" noProof="1">
                           <a:solidFill>
                             <a:srgbClr val="000000"/>
                           </a:solidFill>
@@ -18542,7 +17969,7 @@
                         </a:tabLst>
                       </a:pPr>
                       <a:r>
-                        <a:rPr lang="pt-BR" sz="1300" b="1" dirty="0">
+                        <a:rPr lang="en-US" sz="1300" b="1" noProof="1">
                           <a:solidFill>
                             <a:srgbClr val="000000"/>
                           </a:solidFill>
@@ -18582,7 +18009,7 @@
                         </a:tabLst>
                       </a:pPr>
                       <a:r>
-                        <a:rPr lang="pt-BR" sz="1300" b="1" dirty="0">
+                        <a:rPr lang="en-US" sz="1300" b="1" noProof="1">
                           <a:solidFill>
                             <a:srgbClr val="000000"/>
                           </a:solidFill>
@@ -18622,7 +18049,7 @@
                         </a:tabLst>
                       </a:pPr>
                       <a:r>
-                        <a:rPr lang="pt-BR" sz="1300" b="1" dirty="0">
+                        <a:rPr lang="en-US" sz="1300" b="1" noProof="1">
                           <a:solidFill>
                             <a:srgbClr val="000000"/>
                           </a:solidFill>
@@ -18662,7 +18089,7 @@
                         </a:tabLst>
                       </a:pPr>
                       <a:r>
-                        <a:rPr lang="pt-BR" sz="1300" b="1" dirty="0">
+                        <a:rPr lang="en-US" sz="1300" b="1" noProof="1">
                           <a:solidFill>
                             <a:srgbClr val="000000"/>
                           </a:solidFill>
@@ -18702,7 +18129,7 @@
                         </a:tabLst>
                       </a:pPr>
                       <a:r>
-                        <a:rPr lang="pt-BR" sz="1300" b="1" dirty="0">
+                        <a:rPr lang="en-US" sz="1300" b="1" noProof="1">
                           <a:solidFill>
                             <a:srgbClr val="000000"/>
                           </a:solidFill>
@@ -18742,7 +18169,7 @@
                         </a:tabLst>
                       </a:pPr>
                       <a:r>
-                        <a:rPr lang="pt-BR" sz="1300" b="1" dirty="0">
+                        <a:rPr lang="en-US" sz="1300" b="1" noProof="1">
                           <a:solidFill>
                             <a:srgbClr val="000000"/>
                           </a:solidFill>
@@ -18753,7 +18180,7 @@
                         </a:rPr>
                         <a:t>016</a:t>
                       </a:r>
-                      <a:endParaRPr lang="pt-BR" sz="1300" b="1" dirty="0">
+                      <a:endParaRPr lang="en-US" sz="1300" b="1" noProof="1">
                         <a:effectLst/>
                         <a:latin typeface="Courier New"/>
                         <a:ea typeface="ＭＳ 明朝"/>
@@ -18835,7 +18262,7 @@
                         </a:tabLst>
                       </a:pPr>
                       <a:r>
-                        <a:rPr lang="pt-BR" sz="1300" b="1" dirty="0">
+                        <a:rPr lang="en-US" sz="1300" b="1" noProof="1">
                           <a:solidFill>
                             <a:srgbClr val="000000"/>
                           </a:solidFill>
@@ -18844,77 +18271,8 @@
                           <a:ea typeface="ＭＳ 明朝"/>
                           <a:cs typeface="Courier New"/>
                         </a:rPr>
-                        <a:t>; </a:t>
-                      </a:r>
-                      <a:r>
-                        <a:rPr lang="pt-BR" sz="1300" b="1" dirty="0" err="1">
-                          <a:solidFill>
-                            <a:srgbClr val="000000"/>
-                          </a:solidFill>
-                          <a:effectLst/>
-                          <a:latin typeface="Courier New"/>
-                          <a:ea typeface="ＭＳ 明朝"/>
-                          <a:cs typeface="Courier New"/>
-                        </a:rPr>
-                        <a:t>Text</a:t>
-                      </a:r>
-                      <a:r>
-                        <a:rPr lang="pt-BR" sz="1300" b="1" dirty="0">
-                          <a:solidFill>
-                            <a:srgbClr val="000000"/>
-                          </a:solidFill>
-                          <a:effectLst/>
-                          <a:latin typeface="Courier New"/>
-                          <a:ea typeface="ＭＳ 明朝"/>
-                          <a:cs typeface="Courier New"/>
-                        </a:rPr>
-                        <a:t> </a:t>
-                      </a:r>
-                      <a:r>
-                        <a:rPr lang="pt-BR" sz="1300" b="1" dirty="0" err="1">
-                          <a:solidFill>
-                            <a:srgbClr val="000000"/>
-                          </a:solidFill>
-                          <a:effectLst/>
-                          <a:latin typeface="Courier New"/>
-                          <a:ea typeface="ＭＳ 明朝"/>
-                          <a:cs typeface="Courier New"/>
-                        </a:rPr>
-                        <a:t>segment</a:t>
-                      </a:r>
-                      <a:r>
-                        <a:rPr lang="pt-BR" sz="1300" b="1" dirty="0">
-                          <a:solidFill>
-                            <a:srgbClr val="000000"/>
-                          </a:solidFill>
-                          <a:effectLst/>
-                          <a:latin typeface="Courier New"/>
-                          <a:ea typeface="ＭＳ 明朝"/>
-                          <a:cs typeface="Courier New"/>
-                        </a:rPr>
-                        <a:t> </a:t>
-                      </a:r>
-                      <a:r>
-                        <a:rPr lang="pt-BR" sz="1300" b="1" dirty="0" err="1">
-                          <a:solidFill>
-                            <a:srgbClr val="000000"/>
-                          </a:solidFill>
-                          <a:effectLst/>
-                          <a:latin typeface="Courier New"/>
-                          <a:ea typeface="ＭＳ 明朝"/>
-                          <a:cs typeface="Courier New"/>
-                        </a:rPr>
-                        <a:t>begins</a:t>
-                      </a:r>
-                      <a:endParaRPr lang="pt-BR" sz="1300" b="1" dirty="0">
-                        <a:solidFill>
-                          <a:srgbClr val="000000"/>
-                        </a:solidFill>
-                        <a:effectLst/>
-                        <a:latin typeface="Courier New"/>
-                        <a:ea typeface="ＭＳ 明朝"/>
-                        <a:cs typeface="Courier New"/>
-                      </a:endParaRPr>
+                        <a:t>; Text segment begins</a:t>
+                      </a:r>
                     </a:p>
                     <a:p>
                       <a:pPr fontAlgn="base">
@@ -18944,7 +18302,7 @@
                         </a:tabLst>
                       </a:pPr>
                       <a:r>
-                        <a:rPr lang="pt-BR" sz="1300" b="1" dirty="0">
+                        <a:rPr lang="en-US" sz="1300" b="1" noProof="1">
                           <a:solidFill>
                             <a:srgbClr val="000000"/>
                           </a:solidFill>
@@ -18953,53 +18311,8 @@
                           <a:ea typeface="ＭＳ 明朝"/>
                           <a:cs typeface="Courier New"/>
                         </a:rPr>
-                        <a:t> </a:t>
-                      </a:r>
-                      <a:r>
-                        <a:rPr lang="pt-BR" sz="1300" b="1" dirty="0" err="1">
-                          <a:solidFill>
-                            <a:srgbClr val="000000"/>
-                          </a:solidFill>
-                          <a:effectLst/>
-                          <a:latin typeface="Courier New"/>
-                          <a:ea typeface="ＭＳ 明朝"/>
-                          <a:cs typeface="Courier New"/>
-                        </a:rPr>
-                        <a:t>section</a:t>
-                      </a:r>
-                      <a:r>
-                        <a:rPr lang="pt-BR" sz="1300" b="1" dirty="0">
-                          <a:solidFill>
-                            <a:srgbClr val="000000"/>
-                          </a:solidFill>
-                          <a:effectLst/>
-                          <a:latin typeface="Courier New"/>
-                          <a:ea typeface="ＭＳ 明朝"/>
-                          <a:cs typeface="Courier New"/>
-                        </a:rPr>
-                        <a:t> .</a:t>
-                      </a:r>
-                      <a:r>
-                        <a:rPr lang="pt-BR" sz="1300" b="1" dirty="0" err="1">
-                          <a:solidFill>
-                            <a:srgbClr val="000000"/>
-                          </a:solidFill>
-                          <a:effectLst/>
-                          <a:latin typeface="Courier New"/>
-                          <a:ea typeface="ＭＳ 明朝"/>
-                          <a:cs typeface="Courier New"/>
-                        </a:rPr>
-                        <a:t>text</a:t>
-                      </a:r>
-                      <a:endParaRPr lang="pt-BR" sz="1300" b="1" dirty="0">
-                        <a:solidFill>
-                          <a:srgbClr val="000000"/>
-                        </a:solidFill>
-                        <a:effectLst/>
-                        <a:latin typeface="Courier New"/>
-                        <a:ea typeface="ＭＳ 明朝"/>
-                        <a:cs typeface="Courier New"/>
-                      </a:endParaRPr>
+                        <a:t> section .text</a:t>
+                      </a:r>
                     </a:p>
                     <a:p>
                       <a:pPr fontAlgn="base">
@@ -19028,7 +18341,7 @@
                           <a:tab pos="9306560" algn="l"/>
                         </a:tabLst>
                       </a:pPr>
-                      <a:endParaRPr lang="pt-BR" sz="1300" b="1" dirty="0">
+                      <a:endParaRPr lang="en-US" sz="1300" b="1" noProof="1">
                         <a:solidFill>
                           <a:srgbClr val="000000"/>
                         </a:solidFill>
@@ -19066,7 +18379,7 @@
                         </a:tabLst>
                       </a:pPr>
                       <a:r>
-                        <a:rPr lang="pt-BR" sz="1300" b="1" dirty="0">
+                        <a:rPr lang="en-US" sz="1300" b="1" noProof="1">
                           <a:solidFill>
                             <a:srgbClr val="000000"/>
                           </a:solidFill>
@@ -19105,7 +18418,7 @@
                           <a:tab pos="9306560" algn="l"/>
                         </a:tabLst>
                       </a:pPr>
-                      <a:endParaRPr lang="pt-BR" sz="1300" b="1" dirty="0">
+                      <a:endParaRPr lang="en-US" sz="1300" b="1" noProof="1">
                         <a:solidFill>
                           <a:srgbClr val="000000"/>
                         </a:solidFill>
@@ -19143,7 +18456,7 @@
                         </a:tabLst>
                       </a:pPr>
                       <a:r>
-                        <a:rPr lang="pt-BR" sz="1300" b="1" dirty="0">
+                        <a:rPr lang="en-US" sz="1300" b="1" noProof="1">
                           <a:solidFill>
                             <a:srgbClr val="000000"/>
                           </a:solidFill>
@@ -19152,55 +18465,7 @@
                           <a:ea typeface="ＭＳ 明朝"/>
                           <a:cs typeface="Courier New"/>
                         </a:rPr>
-                        <a:t>; </a:t>
-                      </a:r>
-                      <a:r>
-                        <a:rPr lang="pt-BR" sz="1300" b="1" dirty="0" err="1">
-                          <a:solidFill>
-                            <a:srgbClr val="000000"/>
-                          </a:solidFill>
-                          <a:effectLst/>
-                          <a:latin typeface="Courier New"/>
-                          <a:ea typeface="ＭＳ 明朝"/>
-                          <a:cs typeface="Courier New"/>
-                        </a:rPr>
-                        <a:t>Program</a:t>
-                      </a:r>
-                      <a:r>
-                        <a:rPr lang="pt-BR" sz="1300" b="1" dirty="0">
-                          <a:solidFill>
-                            <a:srgbClr val="000000"/>
-                          </a:solidFill>
-                          <a:effectLst/>
-                          <a:latin typeface="Courier New"/>
-                          <a:ea typeface="ＭＳ 明朝"/>
-                          <a:cs typeface="Courier New"/>
-                        </a:rPr>
-                        <a:t> </a:t>
-                      </a:r>
-                      <a:r>
-                        <a:rPr lang="pt-BR" sz="1300" b="1" dirty="0" err="1">
-                          <a:solidFill>
-                            <a:srgbClr val="000000"/>
-                          </a:solidFill>
-                          <a:effectLst/>
-                          <a:latin typeface="Courier New"/>
-                          <a:ea typeface="ＭＳ 明朝"/>
-                          <a:cs typeface="Courier New"/>
-                        </a:rPr>
-                        <a:t>entry</a:t>
-                      </a:r>
-                      <a:r>
-                        <a:rPr lang="pt-BR" sz="1300" b="1" dirty="0">
-                          <a:solidFill>
-                            <a:srgbClr val="000000"/>
-                          </a:solidFill>
-                          <a:effectLst/>
-                          <a:latin typeface="Courier New"/>
-                          <a:ea typeface="ＭＳ 明朝"/>
-                          <a:cs typeface="Courier New"/>
-                        </a:rPr>
-                        <a:t> point</a:t>
+                        <a:t>; Program entry point</a:t>
                       </a:r>
                     </a:p>
                     <a:p>
@@ -19231,7 +18496,7 @@
                         </a:tabLst>
                       </a:pPr>
                       <a:r>
-                        <a:rPr lang="pt-BR" sz="1300" b="1" dirty="0">
+                        <a:rPr lang="en-US" sz="1300" b="1" noProof="1">
                           <a:solidFill>
                             <a:srgbClr val="000000"/>
                           </a:solidFill>
@@ -19270,7 +18535,7 @@
                           <a:tab pos="9306560" algn="l"/>
                         </a:tabLst>
                       </a:pPr>
-                      <a:endParaRPr lang="pt-BR" sz="1300" b="1" dirty="0">
+                      <a:endParaRPr lang="en-US" sz="1300" b="1" noProof="1">
                         <a:solidFill>
                           <a:srgbClr val="000000"/>
                         </a:solidFill>
@@ -19308,7 +18573,7 @@
                         </a:tabLst>
                       </a:pPr>
                       <a:r>
-                        <a:rPr lang="pt-BR" sz="1300" b="1" dirty="0">
+                        <a:rPr lang="en-US" sz="1300" b="1" noProof="1">
                           <a:solidFill>
                             <a:srgbClr val="000000"/>
                           </a:solidFill>
@@ -19317,125 +18582,8 @@
                           <a:ea typeface="ＭＳ 明朝"/>
                           <a:cs typeface="Courier New"/>
                         </a:rPr>
-                        <a:t>; </a:t>
-                      </a:r>
-                      <a:r>
-                        <a:rPr lang="pt-BR" sz="1300" b="1" dirty="0" err="1">
-                          <a:solidFill>
-                            <a:srgbClr val="000000"/>
-                          </a:solidFill>
-                          <a:effectLst/>
-                          <a:latin typeface="Courier New"/>
-                          <a:ea typeface="ＭＳ 明朝"/>
-                          <a:cs typeface="Courier New"/>
-                        </a:rPr>
-                        <a:t>Put</a:t>
-                      </a:r>
-                      <a:r>
-                        <a:rPr lang="pt-BR" sz="1300" b="1" dirty="0">
-                          <a:solidFill>
-                            <a:srgbClr val="000000"/>
-                          </a:solidFill>
-                          <a:effectLst/>
-                          <a:latin typeface="Courier New"/>
-                          <a:ea typeface="ＭＳ 明朝"/>
-                          <a:cs typeface="Courier New"/>
-                        </a:rPr>
-                        <a:t> </a:t>
-                      </a:r>
-                      <a:r>
-                        <a:rPr lang="pt-BR" sz="1300" b="1" dirty="0" err="1">
-                          <a:solidFill>
-                            <a:srgbClr val="000000"/>
-                          </a:solidFill>
-                          <a:effectLst/>
-                          <a:latin typeface="Courier New"/>
-                          <a:ea typeface="ＭＳ 明朝"/>
-                          <a:cs typeface="Courier New"/>
-                        </a:rPr>
-                        <a:t>the</a:t>
-                      </a:r>
-                      <a:r>
-                        <a:rPr lang="pt-BR" sz="1300" b="1" dirty="0">
-                          <a:solidFill>
-                            <a:srgbClr val="000000"/>
-                          </a:solidFill>
-                          <a:effectLst/>
-                          <a:latin typeface="Courier New"/>
-                          <a:ea typeface="ＭＳ 明朝"/>
-                          <a:cs typeface="Courier New"/>
-                        </a:rPr>
-                        <a:t> </a:t>
-                      </a:r>
-                      <a:r>
-                        <a:rPr lang="pt-BR" sz="1300" b="1" dirty="0" err="1">
-                          <a:solidFill>
-                            <a:srgbClr val="000000"/>
-                          </a:solidFill>
-                          <a:effectLst/>
-                          <a:latin typeface="Courier New"/>
-                          <a:ea typeface="ＭＳ 明朝"/>
-                          <a:cs typeface="Courier New"/>
-                        </a:rPr>
-                        <a:t>code</a:t>
-                      </a:r>
-                      <a:r>
-                        <a:rPr lang="pt-BR" sz="1300" b="1" dirty="0">
-                          <a:solidFill>
-                            <a:srgbClr val="000000"/>
-                          </a:solidFill>
-                          <a:effectLst/>
-                          <a:latin typeface="Courier New"/>
-                          <a:ea typeface="ＭＳ 明朝"/>
-                          <a:cs typeface="Courier New"/>
-                        </a:rPr>
-                        <a:t> </a:t>
-                      </a:r>
-                      <a:r>
-                        <a:rPr lang="pt-BR" sz="1300" b="1" dirty="0" err="1">
-                          <a:solidFill>
-                            <a:srgbClr val="000000"/>
-                          </a:solidFill>
-                          <a:effectLst/>
-                          <a:latin typeface="Courier New"/>
-                          <a:ea typeface="ＭＳ 明朝"/>
-                          <a:cs typeface="Courier New"/>
-                        </a:rPr>
-                        <a:t>number</a:t>
-                      </a:r>
-                      <a:r>
-                        <a:rPr lang="pt-BR" sz="1300" b="1" dirty="0">
-                          <a:solidFill>
-                            <a:srgbClr val="000000"/>
-                          </a:solidFill>
-                          <a:effectLst/>
-                          <a:latin typeface="Courier New"/>
-                          <a:ea typeface="ＭＳ 明朝"/>
-                          <a:cs typeface="Courier New"/>
-                        </a:rPr>
-                        <a:t> for system </a:t>
-                      </a:r>
-                      <a:r>
-                        <a:rPr lang="pt-BR" sz="1300" b="1" dirty="0" err="1">
-                          <a:solidFill>
-                            <a:srgbClr val="000000"/>
-                          </a:solidFill>
-                          <a:effectLst/>
-                          <a:latin typeface="Courier New"/>
-                          <a:ea typeface="ＭＳ 明朝"/>
-                          <a:cs typeface="Courier New"/>
-                        </a:rPr>
-                        <a:t>call</a:t>
-                      </a:r>
-                      <a:endParaRPr lang="pt-BR" sz="1300" b="1" dirty="0">
-                        <a:solidFill>
-                          <a:srgbClr val="000000"/>
-                        </a:solidFill>
-                        <a:effectLst/>
-                        <a:latin typeface="Courier New"/>
-                        <a:ea typeface="ＭＳ 明朝"/>
-                        <a:cs typeface="Courier New"/>
-                      </a:endParaRPr>
+                        <a:t>; Put the code number for system call</a:t>
+                      </a:r>
                     </a:p>
                     <a:p>
                       <a:pPr fontAlgn="base">
@@ -19465,7 +18613,7 @@
                         </a:tabLst>
                       </a:pPr>
                       <a:r>
-                        <a:rPr lang="pt-BR" sz="1300" b="1" dirty="0">
+                        <a:rPr lang="en-US" sz="1300" b="1" noProof="1">
                           <a:solidFill>
                             <a:srgbClr val="000000"/>
                           </a:solidFill>
@@ -19474,55 +18622,7 @@
                           <a:ea typeface="ＭＳ 明朝"/>
                           <a:cs typeface="Courier New"/>
                         </a:rPr>
-                        <a:t>       </a:t>
-                      </a:r>
-                      <a:r>
-                        <a:rPr lang="pt-BR" sz="1300" b="1" dirty="0" err="1">
-                          <a:solidFill>
-                            <a:srgbClr val="000000"/>
-                          </a:solidFill>
-                          <a:effectLst/>
-                          <a:latin typeface="Courier New"/>
-                          <a:ea typeface="ＭＳ 明朝"/>
-                          <a:cs typeface="Courier New"/>
-                        </a:rPr>
-                        <a:t>mov</a:t>
-                      </a:r>
-                      <a:r>
-                        <a:rPr lang="pt-BR" sz="1300" b="1" dirty="0">
-                          <a:solidFill>
-                            <a:srgbClr val="000000"/>
-                          </a:solidFill>
-                          <a:effectLst/>
-                          <a:latin typeface="Courier New"/>
-                          <a:ea typeface="ＭＳ 明朝"/>
-                          <a:cs typeface="Courier New"/>
-                        </a:rPr>
-                        <a:t>   </a:t>
-                      </a:r>
-                      <a:r>
-                        <a:rPr lang="pt-BR" sz="1300" b="1" dirty="0" err="1">
-                          <a:solidFill>
-                            <a:srgbClr val="000000"/>
-                          </a:solidFill>
-                          <a:effectLst/>
-                          <a:latin typeface="Courier New"/>
-                          <a:ea typeface="ＭＳ 明朝"/>
-                          <a:cs typeface="Courier New"/>
-                        </a:rPr>
-                        <a:t>eax</a:t>
-                      </a:r>
-                      <a:r>
-                        <a:rPr lang="pt-BR" sz="1300" b="1" dirty="0">
-                          <a:solidFill>
-                            <a:srgbClr val="000000"/>
-                          </a:solidFill>
-                          <a:effectLst/>
-                          <a:latin typeface="Courier New"/>
-                          <a:ea typeface="ＭＳ 明朝"/>
-                          <a:cs typeface="Courier New"/>
-                        </a:rPr>
-                        <a:t>, 1   </a:t>
+                        <a:t>       mov   eax, 1   </a:t>
                       </a:r>
                     </a:p>
                     <a:p>
@@ -19552,7 +18652,7 @@
                           <a:tab pos="9306560" algn="l"/>
                         </a:tabLst>
                       </a:pPr>
-                      <a:endParaRPr lang="pt-BR" sz="1300" b="1" dirty="0">
+                      <a:endParaRPr lang="en-US" sz="1300" b="1" noProof="1">
                         <a:solidFill>
                           <a:srgbClr val="000000"/>
                         </a:solidFill>
@@ -19590,7 +18690,7 @@
                         </a:tabLst>
                       </a:pPr>
                       <a:r>
-                        <a:rPr lang="pt-BR" sz="1300" b="1" dirty="0">
+                        <a:rPr lang="en-US" sz="1300" b="1" noProof="1">
                           <a:solidFill>
                             <a:srgbClr val="000000"/>
                           </a:solidFill>
@@ -19599,53 +18699,8 @@
                           <a:ea typeface="ＭＳ 明朝"/>
                           <a:cs typeface="Courier New"/>
                         </a:rPr>
-                        <a:t>; </a:t>
-                      </a:r>
-                      <a:r>
-                        <a:rPr lang="pt-BR" sz="1300" b="1" dirty="0" err="1">
-                          <a:solidFill>
-                            <a:srgbClr val="000000"/>
-                          </a:solidFill>
-                          <a:effectLst/>
-                          <a:latin typeface="Courier New"/>
-                          <a:ea typeface="ＭＳ 明朝"/>
-                          <a:cs typeface="Courier New"/>
-                        </a:rPr>
-                        <a:t>Return</a:t>
-                      </a:r>
-                      <a:r>
-                        <a:rPr lang="pt-BR" sz="1300" b="1" dirty="0">
-                          <a:solidFill>
-                            <a:srgbClr val="000000"/>
-                          </a:solidFill>
-                          <a:effectLst/>
-                          <a:latin typeface="Courier New"/>
-                          <a:ea typeface="ＭＳ 明朝"/>
-                          <a:cs typeface="Courier New"/>
-                        </a:rPr>
-                        <a:t> </a:t>
-                      </a:r>
-                      <a:r>
-                        <a:rPr lang="pt-BR" sz="1300" b="1" dirty="0" err="1">
-                          <a:solidFill>
-                            <a:srgbClr val="000000"/>
-                          </a:solidFill>
-                          <a:effectLst/>
-                          <a:latin typeface="Courier New"/>
-                          <a:ea typeface="ＭＳ 明朝"/>
-                          <a:cs typeface="Courier New"/>
-                        </a:rPr>
-                        <a:t>value</a:t>
-                      </a:r>
-                      <a:endParaRPr lang="pt-BR" sz="1300" b="1" dirty="0">
-                        <a:solidFill>
-                          <a:srgbClr val="000000"/>
-                        </a:solidFill>
-                        <a:effectLst/>
-                        <a:latin typeface="Courier New"/>
-                        <a:ea typeface="ＭＳ 明朝"/>
-                        <a:cs typeface="Courier New"/>
-                      </a:endParaRPr>
+                        <a:t>; Return value</a:t>
+                      </a:r>
                     </a:p>
                     <a:p>
                       <a:pPr fontAlgn="base">
@@ -19675,7 +18730,7 @@
                         </a:tabLst>
                       </a:pPr>
                       <a:r>
-                        <a:rPr lang="pt-BR" sz="1300" b="1" dirty="0">
+                        <a:rPr lang="en-US" sz="1300" b="1" noProof="1">
                           <a:solidFill>
                             <a:srgbClr val="000000"/>
                           </a:solidFill>
@@ -19684,55 +18739,7 @@
                           <a:ea typeface="ＭＳ 明朝"/>
                           <a:cs typeface="Courier New"/>
                         </a:rPr>
-                        <a:t>        </a:t>
-                      </a:r>
-                      <a:r>
-                        <a:rPr lang="pt-BR" sz="1300" b="1" dirty="0" err="1">
-                          <a:solidFill>
-                            <a:srgbClr val="000000"/>
-                          </a:solidFill>
-                          <a:effectLst/>
-                          <a:latin typeface="Courier New"/>
-                          <a:ea typeface="ＭＳ 明朝"/>
-                          <a:cs typeface="Courier New"/>
-                        </a:rPr>
-                        <a:t>mov</a:t>
-                      </a:r>
-                      <a:r>
-                        <a:rPr lang="pt-BR" sz="1300" b="1" dirty="0">
-                          <a:solidFill>
-                            <a:srgbClr val="000000"/>
-                          </a:solidFill>
-                          <a:effectLst/>
-                          <a:latin typeface="Courier New"/>
-                          <a:ea typeface="ＭＳ 明朝"/>
-                          <a:cs typeface="Courier New"/>
-                        </a:rPr>
-                        <a:t>   </a:t>
-                      </a:r>
-                      <a:r>
-                        <a:rPr lang="pt-BR" sz="1300" b="1" dirty="0" err="1">
-                          <a:solidFill>
-                            <a:srgbClr val="000000"/>
-                          </a:solidFill>
-                          <a:effectLst/>
-                          <a:latin typeface="Courier New"/>
-                          <a:ea typeface="ＭＳ 明朝"/>
-                          <a:cs typeface="Courier New"/>
-                        </a:rPr>
-                        <a:t>ebx</a:t>
-                      </a:r>
-                      <a:r>
-                        <a:rPr lang="pt-BR" sz="1300" b="1" dirty="0">
-                          <a:solidFill>
-                            <a:srgbClr val="000000"/>
-                          </a:solidFill>
-                          <a:effectLst/>
-                          <a:latin typeface="Courier New"/>
-                          <a:ea typeface="ＭＳ 明朝"/>
-                          <a:cs typeface="Courier New"/>
-                        </a:rPr>
-                        <a:t>, 2  </a:t>
+                        <a:t>        mov   ebx, 2  </a:t>
                       </a:r>
                     </a:p>
                     <a:p>
@@ -19762,7 +18769,7 @@
                           <a:tab pos="9306560" algn="l"/>
                         </a:tabLst>
                       </a:pPr>
-                      <a:endParaRPr lang="pt-BR" sz="1300" b="1" dirty="0">
+                      <a:endParaRPr lang="en-US" sz="1300" b="1" noProof="1">
                         <a:solidFill>
                           <a:srgbClr val="000000"/>
                         </a:solidFill>
@@ -19800,7 +18807,7 @@
                         </a:tabLst>
                       </a:pPr>
                       <a:r>
-                        <a:rPr lang="pt-BR" sz="1300" b="1" dirty="0">
+                        <a:rPr lang="en-US" sz="1300" b="1" noProof="1">
                           <a:solidFill>
                             <a:srgbClr val="000000"/>
                           </a:solidFill>
@@ -19809,55 +18816,7 @@
                           <a:ea typeface="ＭＳ 明朝"/>
                           <a:cs typeface="Courier New"/>
                         </a:rPr>
-                        <a:t>; </a:t>
-                      </a:r>
-                      <a:r>
-                        <a:rPr lang="pt-BR" sz="1300" b="1" dirty="0" err="1">
-                          <a:solidFill>
-                            <a:srgbClr val="000000"/>
-                          </a:solidFill>
-                          <a:effectLst/>
-                          <a:latin typeface="Courier New"/>
-                          <a:ea typeface="ＭＳ 明朝"/>
-                          <a:cs typeface="Courier New"/>
-                        </a:rPr>
-                        <a:t>Call</a:t>
-                      </a:r>
-                      <a:r>
-                        <a:rPr lang="pt-BR" sz="1300" b="1" dirty="0">
-                          <a:solidFill>
-                            <a:srgbClr val="000000"/>
-                          </a:solidFill>
-                          <a:effectLst/>
-                          <a:latin typeface="Courier New"/>
-                          <a:ea typeface="ＭＳ 明朝"/>
-                          <a:cs typeface="Courier New"/>
-                        </a:rPr>
-                        <a:t> </a:t>
-                      </a:r>
-                      <a:r>
-                        <a:rPr lang="pt-BR" sz="1300" b="1" dirty="0" err="1">
-                          <a:solidFill>
-                            <a:srgbClr val="000000"/>
-                          </a:solidFill>
-                          <a:effectLst/>
-                          <a:latin typeface="Courier New"/>
-                          <a:ea typeface="ＭＳ 明朝"/>
-                          <a:cs typeface="Courier New"/>
-                        </a:rPr>
-                        <a:t>the</a:t>
-                      </a:r>
-                      <a:r>
-                        <a:rPr lang="pt-BR" sz="1300" b="1" dirty="0">
-                          <a:solidFill>
-                            <a:srgbClr val="000000"/>
-                          </a:solidFill>
-                          <a:effectLst/>
-                          <a:latin typeface="Courier New"/>
-                          <a:ea typeface="ＭＳ 明朝"/>
-                          <a:cs typeface="Courier New"/>
-                        </a:rPr>
-                        <a:t> OS</a:t>
+                        <a:t>; Call the OS</a:t>
                       </a:r>
                     </a:p>
                     <a:p>
@@ -19888,7 +18847,7 @@
                         </a:tabLst>
                       </a:pPr>
                       <a:r>
-                        <a:rPr lang="pt-BR" sz="1300" b="1" dirty="0">
+                        <a:rPr lang="en-US" sz="1300" b="1" noProof="1">
                           <a:solidFill>
                             <a:srgbClr val="000000"/>
                           </a:solidFill>
@@ -19897,33 +18856,9 @@
                           <a:ea typeface="ＭＳ 明朝"/>
                           <a:cs typeface="Courier New"/>
                         </a:rPr>
-                        <a:t>       </a:t>
-                      </a:r>
-                      <a:r>
-                        <a:rPr lang="pt-BR" sz="1300" b="1" dirty="0" err="1">
-                          <a:solidFill>
-                            <a:srgbClr val="000000"/>
-                          </a:solidFill>
-                          <a:effectLst/>
-                          <a:latin typeface="Courier New"/>
-                          <a:ea typeface="ＭＳ 明朝"/>
-                          <a:cs typeface="Courier New"/>
-                        </a:rPr>
-                        <a:t>int</a:t>
-                      </a:r>
-                      <a:r>
-                        <a:rPr lang="pt-BR" sz="1300" b="1" dirty="0">
-                          <a:solidFill>
-                            <a:srgbClr val="000000"/>
-                          </a:solidFill>
-                          <a:effectLst/>
-                          <a:latin typeface="Courier New"/>
-                          <a:ea typeface="ＭＳ 明朝"/>
-                          <a:cs typeface="Courier New"/>
-                        </a:rPr>
-                        <a:t>   80h</a:t>
-                      </a:r>
-                      <a:endParaRPr lang="pt-BR" sz="1300" b="1" dirty="0">
+                        <a:t>       int   80h</a:t>
+                      </a:r>
+                      <a:endParaRPr lang="en-US" sz="1300" b="1" noProof="1">
                         <a:effectLst/>
                         <a:latin typeface="Courier New"/>
                         <a:ea typeface="ＭＳ 明朝"/>
@@ -20005,7 +18940,7 @@
                         </a:tabLst>
                       </a:pPr>
                       <a:r>
-                        <a:rPr lang="pt-BR" sz="1300" b="1" dirty="0">
+                        <a:rPr lang="en-US" sz="1300" b="1" noProof="1">
                           <a:solidFill>
                             <a:srgbClr val="000000"/>
                           </a:solidFill>
@@ -20014,77 +18949,8 @@
                           <a:ea typeface="ＭＳ 明朝"/>
                           <a:cs typeface="Courier New"/>
                         </a:rPr>
-                        <a:t># </a:t>
-                      </a:r>
-                      <a:r>
-                        <a:rPr lang="pt-BR" sz="1300" b="1" dirty="0" err="1">
-                          <a:solidFill>
-                            <a:srgbClr val="000000"/>
-                          </a:solidFill>
-                          <a:effectLst/>
-                          <a:latin typeface="Courier New"/>
-                          <a:ea typeface="ＭＳ 明朝"/>
-                          <a:cs typeface="Courier New"/>
-                        </a:rPr>
-                        <a:t>Text</a:t>
-                      </a:r>
-                      <a:r>
-                        <a:rPr lang="pt-BR" sz="1300" b="1" dirty="0">
-                          <a:solidFill>
-                            <a:srgbClr val="000000"/>
-                          </a:solidFill>
-                          <a:effectLst/>
-                          <a:latin typeface="Courier New"/>
-                          <a:ea typeface="ＭＳ 明朝"/>
-                          <a:cs typeface="Courier New"/>
-                        </a:rPr>
-                        <a:t> </a:t>
-                      </a:r>
-                      <a:r>
-                        <a:rPr lang="pt-BR" sz="1300" b="1" dirty="0" err="1">
-                          <a:solidFill>
-                            <a:srgbClr val="000000"/>
-                          </a:solidFill>
-                          <a:effectLst/>
-                          <a:latin typeface="Courier New"/>
-                          <a:ea typeface="ＭＳ 明朝"/>
-                          <a:cs typeface="Courier New"/>
-                        </a:rPr>
-                        <a:t>segment</a:t>
-                      </a:r>
-                      <a:r>
-                        <a:rPr lang="pt-BR" sz="1300" b="1" dirty="0">
-                          <a:solidFill>
-                            <a:srgbClr val="000000"/>
-                          </a:solidFill>
-                          <a:effectLst/>
-                          <a:latin typeface="Courier New"/>
-                          <a:ea typeface="ＭＳ 明朝"/>
-                          <a:cs typeface="Courier New"/>
-                        </a:rPr>
-                        <a:t> </a:t>
-                      </a:r>
-                      <a:r>
-                        <a:rPr lang="pt-BR" sz="1300" b="1" dirty="0" err="1">
-                          <a:solidFill>
-                            <a:srgbClr val="000000"/>
-                          </a:solidFill>
-                          <a:effectLst/>
-                          <a:latin typeface="Courier New"/>
-                          <a:ea typeface="ＭＳ 明朝"/>
-                          <a:cs typeface="Courier New"/>
-                        </a:rPr>
-                        <a:t>begins</a:t>
-                      </a:r>
-                      <a:endParaRPr lang="pt-BR" sz="1300" b="1" dirty="0">
-                        <a:solidFill>
-                          <a:srgbClr val="000000"/>
-                        </a:solidFill>
-                        <a:effectLst/>
-                        <a:latin typeface="Courier New"/>
-                        <a:ea typeface="ＭＳ 明朝"/>
-                        <a:cs typeface="Courier New"/>
-                      </a:endParaRPr>
+                        <a:t># Text segment begins</a:t>
+                      </a:r>
                     </a:p>
                     <a:p>
                       <a:pPr fontAlgn="base">
@@ -20114,7 +18980,7 @@
                         </a:tabLst>
                       </a:pPr>
                       <a:r>
-                        <a:rPr lang="pt-BR" sz="1300" b="1" dirty="0">
+                        <a:rPr lang="en-US" sz="1300" b="1" noProof="1">
                           <a:solidFill>
                             <a:srgbClr val="000000"/>
                           </a:solidFill>
@@ -20123,53 +18989,8 @@
                           <a:ea typeface="ＭＳ 明朝"/>
                           <a:cs typeface="Courier New"/>
                         </a:rPr>
-                        <a:t>.</a:t>
-                      </a:r>
-                      <a:r>
-                        <a:rPr lang="pt-BR" sz="1300" b="1" dirty="0" err="1">
-                          <a:solidFill>
-                            <a:srgbClr val="000000"/>
-                          </a:solidFill>
-                          <a:effectLst/>
-                          <a:latin typeface="Courier New"/>
-                          <a:ea typeface="ＭＳ 明朝"/>
-                          <a:cs typeface="Courier New"/>
-                        </a:rPr>
-                        <a:t>section</a:t>
-                      </a:r>
-                      <a:r>
-                        <a:rPr lang="pt-BR" sz="1300" b="1" dirty="0">
-                          <a:solidFill>
-                            <a:srgbClr val="000000"/>
-                          </a:solidFill>
-                          <a:effectLst/>
-                          <a:latin typeface="Courier New"/>
-                          <a:ea typeface="ＭＳ 明朝"/>
-                          <a:cs typeface="Courier New"/>
-                        </a:rPr>
-                        <a:t> .</a:t>
-                      </a:r>
-                      <a:r>
-                        <a:rPr lang="pt-BR" sz="1300" b="1" dirty="0" err="1">
-                          <a:solidFill>
-                            <a:srgbClr val="000000"/>
-                          </a:solidFill>
-                          <a:effectLst/>
-                          <a:latin typeface="Courier New"/>
-                          <a:ea typeface="ＭＳ 明朝"/>
-                          <a:cs typeface="Courier New"/>
-                        </a:rPr>
-                        <a:t>text</a:t>
-                      </a:r>
-                      <a:endParaRPr lang="pt-BR" sz="1300" b="1" dirty="0">
-                        <a:solidFill>
-                          <a:srgbClr val="000000"/>
-                        </a:solidFill>
-                        <a:effectLst/>
-                        <a:latin typeface="Courier New"/>
-                        <a:ea typeface="ＭＳ 明朝"/>
-                        <a:cs typeface="Courier New"/>
-                      </a:endParaRPr>
+                        <a:t>.section .text</a:t>
+                      </a:r>
                     </a:p>
                     <a:p>
                       <a:pPr fontAlgn="base">
@@ -20198,7 +19019,7 @@
                           <a:tab pos="9306560" algn="l"/>
                         </a:tabLst>
                       </a:pPr>
-                      <a:endParaRPr lang="pt-BR" sz="1300" b="1" dirty="0">
+                      <a:endParaRPr lang="en-US" sz="1300" b="1" noProof="1">
                         <a:solidFill>
                           <a:srgbClr val="000000"/>
                         </a:solidFill>
@@ -20236,7 +19057,7 @@
                         </a:tabLst>
                       </a:pPr>
                       <a:r>
-                        <a:rPr lang="pt-BR" sz="1300" b="1" dirty="0">
+                        <a:rPr lang="en-US" sz="1300" b="1" noProof="1">
                           <a:solidFill>
                             <a:srgbClr val="000000"/>
                           </a:solidFill>
@@ -20245,31 +19066,7 @@
                           <a:ea typeface="ＭＳ 明朝"/>
                           <a:cs typeface="Courier New"/>
                         </a:rPr>
-                        <a:t>     .</a:t>
-                      </a:r>
-                      <a:r>
-                        <a:rPr lang="pt-BR" sz="1300" b="1" dirty="0" err="1">
-                          <a:solidFill>
-                            <a:srgbClr val="000000"/>
-                          </a:solidFill>
-                          <a:effectLst/>
-                          <a:latin typeface="Courier New"/>
-                          <a:ea typeface="ＭＳ 明朝"/>
-                          <a:cs typeface="Courier New"/>
-                        </a:rPr>
-                        <a:t>globl</a:t>
-                      </a:r>
-                      <a:r>
-                        <a:rPr lang="pt-BR" sz="1300" b="1" dirty="0">
-                          <a:solidFill>
-                            <a:srgbClr val="000000"/>
-                          </a:solidFill>
-                          <a:effectLst/>
-                          <a:latin typeface="Courier New"/>
-                          <a:ea typeface="ＭＳ 明朝"/>
-                          <a:cs typeface="Courier New"/>
-                        </a:rPr>
-                        <a:t> _start</a:t>
+                        <a:t>     .globl _start</a:t>
                       </a:r>
                     </a:p>
                     <a:p>
@@ -20299,7 +19096,7 @@
                           <a:tab pos="9306560" algn="l"/>
                         </a:tabLst>
                       </a:pPr>
-                      <a:endParaRPr lang="pt-BR" sz="1300" b="1" dirty="0">
+                      <a:endParaRPr lang="en-US" sz="1300" b="1" noProof="1">
                         <a:solidFill>
                           <a:srgbClr val="000000"/>
                         </a:solidFill>
@@ -20337,7 +19134,7 @@
                         </a:tabLst>
                       </a:pPr>
                       <a:r>
-                        <a:rPr lang="pt-BR" sz="1300" b="1" dirty="0">
+                        <a:rPr lang="en-US" sz="1300" b="1" noProof="1">
                           <a:solidFill>
                             <a:srgbClr val="000000"/>
                           </a:solidFill>
@@ -20346,55 +19143,7 @@
                           <a:ea typeface="ＭＳ 明朝"/>
                           <a:cs typeface="Courier New"/>
                         </a:rPr>
-                        <a:t># </a:t>
-                      </a:r>
-                      <a:r>
-                        <a:rPr lang="pt-BR" sz="1300" b="1" dirty="0" err="1">
-                          <a:solidFill>
-                            <a:srgbClr val="000000"/>
-                          </a:solidFill>
-                          <a:effectLst/>
-                          <a:latin typeface="Courier New"/>
-                          <a:ea typeface="ＭＳ 明朝"/>
-                          <a:cs typeface="Courier New"/>
-                        </a:rPr>
-                        <a:t>Program</a:t>
-                      </a:r>
-                      <a:r>
-                        <a:rPr lang="pt-BR" sz="1300" b="1" dirty="0">
-                          <a:solidFill>
-                            <a:srgbClr val="000000"/>
-                          </a:solidFill>
-                          <a:effectLst/>
-                          <a:latin typeface="Courier New"/>
-                          <a:ea typeface="ＭＳ 明朝"/>
-                          <a:cs typeface="Courier New"/>
-                        </a:rPr>
-                        <a:t> </a:t>
-                      </a:r>
-                      <a:r>
-                        <a:rPr lang="pt-BR" sz="1300" b="1" dirty="0" err="1">
-                          <a:solidFill>
-                            <a:srgbClr val="000000"/>
-                          </a:solidFill>
-                          <a:effectLst/>
-                          <a:latin typeface="Courier New"/>
-                          <a:ea typeface="ＭＳ 明朝"/>
-                          <a:cs typeface="Courier New"/>
-                        </a:rPr>
-                        <a:t>entry</a:t>
-                      </a:r>
-                      <a:r>
-                        <a:rPr lang="pt-BR" sz="1300" b="1" dirty="0">
-                          <a:solidFill>
-                            <a:srgbClr val="000000"/>
-                          </a:solidFill>
-                          <a:effectLst/>
-                          <a:latin typeface="Courier New"/>
-                          <a:ea typeface="ＭＳ 明朝"/>
-                          <a:cs typeface="Courier New"/>
-                        </a:rPr>
-                        <a:t> point</a:t>
+                        <a:t># Program entry point</a:t>
                       </a:r>
                     </a:p>
                     <a:p>
@@ -20425,7 +19174,7 @@
                         </a:tabLst>
                       </a:pPr>
                       <a:r>
-                        <a:rPr lang="pt-BR" sz="1300" b="1" dirty="0">
+                        <a:rPr lang="en-US" sz="1300" b="1" noProof="1">
                           <a:solidFill>
                             <a:srgbClr val="000000"/>
                           </a:solidFill>
@@ -20464,7 +19213,7 @@
                           <a:tab pos="9306560" algn="l"/>
                         </a:tabLst>
                       </a:pPr>
-                      <a:endParaRPr lang="pt-BR" sz="1300" b="1" dirty="0">
+                      <a:endParaRPr lang="en-US" sz="1300" b="1" noProof="1">
                         <a:solidFill>
                           <a:srgbClr val="000000"/>
                         </a:solidFill>
@@ -20502,7 +19251,7 @@
                         </a:tabLst>
                       </a:pPr>
                       <a:r>
-                        <a:rPr lang="pt-BR" sz="1300" b="1" dirty="0">
+                        <a:rPr lang="en-US" sz="1300" b="1" noProof="1">
                           <a:solidFill>
                             <a:srgbClr val="000000"/>
                           </a:solidFill>
@@ -20511,125 +19260,8 @@
                           <a:ea typeface="ＭＳ 明朝"/>
                           <a:cs typeface="Courier New"/>
                         </a:rPr>
-                        <a:t># </a:t>
-                      </a:r>
-                      <a:r>
-                        <a:rPr lang="pt-BR" sz="1300" b="1" dirty="0" err="1">
-                          <a:solidFill>
-                            <a:srgbClr val="000000"/>
-                          </a:solidFill>
-                          <a:effectLst/>
-                          <a:latin typeface="Courier New"/>
-                          <a:ea typeface="ＭＳ 明朝"/>
-                          <a:cs typeface="Courier New"/>
-                        </a:rPr>
-                        <a:t>Put</a:t>
-                      </a:r>
-                      <a:r>
-                        <a:rPr lang="pt-BR" sz="1300" b="1" dirty="0">
-                          <a:solidFill>
-                            <a:srgbClr val="000000"/>
-                          </a:solidFill>
-                          <a:effectLst/>
-                          <a:latin typeface="Courier New"/>
-                          <a:ea typeface="ＭＳ 明朝"/>
-                          <a:cs typeface="Courier New"/>
-                        </a:rPr>
-                        <a:t> </a:t>
-                      </a:r>
-                      <a:r>
-                        <a:rPr lang="pt-BR" sz="1300" b="1" dirty="0" err="1">
-                          <a:solidFill>
-                            <a:srgbClr val="000000"/>
-                          </a:solidFill>
-                          <a:effectLst/>
-                          <a:latin typeface="Courier New"/>
-                          <a:ea typeface="ＭＳ 明朝"/>
-                          <a:cs typeface="Courier New"/>
-                        </a:rPr>
-                        <a:t>the</a:t>
-                      </a:r>
-                      <a:r>
-                        <a:rPr lang="pt-BR" sz="1300" b="1" dirty="0">
-                          <a:solidFill>
-                            <a:srgbClr val="000000"/>
-                          </a:solidFill>
-                          <a:effectLst/>
-                          <a:latin typeface="Courier New"/>
-                          <a:ea typeface="ＭＳ 明朝"/>
-                          <a:cs typeface="Courier New"/>
-                        </a:rPr>
-                        <a:t> </a:t>
-                      </a:r>
-                      <a:r>
-                        <a:rPr lang="pt-BR" sz="1300" b="1" dirty="0" err="1">
-                          <a:solidFill>
-                            <a:srgbClr val="000000"/>
-                          </a:solidFill>
-                          <a:effectLst/>
-                          <a:latin typeface="Courier New"/>
-                          <a:ea typeface="ＭＳ 明朝"/>
-                          <a:cs typeface="Courier New"/>
-                        </a:rPr>
-                        <a:t>code</a:t>
-                      </a:r>
-                      <a:r>
-                        <a:rPr lang="pt-BR" sz="1300" b="1" dirty="0">
-                          <a:solidFill>
-                            <a:srgbClr val="000000"/>
-                          </a:solidFill>
-                          <a:effectLst/>
-                          <a:latin typeface="Courier New"/>
-                          <a:ea typeface="ＭＳ 明朝"/>
-                          <a:cs typeface="Courier New"/>
-                        </a:rPr>
-                        <a:t> </a:t>
-                      </a:r>
-                      <a:r>
-                        <a:rPr lang="pt-BR" sz="1300" b="1" dirty="0" err="1">
-                          <a:solidFill>
-                            <a:srgbClr val="000000"/>
-                          </a:solidFill>
-                          <a:effectLst/>
-                          <a:latin typeface="Courier New"/>
-                          <a:ea typeface="ＭＳ 明朝"/>
-                          <a:cs typeface="Courier New"/>
-                        </a:rPr>
-                        <a:t>number</a:t>
-                      </a:r>
-                      <a:r>
-                        <a:rPr lang="pt-BR" sz="1300" b="1" dirty="0">
-                          <a:solidFill>
-                            <a:srgbClr val="000000"/>
-                          </a:solidFill>
-                          <a:effectLst/>
-                          <a:latin typeface="Courier New"/>
-                          <a:ea typeface="ＭＳ 明朝"/>
-                          <a:cs typeface="Courier New"/>
-                        </a:rPr>
-                        <a:t> for system </a:t>
-                      </a:r>
-                      <a:r>
-                        <a:rPr lang="pt-BR" sz="1300" b="1" dirty="0" err="1">
-                          <a:solidFill>
-                            <a:srgbClr val="000000"/>
-                          </a:solidFill>
-                          <a:effectLst/>
-                          <a:latin typeface="Courier New"/>
-                          <a:ea typeface="ＭＳ 明朝"/>
-                          <a:cs typeface="Courier New"/>
-                        </a:rPr>
-                        <a:t>call</a:t>
-                      </a:r>
-                      <a:endParaRPr lang="pt-BR" sz="1300" b="1" dirty="0">
-                        <a:solidFill>
-                          <a:srgbClr val="000000"/>
-                        </a:solidFill>
-                        <a:effectLst/>
-                        <a:latin typeface="Courier New"/>
-                        <a:ea typeface="ＭＳ 明朝"/>
-                        <a:cs typeface="Courier New"/>
-                      </a:endParaRPr>
+                        <a:t># Put the code number for system call</a:t>
+                      </a:r>
                     </a:p>
                     <a:p>
                       <a:pPr fontAlgn="base">
@@ -20659,7 +19291,7 @@
                         </a:tabLst>
                       </a:pPr>
                       <a:r>
-                        <a:rPr lang="pt-BR" sz="1300" b="1" dirty="0">
+                        <a:rPr lang="en-US" sz="1300" b="1" noProof="1">
                           <a:solidFill>
                             <a:srgbClr val="000000"/>
                           </a:solidFill>
@@ -20668,55 +19300,7 @@
                           <a:ea typeface="ＭＳ 明朝"/>
                           <a:cs typeface="Courier New"/>
                         </a:rPr>
-                        <a:t>       </a:t>
-                      </a:r>
-                      <a:r>
-                        <a:rPr lang="pt-BR" sz="1300" b="1" dirty="0" err="1">
-                          <a:solidFill>
-                            <a:srgbClr val="000000"/>
-                          </a:solidFill>
-                          <a:effectLst/>
-                          <a:latin typeface="Courier New"/>
-                          <a:ea typeface="ＭＳ 明朝"/>
-                          <a:cs typeface="Courier New"/>
-                        </a:rPr>
-                        <a:t>movl</a:t>
-                      </a:r>
-                      <a:r>
-                        <a:rPr lang="pt-BR" sz="1300" b="1" dirty="0">
-                          <a:solidFill>
-                            <a:srgbClr val="000000"/>
-                          </a:solidFill>
-                          <a:effectLst/>
-                          <a:latin typeface="Courier New"/>
-                          <a:ea typeface="ＭＳ 明朝"/>
-                          <a:cs typeface="Courier New"/>
-                        </a:rPr>
-                        <a:t>  $1, %</a:t>
-                      </a:r>
-                      <a:r>
-                        <a:rPr lang="pt-BR" sz="1300" b="1" dirty="0" err="1">
-                          <a:solidFill>
-                            <a:srgbClr val="000000"/>
-                          </a:solidFill>
-                          <a:effectLst/>
-                          <a:latin typeface="Courier New"/>
-                          <a:ea typeface="ＭＳ 明朝"/>
-                          <a:cs typeface="Courier New"/>
-                        </a:rPr>
-                        <a:t>eax</a:t>
-                      </a:r>
-                      <a:r>
-                        <a:rPr lang="pt-BR" sz="1300" b="1" dirty="0">
-                          <a:solidFill>
-                            <a:srgbClr val="000000"/>
-                          </a:solidFill>
-                          <a:effectLst/>
-                          <a:latin typeface="Courier New"/>
-                          <a:ea typeface="ＭＳ 明朝"/>
-                          <a:cs typeface="Courier New"/>
-                        </a:rPr>
-                        <a:t>  </a:t>
+                        <a:t>       movl  $1, %eax  </a:t>
                       </a:r>
                     </a:p>
                     <a:p>
@@ -20746,7 +19330,7 @@
                           <a:tab pos="9306560" algn="l"/>
                         </a:tabLst>
                       </a:pPr>
-                      <a:endParaRPr lang="pt-BR" sz="1300" b="1" dirty="0">
+                      <a:endParaRPr lang="en-US" sz="1300" b="1" noProof="1">
                         <a:solidFill>
                           <a:srgbClr val="000000"/>
                         </a:solidFill>
@@ -20784,7 +19368,7 @@
                         </a:tabLst>
                       </a:pPr>
                       <a:r>
-                        <a:rPr lang="pt-BR" sz="1300" b="1" dirty="0">
+                        <a:rPr lang="en-US" sz="1300" b="1" noProof="1">
                           <a:solidFill>
                             <a:srgbClr val="000000"/>
                           </a:solidFill>
@@ -20793,55 +19377,7 @@
                           <a:ea typeface="ＭＳ 明朝"/>
                           <a:cs typeface="Courier New"/>
                         </a:rPr>
-                        <a:t>/* </a:t>
-                      </a:r>
-                      <a:r>
-                        <a:rPr lang="pt-BR" sz="1300" b="1" dirty="0" err="1">
-                          <a:solidFill>
-                            <a:srgbClr val="000000"/>
-                          </a:solidFill>
-                          <a:effectLst/>
-                          <a:latin typeface="Courier New"/>
-                          <a:ea typeface="ＭＳ 明朝"/>
-                          <a:cs typeface="Courier New"/>
-                        </a:rPr>
-                        <a:t>Return</a:t>
-                      </a:r>
-                      <a:r>
-                        <a:rPr lang="pt-BR" sz="1300" b="1" dirty="0">
-                          <a:solidFill>
-                            <a:srgbClr val="000000"/>
-                          </a:solidFill>
-                          <a:effectLst/>
-                          <a:latin typeface="Courier New"/>
-                          <a:ea typeface="ＭＳ 明朝"/>
-                          <a:cs typeface="Courier New"/>
-                        </a:rPr>
-                        <a:t> </a:t>
-                      </a:r>
-                      <a:r>
-                        <a:rPr lang="pt-BR" sz="1300" b="1" dirty="0" err="1">
-                          <a:solidFill>
-                            <a:srgbClr val="000000"/>
-                          </a:solidFill>
-                          <a:effectLst/>
-                          <a:latin typeface="Courier New"/>
-                          <a:ea typeface="ＭＳ 明朝"/>
-                          <a:cs typeface="Courier New"/>
-                        </a:rPr>
-                        <a:t>value</a:t>
-                      </a:r>
-                      <a:r>
-                        <a:rPr lang="pt-BR" sz="1300" b="1" dirty="0">
-                          <a:solidFill>
-                            <a:srgbClr val="000000"/>
-                          </a:solidFill>
-                          <a:effectLst/>
-                          <a:latin typeface="Courier New"/>
-                          <a:ea typeface="ＭＳ 明朝"/>
-                          <a:cs typeface="Courier New"/>
-                        </a:rPr>
-                        <a:t> */</a:t>
+                        <a:t>/* Return value */</a:t>
                       </a:r>
                     </a:p>
                     <a:p>
@@ -20872,7 +19408,7 @@
                         </a:tabLst>
                       </a:pPr>
                       <a:r>
-                        <a:rPr lang="pt-BR" sz="1300" b="1" dirty="0">
+                        <a:rPr lang="en-US" sz="1300" b="1" noProof="1">
                           <a:solidFill>
                             <a:srgbClr val="000000"/>
                           </a:solidFill>
@@ -20881,55 +19417,7 @@
                           <a:ea typeface="ＭＳ 明朝"/>
                           <a:cs typeface="Courier New"/>
                         </a:rPr>
-                        <a:t>       </a:t>
-                      </a:r>
-                      <a:r>
-                        <a:rPr lang="pt-BR" sz="1300" b="1" dirty="0" err="1">
-                          <a:solidFill>
-                            <a:srgbClr val="000000"/>
-                          </a:solidFill>
-                          <a:effectLst/>
-                          <a:latin typeface="Courier New"/>
-                          <a:ea typeface="ＭＳ 明朝"/>
-                          <a:cs typeface="Courier New"/>
-                        </a:rPr>
-                        <a:t>movl</a:t>
-                      </a:r>
-                      <a:r>
-                        <a:rPr lang="pt-BR" sz="1300" b="1" dirty="0">
-                          <a:solidFill>
-                            <a:srgbClr val="000000"/>
-                          </a:solidFill>
-                          <a:effectLst/>
-                          <a:latin typeface="Courier New"/>
-                          <a:ea typeface="ＭＳ 明朝"/>
-                          <a:cs typeface="Courier New"/>
-                        </a:rPr>
-                        <a:t>  $2, %</a:t>
-                      </a:r>
-                      <a:r>
-                        <a:rPr lang="pt-BR" sz="1300" b="1" dirty="0" err="1">
-                          <a:solidFill>
-                            <a:srgbClr val="000000"/>
-                          </a:solidFill>
-                          <a:effectLst/>
-                          <a:latin typeface="Courier New"/>
-                          <a:ea typeface="ＭＳ 明朝"/>
-                          <a:cs typeface="Courier New"/>
-                        </a:rPr>
-                        <a:t>ebx</a:t>
-                      </a:r>
-                      <a:r>
-                        <a:rPr lang="pt-BR" sz="1300" b="1" dirty="0">
-                          <a:solidFill>
-                            <a:srgbClr val="000000"/>
-                          </a:solidFill>
-                          <a:effectLst/>
-                          <a:latin typeface="Courier New"/>
-                          <a:ea typeface="ＭＳ 明朝"/>
-                          <a:cs typeface="Courier New"/>
-                        </a:rPr>
-                        <a:t>  </a:t>
+                        <a:t>       movl  $2, %ebx  </a:t>
                       </a:r>
                     </a:p>
                     <a:p>
@@ -20959,7 +19447,7 @@
                           <a:tab pos="9306560" algn="l"/>
                         </a:tabLst>
                       </a:pPr>
-                      <a:endParaRPr lang="pt-BR" sz="1300" b="1" dirty="0">
+                      <a:endParaRPr lang="en-US" sz="1300" b="1" noProof="1">
                         <a:solidFill>
                           <a:srgbClr val="000000"/>
                         </a:solidFill>
@@ -20997,7 +19485,7 @@
                         </a:tabLst>
                       </a:pPr>
                       <a:r>
-                        <a:rPr lang="pt-BR" sz="1300" b="1" dirty="0">
+                        <a:rPr lang="en-US" sz="1300" b="1" noProof="1">
                           <a:solidFill>
                             <a:srgbClr val="000000"/>
                           </a:solidFill>
@@ -21006,55 +19494,7 @@
                           <a:ea typeface="ＭＳ 明朝"/>
                           <a:cs typeface="Courier New"/>
                         </a:rPr>
-                        <a:t># </a:t>
-                      </a:r>
-                      <a:r>
-                        <a:rPr lang="pt-BR" sz="1300" b="1" dirty="0" err="1">
-                          <a:solidFill>
-                            <a:srgbClr val="000000"/>
-                          </a:solidFill>
-                          <a:effectLst/>
-                          <a:latin typeface="Courier New"/>
-                          <a:ea typeface="ＭＳ 明朝"/>
-                          <a:cs typeface="Courier New"/>
-                        </a:rPr>
-                        <a:t>Call</a:t>
-                      </a:r>
-                      <a:r>
-                        <a:rPr lang="pt-BR" sz="1300" b="1" dirty="0">
-                          <a:solidFill>
-                            <a:srgbClr val="000000"/>
-                          </a:solidFill>
-                          <a:effectLst/>
-                          <a:latin typeface="Courier New"/>
-                          <a:ea typeface="ＭＳ 明朝"/>
-                          <a:cs typeface="Courier New"/>
-                        </a:rPr>
-                        <a:t> </a:t>
-                      </a:r>
-                      <a:r>
-                        <a:rPr lang="pt-BR" sz="1300" b="1" dirty="0" err="1">
-                          <a:solidFill>
-                            <a:srgbClr val="000000"/>
-                          </a:solidFill>
-                          <a:effectLst/>
-                          <a:latin typeface="Courier New"/>
-                          <a:ea typeface="ＭＳ 明朝"/>
-                          <a:cs typeface="Courier New"/>
-                        </a:rPr>
-                        <a:t>the</a:t>
-                      </a:r>
-                      <a:r>
-                        <a:rPr lang="pt-BR" sz="1300" b="1" dirty="0">
-                          <a:solidFill>
-                            <a:srgbClr val="000000"/>
-                          </a:solidFill>
-                          <a:effectLst/>
-                          <a:latin typeface="Courier New"/>
-                          <a:ea typeface="ＭＳ 明朝"/>
-                          <a:cs typeface="Courier New"/>
-                        </a:rPr>
-                        <a:t> OS</a:t>
+                        <a:t># Call the OS</a:t>
                       </a:r>
                     </a:p>
                     <a:p>
@@ -21085,7 +19525,7 @@
                         </a:tabLst>
                       </a:pPr>
                       <a:r>
-                        <a:rPr lang="pt-BR" sz="1300" b="1" dirty="0">
+                        <a:rPr lang="en-US" sz="1300" b="1" noProof="1">
                           <a:solidFill>
                             <a:srgbClr val="000000"/>
                           </a:solidFill>
@@ -21094,33 +19534,9 @@
                           <a:ea typeface="ＭＳ 明朝"/>
                           <a:cs typeface="Courier New"/>
                         </a:rPr>
-                        <a:t>       </a:t>
-                      </a:r>
-                      <a:r>
-                        <a:rPr lang="pt-BR" sz="1300" b="1" dirty="0" err="1">
-                          <a:solidFill>
-                            <a:srgbClr val="000000"/>
-                          </a:solidFill>
-                          <a:effectLst/>
-                          <a:latin typeface="Courier New"/>
-                          <a:ea typeface="ＭＳ 明朝"/>
-                          <a:cs typeface="Courier New"/>
-                        </a:rPr>
-                        <a:t>int</a:t>
-                      </a:r>
-                      <a:r>
-                        <a:rPr lang="pt-BR" sz="1300" b="1" dirty="0">
-                          <a:solidFill>
-                            <a:srgbClr val="000000"/>
-                          </a:solidFill>
-                          <a:effectLst/>
-                          <a:latin typeface="Courier New"/>
-                          <a:ea typeface="ＭＳ 明朝"/>
-                          <a:cs typeface="Courier New"/>
-                        </a:rPr>
-                        <a:t>   $0x80</a:t>
-                      </a:r>
-                      <a:endParaRPr lang="pt-BR" sz="1300" b="1" dirty="0">
+                        <a:t>       int   $0x80</a:t>
+                      </a:r>
+                      <a:endParaRPr lang="en-US" sz="1300" b="1" noProof="1">
                         <a:effectLst/>
                         <a:latin typeface="Courier New"/>
                         <a:ea typeface="ＭＳ 明朝"/>
@@ -21249,6 +19665,42 @@
               </a:rPr>
               <a:t>GAS (Sintaxe AT&amp;T)</a:t>
             </a:r>
+          </a:p>
+        </p:txBody>
+      </p:sp>
+      <p:sp>
+        <p:nvSpPr>
+          <p:cNvPr id="8" name="TextBox 7">
+            <a:extLst>
+              <a:ext uri="{FF2B5EF4-FFF2-40B4-BE49-F238E27FC236}">
+                <a16:creationId xmlns:a16="http://schemas.microsoft.com/office/drawing/2014/main" id="{0552E8E2-BEED-B2DE-15EE-DA4AB849599B}"/>
+              </a:ext>
+            </a:extLst>
+          </p:cNvPr>
+          <p:cNvSpPr txBox="1"/>
+          <p:nvPr/>
+        </p:nvSpPr>
+        <p:spPr>
+          <a:xfrm>
+            <a:off x="404930" y="5892284"/>
+            <a:ext cx="6129982" cy="369332"/>
+          </a:xfrm>
+          <a:prstGeom prst="rect">
+            <a:avLst/>
+          </a:prstGeom>
+          <a:noFill/>
+        </p:spPr>
+        <p:txBody>
+          <a:bodyPr wrap="square">
+            <a:spAutoFit/>
+          </a:bodyPr>
+          <a:lstStyle/>
+          <a:p>
+            <a:r>
+              <a:rPr lang="en-BR" b="1" dirty="0"/>
+              <a:t>Código para Linux, interface de chamadas de sistema i386.</a:t>
+            </a:r>
+            <a:endParaRPr lang="en-US" dirty="0"/>
           </a:p>
         </p:txBody>
       </p:sp>
@@ -21298,17 +19750,14 @@
           <a:lstStyle/>
           <a:p>
             <a:r>
-              <a:rPr lang="pt-BR" dirty="0"/>
-              <a:t>Análise Sintática (</a:t>
-            </a:r>
-            <a:r>
-              <a:rPr lang="pt-BR" dirty="0" err="1"/>
-              <a:t>Parsing</a:t>
-            </a:r>
-            <a:r>
-              <a:rPr lang="pt-BR" dirty="0"/>
-              <a:t>)</a:t>
-            </a:r>
+              <a:rPr lang="en-US" noProof="1"/>
+              <a:t>Análise </a:t>
+            </a:r>
+            <a:r>
+              <a:rPr lang="en-BR" dirty="0"/>
+              <a:t>léxica - tokenização</a:t>
+            </a:r>
+            <a:endParaRPr lang="en-US" noProof="1"/>
           </a:p>
         </p:txBody>
       </p:sp>
@@ -21330,8 +19779,8 @@
           <a:lstStyle/>
           <a:p>
             <a:r>
-              <a:rPr lang="pt-BR" sz="2400" dirty="0"/>
-              <a:t>Separar cada termo para a análise:</a:t>
+              <a:rPr lang="en-US" sz="2400" noProof="1"/>
+              <a:t>Separar cada termo para à análise:</a:t>
             </a:r>
           </a:p>
         </p:txBody>
@@ -21351,7 +19800,7 @@
           <a:bodyPr/>
           <a:lstStyle/>
           <a:p>
-            <a:endParaRPr lang="pt-BR"/>
+            <a:endParaRPr lang="en-US" noProof="1"/>
           </a:p>
         </p:txBody>
       </p:sp>
@@ -21371,11 +19820,11 @@
           <a:lstStyle/>
           <a:p>
             <a:fld id="{7FFE5E5C-C80A-4D8D-A711-3102A7BA9258}" type="slidenum">
-              <a:rPr lang="pt-BR" smtClean="0"/>
+              <a:rPr lang="en-US" noProof="1" smtClean="0"/>
               <a:pPr/>
               <a:t>7</a:t>
             </a:fld>
-            <a:endParaRPr lang="pt-BR" dirty="0"/>
+            <a:endParaRPr lang="en-US" noProof="1"/>
           </a:p>
         </p:txBody>
       </p:sp>
@@ -21388,13 +19837,13 @@
           <p:nvPr>
             <p:extLst>
               <p:ext uri="{D42A27DB-BD31-4B8C-83A1-F6EECF244321}">
-                <p14:modId xmlns:p14="http://schemas.microsoft.com/office/powerpoint/2010/main" val="217527347"/>
+                <p14:modId xmlns:p14="http://schemas.microsoft.com/office/powerpoint/2010/main" val="3027398897"/>
               </p:ext>
             </p:extLst>
           </p:nvPr>
         </p:nvGraphicFramePr>
         <p:xfrm>
-          <a:off x="969668" y="2583612"/>
+          <a:off x="555140" y="2583612"/>
           <a:ext cx="2806994" cy="3108960"/>
         </p:xfrm>
         <a:graphic>
@@ -21419,83 +19868,46 @@
                     <a:lstStyle/>
                     <a:p>
                       <a:r>
-                        <a:rPr lang="de-DE" b="1" dirty="0">
+                        <a:rPr lang="en-US" b="1" noProof="1">
                           <a:solidFill>
                             <a:schemeClr val="tx1"/>
                           </a:solidFill>
                           <a:latin typeface="Courier New"/>
                           <a:cs typeface="Courier New"/>
                         </a:rPr>
-                        <a:t>    </a:t>
-                      </a:r>
-                      <a:r>
-                        <a:rPr lang="de-DE" b="1" dirty="0" err="1">
+                        <a:t>    leaw</a:t>
+                      </a:r>
+                      <a:r>
+                        <a:rPr lang="en-US" b="1" baseline="0" noProof="1">
                           <a:solidFill>
                             <a:schemeClr val="tx1"/>
                           </a:solidFill>
                           <a:latin typeface="Courier New"/>
                           <a:cs typeface="Courier New"/>
                         </a:rPr>
-                        <a:t>leaw</a:t>
-                      </a:r>
-                      <a:r>
-                        <a:rPr lang="de-DE" b="1" baseline="0" dirty="0">
+                        <a:t> $</a:t>
+                      </a:r>
+                      <a:r>
+                        <a:rPr lang="en-US" b="1" noProof="1">
                           <a:solidFill>
                             <a:schemeClr val="tx1"/>
                           </a:solidFill>
                           <a:latin typeface="Courier New"/>
                           <a:cs typeface="Courier New"/>
                         </a:rPr>
-                        <a:t> $</a:t>
-                      </a:r>
-                      <a:r>
-                        <a:rPr lang="de-DE" b="1" dirty="0" err="1">
+                        <a:t>i,%A</a:t>
+                      </a:r>
+                    </a:p>
+                    <a:p>
+                      <a:r>
+                        <a:rPr lang="en-US" b="1" noProof="1">
                           <a:solidFill>
                             <a:schemeClr val="tx1"/>
                           </a:solidFill>
                           <a:latin typeface="Courier New"/>
                           <a:cs typeface="Courier New"/>
                         </a:rPr>
-                        <a:t>i,%A</a:t>
-                      </a:r>
-                      <a:endParaRPr lang="de-DE" b="1" dirty="0">
-                        <a:solidFill>
-                          <a:schemeClr val="tx1"/>
-                        </a:solidFill>
-                        <a:latin typeface="Courier New"/>
-                        <a:cs typeface="Courier New"/>
-                      </a:endParaRPr>
-                    </a:p>
-                    <a:p>
-                      <a:r>
-                        <a:rPr lang="de-DE" b="1" dirty="0">
-                          <a:solidFill>
-                            <a:schemeClr val="tx1"/>
-                          </a:solidFill>
-                          <a:latin typeface="Courier New"/>
-                          <a:cs typeface="Courier New"/>
-                        </a:rPr>
-                        <a:t>    </a:t>
-                      </a:r>
-                      <a:r>
-                        <a:rPr lang="de-DE" b="1" dirty="0" err="1">
-                          <a:solidFill>
-                            <a:schemeClr val="tx1"/>
-                          </a:solidFill>
-                          <a:latin typeface="Courier New"/>
-                          <a:cs typeface="Courier New"/>
-                        </a:rPr>
-                        <a:t>movw</a:t>
-                      </a:r>
-                      <a:r>
-                        <a:rPr lang="de-DE" b="1" dirty="0">
-                          <a:solidFill>
-                            <a:schemeClr val="tx1"/>
-                          </a:solidFill>
-                          <a:latin typeface="Courier New"/>
-                          <a:cs typeface="Courier New"/>
-                        </a:rPr>
-                        <a:t> $1,(%A)</a:t>
+                        <a:t>    movw $1,(%A)</a:t>
                       </a:r>
                     </a:p>
                     <a:p>
@@ -21517,179 +19929,102 @@
                         <a:defRPr/>
                       </a:pPr>
                       <a:r>
-                        <a:rPr lang="de-DE" b="1" dirty="0">
+                        <a:rPr lang="en-US" b="1" noProof="1">
                           <a:solidFill>
                             <a:schemeClr val="tx1"/>
                           </a:solidFill>
                           <a:latin typeface="Courier New"/>
                           <a:cs typeface="Courier New"/>
                         </a:rPr>
-                        <a:t>    </a:t>
-                      </a:r>
-                      <a:r>
-                        <a:rPr lang="de-DE" b="1" dirty="0" err="1">
+                        <a:t>    leaw</a:t>
+                      </a:r>
+                      <a:r>
+                        <a:rPr lang="en-US" b="1" baseline="0" noProof="1">
                           <a:solidFill>
                             <a:schemeClr val="tx1"/>
                           </a:solidFill>
                           <a:latin typeface="Courier New"/>
                           <a:cs typeface="Courier New"/>
                         </a:rPr>
-                        <a:t>leaw</a:t>
-                      </a:r>
-                      <a:r>
-                        <a:rPr lang="de-DE" b="1" baseline="0" dirty="0">
+                        <a:t> $sum</a:t>
+                      </a:r>
+                      <a:r>
+                        <a:rPr lang="en-US" b="1" noProof="1">
                           <a:solidFill>
                             <a:schemeClr val="tx1"/>
                           </a:solidFill>
                           <a:latin typeface="Courier New"/>
                           <a:cs typeface="Courier New"/>
                         </a:rPr>
-                        <a:t> $</a:t>
-                      </a:r>
-                      <a:r>
-                        <a:rPr lang="de-DE" b="1" baseline="0" dirty="0" err="1">
+                        <a:t>,%A</a:t>
+                      </a:r>
+                    </a:p>
+                    <a:p>
+                      <a:r>
+                        <a:rPr lang="en-US" b="1" noProof="1">
                           <a:solidFill>
                             <a:schemeClr val="tx1"/>
                           </a:solidFill>
                           <a:latin typeface="Courier New"/>
                           <a:cs typeface="Courier New"/>
                         </a:rPr>
-                        <a:t>sum</a:t>
-                      </a:r>
-                      <a:r>
-                        <a:rPr lang="de-DE" b="1" dirty="0">
+                        <a:t>    movw $0,(%A)</a:t>
+                      </a:r>
+                    </a:p>
+                    <a:p>
+                      <a:r>
+                        <a:rPr lang="en-US" b="1" noProof="1">
                           <a:solidFill>
                             <a:schemeClr val="tx1"/>
                           </a:solidFill>
                           <a:latin typeface="Courier New"/>
                           <a:cs typeface="Courier New"/>
                         </a:rPr>
-                        <a:t>,%A</a:t>
-                      </a:r>
-                    </a:p>
-                    <a:p>
-                      <a:r>
-                        <a:rPr lang="de-DE" b="1" dirty="0">
+                        <a:t>LOOP:</a:t>
+                      </a:r>
+                    </a:p>
+                    <a:p>
+                      <a:r>
+                        <a:rPr lang="en-US" b="1" noProof="1">
                           <a:solidFill>
                             <a:schemeClr val="tx1"/>
                           </a:solidFill>
                           <a:latin typeface="Courier New"/>
                           <a:cs typeface="Courier New"/>
                         </a:rPr>
-                        <a:t>    </a:t>
-                      </a:r>
-                      <a:r>
-                        <a:rPr lang="de-DE" b="1" dirty="0" err="1">
+                        <a:t>    leaw</a:t>
+                      </a:r>
+                      <a:r>
+                        <a:rPr lang="en-US" b="1" baseline="0" noProof="1">
                           <a:solidFill>
                             <a:schemeClr val="tx1"/>
                           </a:solidFill>
                           <a:latin typeface="Courier New"/>
                           <a:cs typeface="Courier New"/>
                         </a:rPr>
-                        <a:t>movw</a:t>
-                      </a:r>
-                      <a:r>
-                        <a:rPr lang="de-DE" b="1" dirty="0">
+                        <a:t> $</a:t>
+                      </a:r>
+                      <a:r>
+                        <a:rPr lang="en-US" b="1" noProof="1">
                           <a:solidFill>
                             <a:schemeClr val="tx1"/>
                           </a:solidFill>
                           <a:latin typeface="Courier New"/>
                           <a:cs typeface="Courier New"/>
                         </a:rPr>
-                        <a:t> $0,(%A)</a:t>
-                      </a:r>
-                    </a:p>
-                    <a:p>
-                      <a:r>
-                        <a:rPr lang="de-DE" b="1" dirty="0">
+                        <a:t>i,%A</a:t>
+                      </a:r>
+                    </a:p>
+                    <a:p>
+                      <a:r>
+                        <a:rPr lang="en-US" b="1" noProof="1">
                           <a:solidFill>
                             <a:schemeClr val="tx1"/>
                           </a:solidFill>
                           <a:latin typeface="Courier New"/>
                           <a:cs typeface="Courier New"/>
                         </a:rPr>
-                        <a:t>LOOP:</a:t>
-                      </a:r>
-                    </a:p>
-                    <a:p>
-                      <a:r>
-                        <a:rPr lang="de-DE" b="1" dirty="0">
-                          <a:solidFill>
-                            <a:schemeClr val="tx1"/>
-                          </a:solidFill>
-                          <a:latin typeface="Courier New"/>
-                          <a:cs typeface="Courier New"/>
-                        </a:rPr>
-                        <a:t>    </a:t>
-                      </a:r>
-                      <a:r>
-                        <a:rPr lang="de-DE" b="1" dirty="0" err="1">
-                          <a:solidFill>
-                            <a:schemeClr val="tx1"/>
-                          </a:solidFill>
-                          <a:latin typeface="Courier New"/>
-                          <a:cs typeface="Courier New"/>
-                        </a:rPr>
-                        <a:t>leaw</a:t>
-                      </a:r>
-                      <a:r>
-                        <a:rPr lang="de-DE" b="1" baseline="0" dirty="0">
-                          <a:solidFill>
-                            <a:schemeClr val="tx1"/>
-                          </a:solidFill>
-                          <a:latin typeface="Courier New"/>
-                          <a:cs typeface="Courier New"/>
-                        </a:rPr>
-                        <a:t> $</a:t>
-                      </a:r>
-                      <a:r>
-                        <a:rPr lang="de-DE" b="1" dirty="0" err="1">
-                          <a:solidFill>
-                            <a:schemeClr val="tx1"/>
-                          </a:solidFill>
-                          <a:latin typeface="Courier New"/>
-                          <a:cs typeface="Courier New"/>
-                        </a:rPr>
-                        <a:t>i,%A</a:t>
-                      </a:r>
-                      <a:endParaRPr lang="de-DE" b="1" dirty="0">
-                        <a:solidFill>
-                          <a:schemeClr val="tx1"/>
-                        </a:solidFill>
-                        <a:latin typeface="Courier New"/>
-                        <a:cs typeface="Courier New"/>
-                      </a:endParaRPr>
-                    </a:p>
-                    <a:p>
-                      <a:r>
-                        <a:rPr lang="de-DE" b="1" dirty="0">
-                          <a:solidFill>
-                            <a:schemeClr val="tx1"/>
-                          </a:solidFill>
-                          <a:latin typeface="Courier New"/>
-                          <a:cs typeface="Courier New"/>
-                        </a:rPr>
-                        <a:t>    </a:t>
-                      </a:r>
-                      <a:r>
-                        <a:rPr lang="de-DE" b="1" dirty="0" err="1">
-                          <a:solidFill>
-                            <a:schemeClr val="tx1"/>
-                          </a:solidFill>
-                          <a:latin typeface="Courier New"/>
-                          <a:cs typeface="Courier New"/>
-                        </a:rPr>
-                        <a:t>movw</a:t>
-                      </a:r>
-                      <a:r>
-                        <a:rPr lang="de-DE" b="1" dirty="0">
-                          <a:solidFill>
-                            <a:schemeClr val="tx1"/>
-                          </a:solidFill>
-                          <a:latin typeface="Courier New"/>
-                          <a:cs typeface="Courier New"/>
-                        </a:rPr>
-                        <a:t> (%A),%D</a:t>
+                        <a:t>    movw (%A),%D</a:t>
                       </a:r>
                     </a:p>
                     <a:p>
@@ -21711,37 +20046,27 @@
                         <a:defRPr/>
                       </a:pPr>
                       <a:r>
-                        <a:rPr lang="de-DE" b="1" dirty="0">
+                        <a:rPr lang="en-US" b="1" noProof="1">
                           <a:solidFill>
                             <a:schemeClr val="tx1"/>
                           </a:solidFill>
                           <a:latin typeface="Courier New"/>
                           <a:cs typeface="Courier New"/>
                         </a:rPr>
-                        <a:t>    </a:t>
-                      </a:r>
-                      <a:r>
-                        <a:rPr lang="de-DE" b="1" dirty="0" err="1">
+                        <a:t>    leaw</a:t>
+                      </a:r>
+                      <a:r>
+                        <a:rPr lang="en-US" b="1" baseline="0" noProof="1">
                           <a:solidFill>
                             <a:schemeClr val="tx1"/>
                           </a:solidFill>
                           <a:latin typeface="Courier New"/>
                           <a:cs typeface="Courier New"/>
                         </a:rPr>
-                        <a:t>leaw</a:t>
-                      </a:r>
-                      <a:r>
-                        <a:rPr lang="de-DE" b="1" baseline="0" dirty="0">
-                          <a:solidFill>
-                            <a:schemeClr val="tx1"/>
-                          </a:solidFill>
-                          <a:latin typeface="Courier New"/>
-                          <a:cs typeface="Courier New"/>
-                        </a:rPr>
                         <a:t> $</a:t>
                       </a:r>
                       <a:r>
-                        <a:rPr lang="de-DE" b="1" dirty="0">
+                        <a:rPr lang="en-US" b="1" noProof="1">
                           <a:solidFill>
                             <a:schemeClr val="tx1"/>
                           </a:solidFill>
@@ -21770,27 +20095,17 @@
                         <a:defRPr/>
                       </a:pPr>
                       <a:r>
-                        <a:rPr lang="de-DE" b="1" dirty="0">
+                        <a:rPr lang="en-US" b="1" noProof="1">
                           <a:solidFill>
                             <a:schemeClr val="tx1"/>
                           </a:solidFill>
                           <a:latin typeface="Courier New"/>
                           <a:cs typeface="Courier New"/>
                         </a:rPr>
-                        <a:t>    </a:t>
-                      </a:r>
-                      <a:r>
-                        <a:rPr lang="de-DE" b="1" dirty="0" err="1">
-                          <a:solidFill>
-                            <a:schemeClr val="tx1"/>
-                          </a:solidFill>
-                          <a:latin typeface="Courier New"/>
-                          <a:cs typeface="Courier New"/>
-                        </a:rPr>
-                        <a:t>subw</a:t>
-                      </a:r>
-                      <a:r>
-                        <a:rPr lang="de-DE" b="1" baseline="0" dirty="0">
+                        <a:t>    subw</a:t>
+                      </a:r>
+                      <a:r>
+                        <a:rPr lang="en-US" b="1" baseline="0" noProof="1">
                           <a:solidFill>
                             <a:schemeClr val="tx1"/>
                           </a:solidFill>
@@ -21819,36 +20134,16 @@
                         <a:defRPr/>
                       </a:pPr>
                       <a:r>
-                        <a:rPr lang="de-DE" b="1" baseline="0" dirty="0">
+                        <a:rPr lang="en-US" b="1" baseline="0" noProof="1">
                           <a:solidFill>
                             <a:schemeClr val="tx1"/>
                           </a:solidFill>
                           <a:latin typeface="Courier New"/>
                           <a:cs typeface="Courier New"/>
                         </a:rPr>
-                        <a:t>    </a:t>
-                      </a:r>
-                      <a:r>
-                        <a:rPr lang="de-DE" b="1" baseline="0" dirty="0" err="1">
-                          <a:solidFill>
-                            <a:schemeClr val="tx1"/>
-                          </a:solidFill>
-                          <a:latin typeface="Courier New"/>
-                          <a:cs typeface="Courier New"/>
-                        </a:rPr>
-                        <a:t>leaw</a:t>
-                      </a:r>
-                      <a:r>
-                        <a:rPr lang="de-DE" b="1" baseline="0" dirty="0">
-                          <a:solidFill>
-                            <a:schemeClr val="tx1"/>
-                          </a:solidFill>
-                          <a:latin typeface="Courier New"/>
-                          <a:cs typeface="Courier New"/>
-                        </a:rPr>
-                        <a:t> $LOOP,%A</a:t>
-                      </a:r>
-                      <a:endParaRPr lang="de-DE" b="1" dirty="0">
+                        <a:t>    leaw $LOOP,%A</a:t>
+                      </a:r>
+                      <a:endParaRPr lang="en-US" b="1" noProof="1">
                         <a:solidFill>
                           <a:schemeClr val="tx1"/>
                         </a:solidFill>
@@ -21858,32 +20153,15 @@
                     </a:p>
                     <a:p>
                       <a:r>
-                        <a:rPr lang="de-DE" b="1" dirty="0">
+                        <a:rPr lang="en-US" b="1" noProof="1">
                           <a:solidFill>
                             <a:schemeClr val="tx1"/>
                           </a:solidFill>
                           <a:latin typeface="Courier New"/>
                           <a:cs typeface="Courier New"/>
                         </a:rPr>
-                        <a:t>    </a:t>
-                      </a:r>
-                      <a:r>
-                        <a:rPr lang="de-DE" b="1" dirty="0" err="1">
-                          <a:solidFill>
-                            <a:schemeClr val="tx1"/>
-                          </a:solidFill>
-                          <a:latin typeface="Courier New"/>
-                          <a:cs typeface="Courier New"/>
-                        </a:rPr>
-                        <a:t>jg</a:t>
-                      </a:r>
-                      <a:endParaRPr lang="pt-BR" b="1" dirty="0">
-                        <a:solidFill>
-                          <a:schemeClr val="tx1"/>
-                        </a:solidFill>
-                        <a:latin typeface="Courier New"/>
-                        <a:cs typeface="Courier New"/>
-                      </a:endParaRPr>
+                        <a:t>    jg %D</a:t>
+                      </a:r>
                     </a:p>
                   </a:txBody>
                   <a:tcPr>
@@ -21947,13 +20225,13 @@
           <p:nvPr>
             <p:extLst>
               <p:ext uri="{D42A27DB-BD31-4B8C-83A1-F6EECF244321}">
-                <p14:modId xmlns:p14="http://schemas.microsoft.com/office/powerpoint/2010/main" val="637797166"/>
+                <p14:modId xmlns:p14="http://schemas.microsoft.com/office/powerpoint/2010/main" val="1020532823"/>
               </p:ext>
             </p:extLst>
           </p:nvPr>
         </p:nvGraphicFramePr>
         <p:xfrm>
-          <a:off x="5201391" y="2583612"/>
+          <a:off x="5271774" y="2583612"/>
           <a:ext cx="3562596" cy="3108960"/>
         </p:xfrm>
         <a:graphic>
@@ -21978,7 +20256,7 @@
                     <a:lstStyle/>
                     <a:p>
                       <a:r>
-                        <a:rPr lang="de-DE" b="1" dirty="0">
+                        <a:rPr lang="en-US" b="1" noProof="1">
                           <a:solidFill>
                             <a:schemeClr val="tx1"/>
                           </a:solidFill>
@@ -21988,7 +20266,7 @@
                         <a:t>{</a:t>
                       </a:r>
                       <a:r>
-                        <a:rPr lang="de-DE" b="1" baseline="0" dirty="0">
+                        <a:rPr lang="en-US" b="1" baseline="0" noProof="1">
                           <a:solidFill>
                             <a:schemeClr val="tx1"/>
                           </a:solidFill>
@@ -21998,59 +20276,39 @@
                         <a:t>"</a:t>
                       </a:r>
                       <a:r>
-                        <a:rPr lang="de-DE" b="1" dirty="0" err="1">
+                        <a:rPr lang="en-US" b="1" noProof="1">
                           <a:solidFill>
                             <a:schemeClr val="tx1"/>
                           </a:solidFill>
                           <a:latin typeface="Courier New"/>
                           <a:cs typeface="Courier New"/>
                         </a:rPr>
-                        <a:t>leaw</a:t>
-                      </a:r>
-                      <a:r>
-                        <a:rPr lang="de-DE" b="1" dirty="0">
+                        <a:t>leaw","</a:t>
+                      </a:r>
+                      <a:r>
+                        <a:rPr lang="en-US" b="1" baseline="0" noProof="1">
                           <a:solidFill>
                             <a:schemeClr val="tx1"/>
                           </a:solidFill>
                           <a:latin typeface="Courier New"/>
                           <a:cs typeface="Courier New"/>
                         </a:rPr>
-                        <a:t>","</a:t>
-                      </a:r>
-                      <a:r>
-                        <a:rPr lang="de-DE" b="1" baseline="0" dirty="0">
+                        <a:t>$</a:t>
+                      </a:r>
+                      <a:r>
+                        <a:rPr lang="en-US" b="1" noProof="1">
                           <a:solidFill>
                             <a:schemeClr val="tx1"/>
                           </a:solidFill>
                           <a:latin typeface="Courier New"/>
                           <a:cs typeface="Courier New"/>
                         </a:rPr>
-                        <a:t>$</a:t>
-                      </a:r>
-                      <a:r>
-                        <a:rPr lang="de-DE" b="1" dirty="0" err="1">
-                          <a:solidFill>
-                            <a:schemeClr val="tx1"/>
-                          </a:solidFill>
-                          <a:latin typeface="Courier New"/>
-                          <a:cs typeface="Courier New"/>
-                        </a:rPr>
-                        <a:t>i","%A</a:t>
-                      </a:r>
-                      <a:r>
-                        <a:rPr lang="de-DE" b="1" dirty="0">
-                          <a:solidFill>
-                            <a:schemeClr val="tx1"/>
-                          </a:solidFill>
-                          <a:latin typeface="Courier New"/>
-                          <a:cs typeface="Courier New"/>
-                        </a:rPr>
-                        <a:t>",</a:t>
-                      </a:r>
-                    </a:p>
-                    <a:p>
-                      <a:r>
-                        <a:rPr lang="de-DE" b="1" dirty="0">
+                        <a:t>i","%A",</a:t>
+                      </a:r>
+                    </a:p>
+                    <a:p>
+                      <a:r>
+                        <a:rPr lang="en-US" b="1" noProof="1">
                           <a:solidFill>
                             <a:schemeClr val="tx1"/>
                           </a:solidFill>
@@ -22079,192 +20337,102 @@
                         <a:defRPr/>
                       </a:pPr>
                       <a:r>
-                        <a:rPr lang="de-DE" b="1" dirty="0">
+                        <a:rPr lang="en-US" b="1" noProof="1">
                           <a:solidFill>
                             <a:schemeClr val="tx1"/>
                           </a:solidFill>
                           <a:latin typeface="Courier New"/>
                           <a:cs typeface="Courier New"/>
                         </a:rPr>
-                        <a:t>"</a:t>
-                      </a:r>
-                      <a:r>
-                        <a:rPr lang="de-DE" b="1" dirty="0" err="1">
+                        <a:t>"leaw"</a:t>
+                      </a:r>
+                      <a:r>
+                        <a:rPr lang="en-US" b="1" baseline="0" noProof="1">
                           <a:solidFill>
                             <a:schemeClr val="tx1"/>
                           </a:solidFill>
                           <a:latin typeface="Courier New"/>
                           <a:cs typeface="Courier New"/>
                         </a:rPr>
-                        <a:t>leaw</a:t>
-                      </a:r>
-                      <a:r>
-                        <a:rPr lang="de-DE" b="1" dirty="0">
+                        <a:t>,"$sum"</a:t>
+                      </a:r>
+                      <a:r>
+                        <a:rPr lang="en-US" b="1" noProof="1">
                           <a:solidFill>
                             <a:schemeClr val="tx1"/>
                           </a:solidFill>
                           <a:latin typeface="Courier New"/>
                           <a:cs typeface="Courier New"/>
                         </a:rPr>
-                        <a:t>"</a:t>
-                      </a:r>
-                      <a:r>
-                        <a:rPr lang="de-DE" b="1" baseline="0" dirty="0">
+                        <a:t>,"%A",</a:t>
+                      </a:r>
+                    </a:p>
+                    <a:p>
+                      <a:r>
+                        <a:rPr lang="en-US" b="1" noProof="1">
                           <a:solidFill>
                             <a:schemeClr val="tx1"/>
                           </a:solidFill>
                           <a:latin typeface="Courier New"/>
                           <a:cs typeface="Courier New"/>
                         </a:rPr>
-                        <a:t>,"$</a:t>
-                      </a:r>
-                      <a:r>
-                        <a:rPr lang="de-DE" b="1" baseline="0" dirty="0" err="1">
+                        <a:t>"movw","$0","(%A)”,</a:t>
+                      </a:r>
+                    </a:p>
+                    <a:p>
+                      <a:r>
+                        <a:rPr lang="en-US" b="1" noProof="1">
                           <a:solidFill>
                             <a:schemeClr val="tx1"/>
                           </a:solidFill>
                           <a:latin typeface="Courier New"/>
                           <a:cs typeface="Courier New"/>
                         </a:rPr>
-                        <a:t>sum</a:t>
-                      </a:r>
-                      <a:r>
-                        <a:rPr lang="de-DE" b="1" baseline="0" dirty="0">
+                        <a:t>"LOOP:",</a:t>
+                      </a:r>
+                    </a:p>
+                    <a:p>
+                      <a:r>
+                        <a:rPr lang="en-US" b="1" noProof="1">
                           <a:solidFill>
                             <a:schemeClr val="tx1"/>
                           </a:solidFill>
                           <a:latin typeface="Courier New"/>
                           <a:cs typeface="Courier New"/>
                         </a:rPr>
-                        <a:t>"</a:t>
-                      </a:r>
-                      <a:r>
-                        <a:rPr lang="de-DE" b="1" dirty="0">
+                        <a:t>"leaw"</a:t>
+                      </a:r>
+                      <a:r>
+                        <a:rPr lang="en-US" b="1" baseline="0" noProof="1">
                           <a:solidFill>
                             <a:schemeClr val="tx1"/>
                           </a:solidFill>
                           <a:latin typeface="Courier New"/>
                           <a:cs typeface="Courier New"/>
                         </a:rPr>
-                        <a:t>,"%A",</a:t>
-                      </a:r>
-                    </a:p>
-                    <a:p>
-                      <a:r>
-                        <a:rPr lang="de-DE" b="1" dirty="0">
+                        <a:t>,"$</a:t>
+                      </a:r>
+                      <a:r>
+                        <a:rPr lang="en-US" b="1" noProof="1">
                           <a:solidFill>
                             <a:schemeClr val="tx1"/>
                           </a:solidFill>
                           <a:latin typeface="Courier New"/>
                           <a:cs typeface="Courier New"/>
                         </a:rPr>
-                        <a:t>"movw","$0","(%A)"</a:t>
-                      </a:r>
-                    </a:p>
-                    <a:p>
-                      <a:r>
-                        <a:rPr lang="de-DE" b="1" dirty="0">
+                        <a:t>i","%A",</a:t>
+                      </a:r>
+                    </a:p>
+                    <a:p>
+                      <a:r>
+                        <a:rPr lang="en-US" b="1" noProof="1">
                           <a:solidFill>
                             <a:schemeClr val="tx1"/>
                           </a:solidFill>
                           <a:latin typeface="Courier New"/>
                           <a:cs typeface="Courier New"/>
                         </a:rPr>
-                        <a:t>"LOOP:",</a:t>
-                      </a:r>
-                    </a:p>
-                    <a:p>
-                      <a:r>
-                        <a:rPr lang="de-DE" b="1" dirty="0">
-                          <a:solidFill>
-                            <a:schemeClr val="tx1"/>
-                          </a:solidFill>
-                          <a:latin typeface="Courier New"/>
-                          <a:cs typeface="Courier New"/>
-                        </a:rPr>
-                        <a:t>"</a:t>
-                      </a:r>
-                      <a:r>
-                        <a:rPr lang="de-DE" b="1" dirty="0" err="1">
-                          <a:solidFill>
-                            <a:schemeClr val="tx1"/>
-                          </a:solidFill>
-                          <a:latin typeface="Courier New"/>
-                          <a:cs typeface="Courier New"/>
-                        </a:rPr>
-                        <a:t>leaw</a:t>
-                      </a:r>
-                      <a:r>
-                        <a:rPr lang="de-DE" b="1" dirty="0">
-                          <a:solidFill>
-                            <a:schemeClr val="tx1"/>
-                          </a:solidFill>
-                          <a:latin typeface="Courier New"/>
-                          <a:cs typeface="Courier New"/>
-                        </a:rPr>
-                        <a:t>"</a:t>
-                      </a:r>
-                      <a:r>
-                        <a:rPr lang="de-DE" b="1" baseline="0" dirty="0">
-                          <a:solidFill>
-                            <a:schemeClr val="tx1"/>
-                          </a:solidFill>
-                          <a:latin typeface="Courier New"/>
-                          <a:cs typeface="Courier New"/>
-                        </a:rPr>
-                        <a:t>,"$</a:t>
-                      </a:r>
-                      <a:r>
-                        <a:rPr lang="de-DE" b="1" dirty="0" err="1">
-                          <a:solidFill>
-                            <a:schemeClr val="tx1"/>
-                          </a:solidFill>
-                          <a:latin typeface="Courier New"/>
-                          <a:cs typeface="Courier New"/>
-                        </a:rPr>
-                        <a:t>i","%A</a:t>
-                      </a:r>
-                      <a:r>
-                        <a:rPr lang="de-DE" b="1" dirty="0">
-                          <a:solidFill>
-                            <a:schemeClr val="tx1"/>
-                          </a:solidFill>
-                          <a:latin typeface="Courier New"/>
-                          <a:cs typeface="Courier New"/>
-                        </a:rPr>
-                        <a:t>",</a:t>
-                      </a:r>
-                    </a:p>
-                    <a:p>
-                      <a:r>
-                        <a:rPr lang="de-DE" b="1" dirty="0">
-                          <a:solidFill>
-                            <a:schemeClr val="tx1"/>
-                          </a:solidFill>
-                          <a:latin typeface="Courier New"/>
-                          <a:cs typeface="Courier New"/>
-                        </a:rPr>
-                        <a:t>"</a:t>
-                      </a:r>
-                      <a:r>
-                        <a:rPr lang="de-DE" b="1" dirty="0" err="1">
-                          <a:solidFill>
-                            <a:schemeClr val="tx1"/>
-                          </a:solidFill>
-                          <a:latin typeface="Courier New"/>
-                          <a:cs typeface="Courier New"/>
-                        </a:rPr>
-                        <a:t>movw</a:t>
-                      </a:r>
-                      <a:r>
-                        <a:rPr lang="de-DE" b="1" dirty="0">
-                          <a:solidFill>
-                            <a:schemeClr val="tx1"/>
-                          </a:solidFill>
-                          <a:latin typeface="Courier New"/>
-                          <a:cs typeface="Courier New"/>
-                        </a:rPr>
-                        <a:t>","(%A)","%D",</a:t>
+                        <a:t>"movw","(%A)","%D",</a:t>
                       </a:r>
                     </a:p>
                     <a:p>
@@ -22286,7 +20454,7 @@
                         <a:defRPr/>
                       </a:pPr>
                       <a:r>
-                        <a:rPr lang="de-DE" b="1" dirty="0">
+                        <a:rPr lang="en-US" b="1" noProof="1">
                           <a:solidFill>
                             <a:schemeClr val="tx1"/>
                           </a:solidFill>
@@ -22296,7 +20464,7 @@
                         <a:t>"leaw"</a:t>
                       </a:r>
                       <a:r>
-                        <a:rPr lang="de-DE" b="1" baseline="0" dirty="0">
+                        <a:rPr lang="en-US" b="1" baseline="0" noProof="1">
                           <a:solidFill>
                             <a:schemeClr val="tx1"/>
                           </a:solidFill>
@@ -22306,7 +20474,7 @@
                         <a:t>,"$</a:t>
                       </a:r>
                       <a:r>
-                        <a:rPr lang="de-DE" b="1" dirty="0">
+                        <a:rPr lang="en-US" b="1" noProof="1">
                           <a:solidFill>
                             <a:schemeClr val="tx1"/>
                           </a:solidFill>
@@ -22335,37 +20503,17 @@
                         <a:defRPr/>
                       </a:pPr>
                       <a:r>
-                        <a:rPr lang="de-DE" b="1" dirty="0">
+                        <a:rPr lang="en-US" b="1" noProof="1">
                           <a:solidFill>
                             <a:schemeClr val="tx1"/>
                           </a:solidFill>
                           <a:latin typeface="Courier New"/>
                           <a:cs typeface="Courier New"/>
                         </a:rPr>
-                        <a:t>"</a:t>
-                      </a:r>
-                      <a:r>
-                        <a:rPr lang="de-DE" b="1" dirty="0" err="1">
-                          <a:solidFill>
-                            <a:schemeClr val="tx1"/>
-                          </a:solidFill>
-                          <a:latin typeface="Courier New"/>
-                          <a:cs typeface="Courier New"/>
-                        </a:rPr>
-                        <a:t>subw</a:t>
-                      </a:r>
-                      <a:r>
-                        <a:rPr lang="de-DE" b="1" dirty="0">
-                          <a:solidFill>
-                            <a:schemeClr val="tx1"/>
-                          </a:solidFill>
-                          <a:latin typeface="Courier New"/>
-                          <a:cs typeface="Courier New"/>
-                        </a:rPr>
-                        <a:t>",</a:t>
-                      </a:r>
-                      <a:r>
-                        <a:rPr lang="de-DE" b="1" baseline="0" dirty="0">
+                        <a:t>"subw",</a:t>
+                      </a:r>
+                      <a:r>
+                        <a:rPr lang="en-US" b="1" baseline="0" noProof="1">
                           <a:solidFill>
                             <a:schemeClr val="tx1"/>
                           </a:solidFill>
@@ -22394,36 +20542,16 @@
                         <a:defRPr/>
                       </a:pPr>
                       <a:r>
-                        <a:rPr lang="de-DE" b="1" baseline="0" dirty="0">
+                        <a:rPr lang="en-US" b="1" baseline="0" noProof="1">
                           <a:solidFill>
                             <a:schemeClr val="tx1"/>
                           </a:solidFill>
                           <a:latin typeface="Courier New"/>
                           <a:cs typeface="Courier New"/>
                         </a:rPr>
-                        <a:t>"</a:t>
-                      </a:r>
-                      <a:r>
-                        <a:rPr lang="de-DE" b="1" baseline="0" dirty="0" err="1">
-                          <a:solidFill>
-                            <a:schemeClr val="tx1"/>
-                          </a:solidFill>
-                          <a:latin typeface="Courier New"/>
-                          <a:cs typeface="Courier New"/>
-                        </a:rPr>
-                        <a:t>leaw</a:t>
-                      </a:r>
-                      <a:r>
-                        <a:rPr lang="de-DE" b="1" baseline="0" dirty="0">
-                          <a:solidFill>
-                            <a:schemeClr val="tx1"/>
-                          </a:solidFill>
-                          <a:latin typeface="Courier New"/>
-                          <a:cs typeface="Courier New"/>
-                        </a:rPr>
-                        <a:t>","$LOOP","%A",</a:t>
-                      </a:r>
-                      <a:endParaRPr lang="de-DE" b="1" dirty="0">
+                        <a:t>"leaw","$LOOP","%A",</a:t>
+                      </a:r>
+                      <a:endParaRPr lang="en-US" b="1" noProof="1">
                         <a:solidFill>
                           <a:schemeClr val="tx1"/>
                         </a:solidFill>
@@ -22433,42 +20561,15 @@
                     </a:p>
                     <a:p>
                       <a:r>
-                        <a:rPr lang="de-DE" b="1" dirty="0">
+                        <a:rPr lang="en-US" b="1" noProof="1">
                           <a:solidFill>
                             <a:schemeClr val="tx1"/>
                           </a:solidFill>
                           <a:latin typeface="Courier New"/>
                           <a:cs typeface="Courier New"/>
                         </a:rPr>
-                        <a:t>"</a:t>
-                      </a:r>
-                      <a:r>
-                        <a:rPr lang="de-DE" b="1" dirty="0" err="1">
-                          <a:solidFill>
-                            <a:schemeClr val="tx1"/>
-                          </a:solidFill>
-                          <a:latin typeface="Courier New"/>
-                          <a:cs typeface="Courier New"/>
-                        </a:rPr>
-                        <a:t>jg</a:t>
-                      </a:r>
-                      <a:r>
-                        <a:rPr lang="de-DE" b="1" dirty="0">
-                          <a:solidFill>
-                            <a:schemeClr val="tx1"/>
-                          </a:solidFill>
-                          <a:latin typeface="Courier New"/>
-                          <a:cs typeface="Courier New"/>
-                        </a:rPr>
-                        <a:t>"}</a:t>
-                      </a:r>
-                      <a:endParaRPr lang="pt-BR" b="1" dirty="0">
-                        <a:solidFill>
-                          <a:schemeClr val="tx1"/>
-                        </a:solidFill>
-                        <a:latin typeface="Courier New"/>
-                        <a:cs typeface="Courier New"/>
-                      </a:endParaRPr>
+                        <a:t>"jg", "%D"}</a:t>
+                      </a:r>
                     </a:p>
                   </a:txBody>
                   <a:tcPr>
@@ -22531,8 +20632,8 @@
         </p:nvSpPr>
         <p:spPr>
           <a:xfrm>
-            <a:off x="3986512" y="3893848"/>
-            <a:ext cx="1119878" cy="488487"/>
+            <a:off x="3584448" y="3893848"/>
+            <a:ext cx="1521942" cy="488487"/>
           </a:xfrm>
           <a:prstGeom prst="rightArrow">
             <a:avLst/>
@@ -22564,7 +20665,7 @@
           <a:p>
             <a:pPr algn="ctr"/>
             <a:r>
-              <a:rPr lang="pt-BR">
+              <a:rPr lang="en-US" noProof="1">
                 <a:ln w="0"/>
                 <a:solidFill>
                   <a:schemeClr val="accent1"/>
@@ -22577,21 +20678,44 @@
                   </a:outerShdw>
                 </a:effectLst>
               </a:rPr>
-              <a:t>parsing</a:t>
-            </a:r>
-            <a:endParaRPr lang="pt-BR" dirty="0">
-              <a:ln w="0"/>
-              <a:solidFill>
-                <a:schemeClr val="accent1"/>
-              </a:solidFill>
-              <a:effectLst>
-                <a:outerShdw blurRad="38100" dist="25400" dir="5400000" algn="ctr" rotWithShape="0">
-                  <a:srgbClr val="6E747A">
-                    <a:alpha val="43000"/>
-                  </a:srgbClr>
-                </a:outerShdw>
-              </a:effectLst>
-            </a:endParaRPr>
+              <a:t>tokenização</a:t>
+            </a:r>
+          </a:p>
+        </p:txBody>
+      </p:sp>
+      <p:sp>
+        <p:nvSpPr>
+          <p:cNvPr id="7" name="TextBox 6">
+            <a:extLst>
+              <a:ext uri="{FF2B5EF4-FFF2-40B4-BE49-F238E27FC236}">
+                <a16:creationId xmlns:a16="http://schemas.microsoft.com/office/drawing/2014/main" id="{BBB8DFEB-60F4-F706-0560-7FC8E16605C7}"/>
+              </a:ext>
+            </a:extLst>
+          </p:cNvPr>
+          <p:cNvSpPr txBox="1"/>
+          <p:nvPr/>
+        </p:nvSpPr>
+        <p:spPr>
+          <a:xfrm>
+            <a:off x="6400800" y="6338063"/>
+            <a:ext cx="1645920" cy="369332"/>
+          </a:xfrm>
+          <a:prstGeom prst="rect">
+            <a:avLst/>
+          </a:prstGeom>
+          <a:noFill/>
+        </p:spPr>
+        <p:txBody>
+          <a:bodyPr wrap="square">
+            <a:spAutoFit/>
+          </a:bodyPr>
+          <a:lstStyle/>
+          <a:p>
+            <a:r>
+              <a:rPr lang="en-BR" b="1" dirty="0"/>
+              <a:t>Arquitetura Z0</a:t>
+            </a:r>
+            <a:endParaRPr lang="en-US" b="1" dirty="0"/>
           </a:p>
         </p:txBody>
       </p:sp>
@@ -22731,7 +20855,7 @@
           <p:nvPr>
             <p:extLst>
               <p:ext uri="{D42A27DB-BD31-4B8C-83A1-F6EECF244321}">
-                <p14:modId xmlns:p14="http://schemas.microsoft.com/office/powerpoint/2010/main" val="1321754711"/>
+                <p14:modId xmlns:p14="http://schemas.microsoft.com/office/powerpoint/2010/main" val="2203726322"/>
               </p:ext>
             </p:extLst>
           </p:nvPr>
@@ -22769,14 +20893,14 @@
                     <a:lstStyle/>
                     <a:p>
                       <a:r>
-                        <a:rPr lang="de-DE" b="1" dirty="0">
+                        <a:rPr lang="en-US" b="1" noProof="1">
                           <a:latin typeface="Courier New"/>
                           <a:cs typeface="Courier New"/>
                         </a:rPr>
                         <a:t>    </a:t>
                       </a:r>
                       <a:r>
-                        <a:rPr lang="de-DE" b="1" dirty="0" err="1">
+                        <a:rPr lang="en-US" b="1" noProof="1">
                           <a:solidFill>
                             <a:srgbClr val="FF0000"/>
                           </a:solidFill>
@@ -22786,7 +20910,7 @@
                         <a:t>leaw</a:t>
                       </a:r>
                       <a:r>
-                        <a:rPr lang="de-DE" b="1" baseline="0" dirty="0">
+                        <a:rPr lang="en-US" b="1" baseline="0" noProof="1">
                           <a:solidFill>
                             <a:srgbClr val="FF0000"/>
                           </a:solidFill>
@@ -22796,54 +20920,40 @@
                         <a:t> </a:t>
                       </a:r>
                       <a:r>
-                        <a:rPr lang="de-DE" b="1" baseline="0" dirty="0">
+                        <a:rPr lang="en-US" b="1" baseline="0" noProof="1">
                           <a:latin typeface="Courier New"/>
                           <a:cs typeface="Courier New"/>
                         </a:rPr>
                         <a:t>$</a:t>
                       </a:r>
                       <a:r>
-                        <a:rPr lang="de-DE" b="1" dirty="0" err="1">
+                        <a:rPr lang="en-US" b="1" noProof="1">
                           <a:latin typeface="Courier New"/>
                           <a:cs typeface="Courier New"/>
                         </a:rPr>
                         <a:t>i,%A</a:t>
                       </a:r>
-                      <a:endParaRPr lang="de-DE" b="1" dirty="0">
-                        <a:latin typeface="Courier New"/>
-                        <a:cs typeface="Courier New"/>
-                      </a:endParaRPr>
-                    </a:p>
-                    <a:p>
-                      <a:r>
-                        <a:rPr lang="de-DE" b="1" dirty="0">
+                    </a:p>
+                    <a:p>
+                      <a:r>
+                        <a:rPr lang="en-US" b="1" noProof="1">
                           <a:latin typeface="Courier New"/>
                           <a:cs typeface="Courier New"/>
                         </a:rPr>
                         <a:t>    </a:t>
                       </a:r>
                       <a:r>
-                        <a:rPr lang="de-DE" b="1" dirty="0" err="1">
+                        <a:rPr lang="en-US" b="1" noProof="1">
                           <a:solidFill>
                             <a:srgbClr val="FF0000"/>
                           </a:solidFill>
                           <a:latin typeface="Courier New"/>
                           <a:cs typeface="Courier New"/>
                         </a:rPr>
-                        <a:t>movw</a:t>
-                      </a:r>
-                      <a:r>
-                        <a:rPr lang="de-DE" b="1" dirty="0">
-                          <a:solidFill>
-                            <a:srgbClr val="FF0000"/>
-                          </a:solidFill>
-                          <a:latin typeface="Courier New"/>
-                          <a:cs typeface="Courier New"/>
-                        </a:rPr>
-                        <a:t> </a:t>
-                      </a:r>
-                      <a:r>
-                        <a:rPr lang="de-DE" b="1" dirty="0">
+                        <a:t>movw </a:t>
+                      </a:r>
+                      <a:r>
+                        <a:rPr lang="en-US" b="1" noProof="1">
                           <a:latin typeface="Courier New"/>
                           <a:cs typeface="Courier New"/>
                         </a:rPr>
@@ -22869,14 +20979,14 @@
                         <a:defRPr/>
                       </a:pPr>
                       <a:r>
-                        <a:rPr lang="de-DE" b="1" dirty="0">
+                        <a:rPr lang="en-US" b="1" noProof="1">
                           <a:latin typeface="Courier New"/>
                           <a:cs typeface="Courier New"/>
                         </a:rPr>
                         <a:t>    </a:t>
                       </a:r>
                       <a:r>
-                        <a:rPr lang="de-DE" b="1" dirty="0" err="1">
+                        <a:rPr lang="en-US" b="1" noProof="1">
                           <a:solidFill>
                             <a:srgbClr val="FF0000"/>
                           </a:solidFill>
@@ -22886,7 +20996,7 @@
                         <a:t>leaw</a:t>
                       </a:r>
                       <a:r>
-                        <a:rPr lang="de-DE" b="1" baseline="0" dirty="0">
+                        <a:rPr lang="en-US" b="1" baseline="0" noProof="1">
                           <a:solidFill>
                             <a:srgbClr val="FF0000"/>
                           </a:solidFill>
@@ -22896,149 +21006,118 @@
                         <a:t> </a:t>
                       </a:r>
                       <a:r>
-                        <a:rPr lang="de-DE" b="1" baseline="0" dirty="0">
+                        <a:rPr lang="en-US" b="1" baseline="0" noProof="1">
                           <a:latin typeface="Courier New"/>
                           <a:cs typeface="Courier New"/>
                         </a:rPr>
-                        <a:t>$</a:t>
-                      </a:r>
-                      <a:r>
-                        <a:rPr lang="de-DE" b="1" baseline="0" dirty="0" err="1">
+                        <a:t>$sum</a:t>
+                      </a:r>
+                      <a:r>
+                        <a:rPr lang="en-US" b="1" noProof="1">
                           <a:latin typeface="Courier New"/>
                           <a:cs typeface="Courier New"/>
                         </a:rPr>
-                        <a:t>sum</a:t>
-                      </a:r>
-                      <a:r>
-                        <a:rPr lang="de-DE" b="1" dirty="0">
+                        <a:t>,%A</a:t>
+                      </a:r>
+                    </a:p>
+                    <a:p>
+                      <a:r>
+                        <a:rPr lang="en-US" b="1" noProof="1">
                           <a:latin typeface="Courier New"/>
                           <a:cs typeface="Courier New"/>
                         </a:rPr>
-                        <a:t>,%A</a:t>
-                      </a:r>
-                    </a:p>
-                    <a:p>
-                      <a:r>
-                        <a:rPr lang="de-DE" b="1" dirty="0">
-                          <a:latin typeface="Courier New"/>
-                          <a:cs typeface="Courier New"/>
-                        </a:rPr>
                         <a:t>    </a:t>
                       </a:r>
                       <a:r>
-                        <a:rPr lang="de-DE" b="1" dirty="0" err="1">
+                        <a:rPr lang="en-US" b="1" noProof="1">
                           <a:solidFill>
                             <a:srgbClr val="FF0000"/>
                           </a:solidFill>
                           <a:latin typeface="Courier New"/>
                           <a:cs typeface="Courier New"/>
                         </a:rPr>
-                        <a:t>movw</a:t>
-                      </a:r>
-                      <a:r>
-                        <a:rPr lang="de-DE" b="1" dirty="0">
+                        <a:t>movw </a:t>
+                      </a:r>
+                      <a:r>
+                        <a:rPr lang="en-US" b="1" noProof="1">
+                          <a:latin typeface="Courier New"/>
+                          <a:cs typeface="Courier New"/>
+                        </a:rPr>
+                        <a:t>$0,(%A)</a:t>
+                      </a:r>
+                    </a:p>
+                    <a:p>
+                      <a:r>
+                        <a:rPr lang="en-US" b="1" noProof="1">
+                          <a:latin typeface="Courier New"/>
+                          <a:cs typeface="Courier New"/>
+                        </a:rPr>
+                        <a:t>LOOP:</a:t>
+                      </a:r>
+                    </a:p>
+                    <a:p>
+                      <a:r>
+                        <a:rPr lang="en-US" b="1" noProof="1">
+                          <a:latin typeface="Courier New"/>
+                          <a:cs typeface="Courier New"/>
+                        </a:rPr>
+                        <a:t>    </a:t>
+                      </a:r>
+                      <a:r>
+                        <a:rPr lang="en-US" b="1" noProof="1">
                           <a:solidFill>
                             <a:srgbClr val="FF0000"/>
                           </a:solidFill>
                           <a:latin typeface="Courier New"/>
                           <a:cs typeface="Courier New"/>
                         </a:rPr>
-                        <a:t> </a:t>
-                      </a:r>
-                      <a:r>
-                        <a:rPr lang="de-DE" b="1" dirty="0">
-                          <a:latin typeface="Courier New"/>
-                          <a:cs typeface="Courier New"/>
-                        </a:rPr>
-                        <a:t>$0,(%A)</a:t>
-                      </a:r>
-                    </a:p>
-                    <a:p>
-                      <a:r>
-                        <a:rPr lang="de-DE" b="1" dirty="0">
-                          <a:latin typeface="Courier New"/>
-                          <a:cs typeface="Courier New"/>
-                        </a:rPr>
-                        <a:t>LOOP:</a:t>
-                      </a:r>
-                    </a:p>
-                    <a:p>
-                      <a:r>
-                        <a:rPr lang="de-DE" b="1" dirty="0">
-                          <a:latin typeface="Courier New"/>
-                          <a:cs typeface="Courier New"/>
-                        </a:rPr>
-                        <a:t>    </a:t>
-                      </a:r>
-                      <a:r>
-                        <a:rPr lang="de-DE" b="1" dirty="0" err="1">
+                        <a:t>leaw</a:t>
+                      </a:r>
+                      <a:r>
+                        <a:rPr lang="en-US" b="1" baseline="0" noProof="1">
                           <a:solidFill>
                             <a:srgbClr val="FF0000"/>
                           </a:solidFill>
                           <a:latin typeface="Courier New"/>
                           <a:cs typeface="Courier New"/>
                         </a:rPr>
-                        <a:t>leaw</a:t>
-                      </a:r>
-                      <a:r>
-                        <a:rPr lang="de-DE" b="1" baseline="0" dirty="0">
+                        <a:t> </a:t>
+                      </a:r>
+                      <a:r>
+                        <a:rPr lang="en-US" b="1" baseline="0" noProof="1">
+                          <a:latin typeface="Courier New"/>
+                          <a:cs typeface="Courier New"/>
+                        </a:rPr>
+                        <a:t>$</a:t>
+                      </a:r>
+                      <a:r>
+                        <a:rPr lang="en-US" b="1" noProof="1">
+                          <a:latin typeface="Courier New"/>
+                          <a:cs typeface="Courier New"/>
+                        </a:rPr>
+                        <a:t>i,%A</a:t>
+                      </a:r>
+                    </a:p>
+                    <a:p>
+                      <a:r>
+                        <a:rPr lang="en-US" b="1" noProof="1">
+                          <a:latin typeface="Courier New"/>
+                          <a:cs typeface="Courier New"/>
+                        </a:rPr>
+                        <a:t>    </a:t>
+                      </a:r>
+                      <a:r>
+                        <a:rPr lang="en-US" b="1" noProof="1">
                           <a:solidFill>
                             <a:srgbClr val="FF0000"/>
                           </a:solidFill>
                           <a:latin typeface="Courier New"/>
                           <a:cs typeface="Courier New"/>
                         </a:rPr>
-                        <a:t> </a:t>
-                      </a:r>
-                      <a:r>
-                        <a:rPr lang="de-DE" b="1" baseline="0" dirty="0">
-                          <a:latin typeface="Courier New"/>
-                          <a:cs typeface="Courier New"/>
-                        </a:rPr>
-                        <a:t>$</a:t>
-                      </a:r>
-                      <a:r>
-                        <a:rPr lang="de-DE" b="1" dirty="0" err="1">
-                          <a:latin typeface="Courier New"/>
-                          <a:cs typeface="Courier New"/>
-                        </a:rPr>
-                        <a:t>i,%A</a:t>
-                      </a:r>
-                      <a:endParaRPr lang="de-DE" b="1" dirty="0">
-                        <a:latin typeface="Courier New"/>
-                        <a:cs typeface="Courier New"/>
-                      </a:endParaRPr>
-                    </a:p>
-                    <a:p>
-                      <a:r>
-                        <a:rPr lang="de-DE" b="1" dirty="0">
-                          <a:latin typeface="Courier New"/>
-                          <a:cs typeface="Courier New"/>
-                        </a:rPr>
-                        <a:t>    </a:t>
-                      </a:r>
-                      <a:r>
-                        <a:rPr lang="de-DE" b="1" dirty="0" err="1">
-                          <a:solidFill>
-                            <a:srgbClr val="FF0000"/>
-                          </a:solidFill>
-                          <a:latin typeface="Courier New"/>
-                          <a:cs typeface="Courier New"/>
-                        </a:rPr>
-                        <a:t>movw</a:t>
-                      </a:r>
-                      <a:r>
-                        <a:rPr lang="de-DE" b="1" dirty="0">
-                          <a:solidFill>
-                            <a:srgbClr val="FF0000"/>
-                          </a:solidFill>
-                          <a:latin typeface="Courier New"/>
-                          <a:cs typeface="Courier New"/>
-                        </a:rPr>
-                        <a:t> </a:t>
-                      </a:r>
-                      <a:r>
-                        <a:rPr lang="de-DE" b="1" dirty="0">
+                        <a:t>movw </a:t>
+                      </a:r>
+                      <a:r>
+                        <a:rPr lang="en-US" b="1" noProof="1">
                           <a:latin typeface="Courier New"/>
                           <a:cs typeface="Courier New"/>
                         </a:rPr>
@@ -23064,14 +21143,14 @@
                         <a:defRPr/>
                       </a:pPr>
                       <a:r>
-                        <a:rPr lang="de-DE" b="1" dirty="0">
+                        <a:rPr lang="en-US" b="1" noProof="1">
                           <a:latin typeface="Courier New"/>
                           <a:cs typeface="Courier New"/>
                         </a:rPr>
                         <a:t>    </a:t>
                       </a:r>
                       <a:r>
-                        <a:rPr lang="de-DE" b="1" dirty="0" err="1">
+                        <a:rPr lang="en-US" b="1" noProof="1">
                           <a:solidFill>
                             <a:srgbClr val="FF0000"/>
                           </a:solidFill>
@@ -23081,7 +21160,7 @@
                         <a:t>leaw</a:t>
                       </a:r>
                       <a:r>
-                        <a:rPr lang="de-DE" b="1" baseline="0" dirty="0">
+                        <a:rPr lang="en-US" b="1" baseline="0" noProof="1">
                           <a:solidFill>
                             <a:srgbClr val="FF0000"/>
                           </a:solidFill>
@@ -23091,14 +21170,14 @@
                         <a:t> </a:t>
                       </a:r>
                       <a:r>
-                        <a:rPr lang="de-DE" b="1" baseline="0" dirty="0">
+                        <a:rPr lang="en-US" b="1" baseline="0" noProof="1">
                           <a:latin typeface="Courier New"/>
                           <a:cs typeface="Courier New"/>
                         </a:rPr>
                         <a:t>$</a:t>
                       </a:r>
                       <a:r>
-                        <a:rPr lang="de-DE" b="1" dirty="0">
+                        <a:rPr lang="en-US" b="1" noProof="1">
                           <a:latin typeface="Courier New"/>
                           <a:cs typeface="Courier New"/>
                         </a:rPr>
@@ -23124,14 +21203,14 @@
                         <a:defRPr/>
                       </a:pPr>
                       <a:r>
-                        <a:rPr lang="de-DE" b="1" dirty="0">
+                        <a:rPr lang="en-US" b="1" noProof="1">
                           <a:latin typeface="Courier New"/>
                           <a:cs typeface="Courier New"/>
                         </a:rPr>
                         <a:t>    </a:t>
                       </a:r>
                       <a:r>
-                        <a:rPr lang="de-DE" b="1" dirty="0" err="1">
+                        <a:rPr lang="en-US" b="1" noProof="1">
                           <a:solidFill>
                             <a:srgbClr val="FF0000"/>
                           </a:solidFill>
@@ -23141,7 +21220,7 @@
                         <a:t>subw</a:t>
                       </a:r>
                       <a:r>
-                        <a:rPr lang="de-DE" b="1" baseline="0" dirty="0">
+                        <a:rPr lang="en-US" b="1" baseline="0" noProof="1">
                           <a:solidFill>
                             <a:srgbClr val="FF0000"/>
                           </a:solidFill>
@@ -23151,7 +21230,7 @@
                         <a:t> </a:t>
                       </a:r>
                       <a:r>
-                        <a:rPr lang="de-DE" b="1" baseline="0" dirty="0">
+                        <a:rPr lang="en-US" b="1" baseline="0" noProof="1">
                           <a:latin typeface="Courier New"/>
                           <a:cs typeface="Courier New"/>
                         </a:rPr>
@@ -23177,63 +21256,70 @@
                         <a:defRPr/>
                       </a:pPr>
                       <a:r>
-                        <a:rPr lang="de-DE" b="1" baseline="0" dirty="0">
+                        <a:rPr lang="en-US" b="1" baseline="0" noProof="1">
                           <a:latin typeface="Courier New"/>
                           <a:cs typeface="Courier New"/>
                         </a:rPr>
                         <a:t>    </a:t>
                       </a:r>
                       <a:r>
-                        <a:rPr lang="de-DE" b="1" baseline="0" dirty="0" err="1">
+                        <a:rPr lang="en-US" b="1" baseline="0" noProof="1">
                           <a:solidFill>
                             <a:srgbClr val="FF0000"/>
                           </a:solidFill>
                           <a:latin typeface="Courier New"/>
                           <a:cs typeface="Courier New"/>
                         </a:rPr>
-                        <a:t>leaw</a:t>
-                      </a:r>
-                      <a:r>
-                        <a:rPr lang="de-DE" b="1" baseline="0" dirty="0">
+                        <a:t>leaw </a:t>
+                      </a:r>
+                      <a:r>
+                        <a:rPr lang="en-US" b="1" baseline="0" noProof="1">
+                          <a:latin typeface="Courier New"/>
+                          <a:cs typeface="Courier New"/>
+                        </a:rPr>
+                        <a:t>$LOOP,%A</a:t>
+                      </a:r>
+                      <a:endParaRPr lang="en-US" b="1" noProof="1">
+                        <a:latin typeface="Courier New"/>
+                        <a:cs typeface="Courier New"/>
+                      </a:endParaRPr>
+                    </a:p>
+                    <a:p>
+                      <a:r>
+                        <a:rPr lang="en-US" b="1" noProof="1">
+                          <a:latin typeface="Courier New"/>
+                          <a:cs typeface="Courier New"/>
+                        </a:rPr>
+                        <a:t>    </a:t>
+                      </a:r>
+                      <a:r>
+                        <a:rPr lang="en-US" b="1" noProof="1">
                           <a:solidFill>
                             <a:srgbClr val="FF0000"/>
                           </a:solidFill>
                           <a:latin typeface="Courier New"/>
                           <a:cs typeface="Courier New"/>
                         </a:rPr>
-                        <a:t> </a:t>
-                      </a:r>
-                      <a:r>
-                        <a:rPr lang="de-DE" b="1" baseline="0" dirty="0">
-                          <a:latin typeface="Courier New"/>
-                          <a:cs typeface="Courier New"/>
-                        </a:rPr>
-                        <a:t>$LOOP,%A</a:t>
-                      </a:r>
-                      <a:endParaRPr lang="de-DE" b="1" dirty="0">
-                        <a:latin typeface="Courier New"/>
-                        <a:cs typeface="Courier New"/>
-                      </a:endParaRPr>
-                    </a:p>
-                    <a:p>
-                      <a:r>
-                        <a:rPr lang="de-DE" b="1" dirty="0">
-                          <a:latin typeface="Courier New"/>
-                          <a:cs typeface="Courier New"/>
-                        </a:rPr>
-                        <a:t>    </a:t>
-                      </a:r>
-                      <a:r>
-                        <a:rPr lang="de-DE" b="1" dirty="0" err="1">
+                        <a:t>jg</a:t>
+                      </a:r>
+                      <a:r>
+                        <a:rPr lang="en-US" b="1" baseline="0" noProof="1">
                           <a:solidFill>
                             <a:srgbClr val="FF0000"/>
                           </a:solidFill>
                           <a:latin typeface="Courier New"/>
                           <a:cs typeface="Courier New"/>
                         </a:rPr>
-                        <a:t>jg</a:t>
-                      </a:r>
-                      <a:endParaRPr lang="pt-BR" b="1" dirty="0">
+                        <a:t>   </a:t>
+                      </a:r>
+                      <a:r>
+                        <a:rPr lang="en-US" b="1" baseline="0" noProof="1">
+                          <a:latin typeface="Courier New"/>
+                          <a:cs typeface="Courier New"/>
+                        </a:rPr>
+                        <a:t>%D</a:t>
+                      </a:r>
+                      <a:endParaRPr lang="en-US" b="1" noProof="1">
                         <a:solidFill>
                           <a:srgbClr val="FF0000"/>
                         </a:solidFill>
@@ -23291,7 +21377,7 @@
                     <a:p>
                       <a:pPr algn="ctr"/>
                       <a:r>
-                        <a:rPr lang="cs-CZ" b="1" dirty="0">
+                        <a:rPr lang="en-US" b="1" noProof="1">
                           <a:latin typeface="Courier New"/>
                           <a:cs typeface="Courier New"/>
                         </a:rPr>
@@ -23301,7 +21387,7 @@
                     <a:p>
                       <a:pPr algn="ctr"/>
                       <a:r>
-                        <a:rPr lang="cs-CZ" b="1" dirty="0">
+                        <a:rPr lang="en-US" b="1" noProof="1">
                           <a:latin typeface="Courier New"/>
                           <a:cs typeface="Courier New"/>
                         </a:rPr>
@@ -23311,7 +21397,7 @@
                     <a:p>
                       <a:pPr algn="ctr"/>
                       <a:r>
-                        <a:rPr lang="cs-CZ" b="1" dirty="0">
+                        <a:rPr lang="en-US" b="1" noProof="1">
                           <a:latin typeface="Courier New"/>
                           <a:cs typeface="Courier New"/>
                         </a:rPr>
@@ -23321,7 +21407,7 @@
                     <a:p>
                       <a:pPr algn="ctr"/>
                       <a:r>
-                        <a:rPr lang="cs-CZ" b="1" dirty="0">
+                        <a:rPr lang="en-US" b="1" noProof="1">
                           <a:latin typeface="Courier New"/>
                           <a:cs typeface="Courier New"/>
                         </a:rPr>
@@ -23330,7 +21416,7 @@
                     </a:p>
                     <a:p>
                       <a:pPr algn="ctr"/>
-                      <a:endParaRPr lang="cs-CZ" sz="800" b="1" dirty="0">
+                      <a:endParaRPr lang="en-US" sz="800" b="1" noProof="1">
                         <a:latin typeface="Courier New"/>
                         <a:cs typeface="Courier New"/>
                       </a:endParaRPr>
@@ -23338,7 +21424,7 @@
                     <a:p>
                       <a:pPr algn="ctr"/>
                       <a:r>
-                        <a:rPr lang="cs-CZ" b="1" dirty="0">
+                        <a:rPr lang="en-US" b="1" noProof="1">
                           <a:latin typeface="Courier New"/>
                           <a:cs typeface="Courier New"/>
                         </a:rPr>
@@ -23348,7 +21434,7 @@
                     <a:p>
                       <a:pPr algn="ctr"/>
                       <a:r>
-                        <a:rPr lang="cs-CZ" b="1" dirty="0">
+                        <a:rPr lang="en-US" b="1" noProof="1">
                           <a:latin typeface="Courier New"/>
                           <a:cs typeface="Courier New"/>
                         </a:rPr>
@@ -23358,7 +21444,7 @@
                     <a:p>
                       <a:pPr algn="ctr"/>
                       <a:r>
-                        <a:rPr lang="cs-CZ" b="1" dirty="0">
+                        <a:rPr lang="en-US" b="1" noProof="1">
                           <a:latin typeface="Courier New"/>
                           <a:cs typeface="Courier New"/>
                         </a:rPr>
@@ -23368,7 +21454,7 @@
                     <a:p>
                       <a:pPr algn="ctr"/>
                       <a:r>
-                        <a:rPr lang="cs-CZ" b="1" dirty="0">
+                        <a:rPr lang="en-US" b="1" noProof="1">
                           <a:latin typeface="Courier New"/>
                           <a:cs typeface="Courier New"/>
                         </a:rPr>
@@ -23378,7 +21464,7 @@
                     <a:p>
                       <a:pPr algn="ctr"/>
                       <a:r>
-                        <a:rPr lang="cs-CZ" b="1" dirty="0">
+                        <a:rPr lang="en-US" b="1" noProof="1">
                           <a:latin typeface="Courier New"/>
                           <a:cs typeface="Courier New"/>
                         </a:rPr>
@@ -23388,16 +21474,12 @@
                     <a:p>
                       <a:pPr algn="ctr"/>
                       <a:r>
-                        <a:rPr lang="cs-CZ" b="1" dirty="0">
+                        <a:rPr lang="en-US" b="1" noProof="1">
                           <a:latin typeface="Courier New"/>
                           <a:cs typeface="Courier New"/>
                         </a:rPr>
                         <a:t>1110001100000001</a:t>
                       </a:r>
-                      <a:endParaRPr lang="pt-BR" b="1" dirty="0">
-                        <a:latin typeface="Courier New"/>
-                        <a:cs typeface="Courier New"/>
-                      </a:endParaRPr>
                     </a:p>
                   </a:txBody>
                   <a:tcPr anchor="ctr">
@@ -23449,6 +21531,42 @@
           </a:graphicData>
         </a:graphic>
       </p:graphicFrame>
+      <p:sp>
+        <p:nvSpPr>
+          <p:cNvPr id="8" name="TextBox 7">
+            <a:extLst>
+              <a:ext uri="{FF2B5EF4-FFF2-40B4-BE49-F238E27FC236}">
+                <a16:creationId xmlns:a16="http://schemas.microsoft.com/office/drawing/2014/main" id="{B6627997-5DA0-E129-BA28-271D683B96A6}"/>
+              </a:ext>
+            </a:extLst>
+          </p:cNvPr>
+          <p:cNvSpPr txBox="1"/>
+          <p:nvPr/>
+        </p:nvSpPr>
+        <p:spPr>
+          <a:xfrm>
+            <a:off x="6400800" y="6338063"/>
+            <a:ext cx="1645920" cy="369332"/>
+          </a:xfrm>
+          <a:prstGeom prst="rect">
+            <a:avLst/>
+          </a:prstGeom>
+          <a:noFill/>
+        </p:spPr>
+        <p:txBody>
+          <a:bodyPr wrap="square">
+            <a:spAutoFit/>
+          </a:bodyPr>
+          <a:lstStyle/>
+          <a:p>
+            <a:r>
+              <a:rPr lang="en-BR" b="1" dirty="0"/>
+              <a:t>Arquitetura Z0</a:t>
+            </a:r>
+            <a:endParaRPr lang="en-US" b="1" dirty="0"/>
+          </a:p>
+        </p:txBody>
+      </p:sp>
     </p:spTree>
     <p:extLst>
       <p:ext uri="{BB962C8B-B14F-4D97-AF65-F5344CB8AC3E}">
@@ -24129,7 +22247,7 @@
           <p:nvPr>
             <p:extLst>
               <p:ext uri="{D42A27DB-BD31-4B8C-83A1-F6EECF244321}">
-                <p14:modId xmlns:p14="http://schemas.microsoft.com/office/powerpoint/2010/main" val="1219016786"/>
+                <p14:modId xmlns:p14="http://schemas.microsoft.com/office/powerpoint/2010/main" val="1674439709"/>
               </p:ext>
             </p:extLst>
           </p:nvPr>
@@ -24160,93 +22278,56 @@
                     <a:lstStyle/>
                     <a:p>
                       <a:r>
-                        <a:rPr lang="de-DE" b="1" dirty="0">
+                        <a:rPr lang="en-US" b="1" noProof="1">
                           <a:solidFill>
                             <a:schemeClr val="tx1"/>
                           </a:solidFill>
                           <a:latin typeface="Courier New"/>
                           <a:cs typeface="Courier New"/>
                         </a:rPr>
-                        <a:t>    </a:t>
-                      </a:r>
-                      <a:r>
-                        <a:rPr lang="de-DE" b="1" dirty="0" err="1">
+                        <a:t>    leaw</a:t>
+                      </a:r>
+                      <a:r>
+                        <a:rPr lang="en-US" b="1" baseline="0" noProof="1">
                           <a:solidFill>
                             <a:schemeClr val="tx1"/>
                           </a:solidFill>
                           <a:latin typeface="Courier New"/>
                           <a:cs typeface="Courier New"/>
                         </a:rPr>
-                        <a:t>leaw</a:t>
-                      </a:r>
-                      <a:r>
-                        <a:rPr lang="de-DE" b="1" baseline="0" dirty="0">
+                        <a:t> $</a:t>
+                      </a:r>
+                      <a:r>
+                        <a:rPr lang="en-US" b="1" noProof="1">
+                          <a:solidFill>
+                            <a:srgbClr val="FF0000"/>
+                          </a:solidFill>
+                          <a:latin typeface="Courier New"/>
+                          <a:cs typeface="Courier New"/>
+                        </a:rPr>
+                        <a:t>i</a:t>
+                      </a:r>
+                      <a:r>
+                        <a:rPr lang="en-US" b="1" noProof="1">
                           <a:solidFill>
                             <a:schemeClr val="tx1"/>
                           </a:solidFill>
                           <a:latin typeface="Courier New"/>
                           <a:cs typeface="Courier New"/>
                         </a:rPr>
-                        <a:t> $</a:t>
-                      </a:r>
-                      <a:r>
-                        <a:rPr lang="de-DE" b="1" dirty="0" err="1">
-                          <a:solidFill>
-                            <a:srgbClr val="FF0000"/>
-                          </a:solidFill>
-                          <a:latin typeface="Courier New"/>
-                          <a:cs typeface="Courier New"/>
-                        </a:rPr>
-                        <a:t>i</a:t>
-                      </a:r>
-                      <a:r>
-                        <a:rPr lang="de-DE" b="1" dirty="0" err="1">
+                        <a:t>,%A</a:t>
+                      </a:r>
+                    </a:p>
+                    <a:p>
+                      <a:r>
+                        <a:rPr lang="en-US" b="1" noProof="1">
                           <a:solidFill>
                             <a:schemeClr val="tx1"/>
                           </a:solidFill>
                           <a:latin typeface="Courier New"/>
                           <a:cs typeface="Courier New"/>
                         </a:rPr>
-                        <a:t>,%A</a:t>
-                      </a:r>
-                      <a:endParaRPr lang="de-DE" b="1" dirty="0">
-                        <a:solidFill>
-                          <a:schemeClr val="tx1"/>
-                        </a:solidFill>
-                        <a:latin typeface="Courier New"/>
-                        <a:cs typeface="Courier New"/>
-                      </a:endParaRPr>
-                    </a:p>
-                    <a:p>
-                      <a:r>
-                        <a:rPr lang="de-DE" b="1" dirty="0">
-                          <a:solidFill>
-                            <a:schemeClr val="tx1"/>
-                          </a:solidFill>
-                          <a:latin typeface="Courier New"/>
-                          <a:cs typeface="Courier New"/>
-                        </a:rPr>
-                        <a:t>    </a:t>
-                      </a:r>
-                      <a:r>
-                        <a:rPr lang="de-DE" b="1" dirty="0" err="1">
-                          <a:solidFill>
-                            <a:schemeClr val="tx1"/>
-                          </a:solidFill>
-                          <a:latin typeface="Courier New"/>
-                          <a:cs typeface="Courier New"/>
-                        </a:rPr>
-                        <a:t>movw</a:t>
-                      </a:r>
-                      <a:r>
-                        <a:rPr lang="de-DE" b="1" dirty="0">
-                          <a:solidFill>
-                            <a:schemeClr val="tx1"/>
-                          </a:solidFill>
-                          <a:latin typeface="Courier New"/>
-                          <a:cs typeface="Courier New"/>
-                        </a:rPr>
-                        <a:t> $1,(%A)</a:t>
+                        <a:t>    movw $1,(%A)</a:t>
                       </a:r>
                     </a:p>
                     <a:p>
@@ -24268,199 +22349,132 @@
                         <a:defRPr/>
                       </a:pPr>
                       <a:r>
-                        <a:rPr lang="de-DE" b="1" dirty="0">
+                        <a:rPr lang="en-US" b="1" noProof="1">
                           <a:solidFill>
                             <a:schemeClr val="tx1"/>
                           </a:solidFill>
                           <a:latin typeface="Courier New"/>
                           <a:cs typeface="Courier New"/>
                         </a:rPr>
-                        <a:t>    </a:t>
-                      </a:r>
-                      <a:r>
-                        <a:rPr lang="de-DE" b="1" dirty="0" err="1">
+                        <a:t>    leaw</a:t>
+                      </a:r>
+                      <a:r>
+                        <a:rPr lang="en-US" b="1" baseline="0" noProof="1">
                           <a:solidFill>
                             <a:schemeClr val="tx1"/>
                           </a:solidFill>
                           <a:latin typeface="Courier New"/>
                           <a:cs typeface="Courier New"/>
                         </a:rPr>
-                        <a:t>leaw</a:t>
-                      </a:r>
-                      <a:r>
-                        <a:rPr lang="de-DE" b="1" baseline="0" dirty="0">
+                        <a:t> $</a:t>
+                      </a:r>
+                      <a:r>
+                        <a:rPr lang="en-US" b="1" baseline="0" noProof="1">
+                          <a:solidFill>
+                            <a:srgbClr val="FF0000"/>
+                          </a:solidFill>
+                          <a:latin typeface="Courier New"/>
+                          <a:cs typeface="Courier New"/>
+                        </a:rPr>
+                        <a:t>sum</a:t>
+                      </a:r>
+                      <a:r>
+                        <a:rPr lang="en-US" b="1" noProof="1">
                           <a:solidFill>
                             <a:schemeClr val="tx1"/>
                           </a:solidFill>
                           <a:latin typeface="Courier New"/>
                           <a:cs typeface="Courier New"/>
                         </a:rPr>
-                        <a:t> $</a:t>
-                      </a:r>
-                      <a:r>
-                        <a:rPr lang="de-DE" b="1" baseline="0" dirty="0" err="1">
+                        <a:t>,%A</a:t>
+                      </a:r>
+                    </a:p>
+                    <a:p>
+                      <a:r>
+                        <a:rPr lang="en-US" b="1" noProof="1">
+                          <a:solidFill>
+                            <a:schemeClr val="tx1"/>
+                          </a:solidFill>
+                          <a:latin typeface="Courier New"/>
+                          <a:cs typeface="Courier New"/>
+                        </a:rPr>
+                        <a:t>    movw $0,(%A)</a:t>
+                      </a:r>
+                    </a:p>
+                    <a:p>
+                      <a:r>
+                        <a:rPr lang="en-US" b="1" noProof="1">
                           <a:solidFill>
                             <a:srgbClr val="FF0000"/>
                           </a:solidFill>
                           <a:latin typeface="Courier New"/>
                           <a:cs typeface="Courier New"/>
                         </a:rPr>
-                        <a:t>sum</a:t>
-                      </a:r>
-                      <a:r>
-                        <a:rPr lang="de-DE" b="1" dirty="0">
+                        <a:t>LOOP</a:t>
+                      </a:r>
+                      <a:r>
+                        <a:rPr lang="en-US" b="1" noProof="1">
                           <a:solidFill>
                             <a:schemeClr val="tx1"/>
                           </a:solidFill>
                           <a:latin typeface="Courier New"/>
                           <a:cs typeface="Courier New"/>
                         </a:rPr>
-                        <a:t>,%A</a:t>
-                      </a:r>
-                    </a:p>
-                    <a:p>
-                      <a:r>
-                        <a:rPr lang="de-DE" b="1" dirty="0">
+                        <a:t>:</a:t>
+                      </a:r>
+                    </a:p>
+                    <a:p>
+                      <a:r>
+                        <a:rPr lang="en-US" b="1" noProof="1">
                           <a:solidFill>
                             <a:schemeClr val="tx1"/>
                           </a:solidFill>
                           <a:latin typeface="Courier New"/>
                           <a:cs typeface="Courier New"/>
                         </a:rPr>
-                        <a:t>    </a:t>
-                      </a:r>
-                      <a:r>
-                        <a:rPr lang="de-DE" b="1" dirty="0" err="1">
+                        <a:t>    leaw</a:t>
+                      </a:r>
+                      <a:r>
+                        <a:rPr lang="en-US" b="1" baseline="0" noProof="1">
                           <a:solidFill>
                             <a:schemeClr val="tx1"/>
                           </a:solidFill>
                           <a:latin typeface="Courier New"/>
                           <a:cs typeface="Courier New"/>
                         </a:rPr>
-                        <a:t>movw</a:t>
-                      </a:r>
-                      <a:r>
-                        <a:rPr lang="de-DE" b="1" dirty="0">
+                        <a:t> $</a:t>
+                      </a:r>
+                      <a:r>
+                        <a:rPr lang="en-US" b="1" noProof="1">
+                          <a:solidFill>
+                            <a:srgbClr val="FF0000"/>
+                          </a:solidFill>
+                          <a:latin typeface="Courier New"/>
+                          <a:cs typeface="Courier New"/>
+                        </a:rPr>
+                        <a:t>i</a:t>
+                      </a:r>
+                      <a:r>
+                        <a:rPr lang="en-US" b="1" noProof="1">
                           <a:solidFill>
                             <a:schemeClr val="tx1"/>
                           </a:solidFill>
                           <a:latin typeface="Courier New"/>
                           <a:cs typeface="Courier New"/>
                         </a:rPr>
-                        <a:t> $0,(%A)</a:t>
-                      </a:r>
-                    </a:p>
-                    <a:p>
-                      <a:r>
-                        <a:rPr lang="de-DE" b="1" dirty="0">
-                          <a:solidFill>
-                            <a:srgbClr val="FF0000"/>
-                          </a:solidFill>
-                          <a:latin typeface="Courier New"/>
-                          <a:cs typeface="Courier New"/>
-                        </a:rPr>
-                        <a:t>LOOP</a:t>
-                      </a:r>
-                      <a:r>
-                        <a:rPr lang="de-DE" b="1" dirty="0">
+                        <a:t>,%A</a:t>
+                      </a:r>
+                    </a:p>
+                    <a:p>
+                      <a:r>
+                        <a:rPr lang="en-US" b="1" noProof="1">
                           <a:solidFill>
                             <a:schemeClr val="tx1"/>
                           </a:solidFill>
                           <a:latin typeface="Courier New"/>
                           <a:cs typeface="Courier New"/>
                         </a:rPr>
-                        <a:t>:</a:t>
-                      </a:r>
-                    </a:p>
-                    <a:p>
-                      <a:r>
-                        <a:rPr lang="de-DE" b="1" dirty="0">
-                          <a:solidFill>
-                            <a:schemeClr val="tx1"/>
-                          </a:solidFill>
-                          <a:latin typeface="Courier New"/>
-                          <a:cs typeface="Courier New"/>
-                        </a:rPr>
-                        <a:t>    </a:t>
-                      </a:r>
-                      <a:r>
-                        <a:rPr lang="de-DE" b="1" dirty="0" err="1">
-                          <a:solidFill>
-                            <a:schemeClr val="tx1"/>
-                          </a:solidFill>
-                          <a:latin typeface="Courier New"/>
-                          <a:cs typeface="Courier New"/>
-                        </a:rPr>
-                        <a:t>leaw</a:t>
-                      </a:r>
-                      <a:r>
-                        <a:rPr lang="de-DE" b="1" baseline="0" dirty="0">
-                          <a:solidFill>
-                            <a:schemeClr val="tx1"/>
-                          </a:solidFill>
-                          <a:latin typeface="Courier New"/>
-                          <a:cs typeface="Courier New"/>
-                        </a:rPr>
-                        <a:t> $</a:t>
-                      </a:r>
-                      <a:r>
-                        <a:rPr lang="de-DE" b="1" dirty="0" err="1">
-                          <a:solidFill>
-                            <a:srgbClr val="FF0000"/>
-                          </a:solidFill>
-                          <a:latin typeface="Courier New"/>
-                          <a:cs typeface="Courier New"/>
-                        </a:rPr>
-                        <a:t>i</a:t>
-                      </a:r>
-                      <a:r>
-                        <a:rPr lang="de-DE" b="1" dirty="0" err="1">
-                          <a:solidFill>
-                            <a:schemeClr val="tx1"/>
-                          </a:solidFill>
-                          <a:latin typeface="Courier New"/>
-                          <a:cs typeface="Courier New"/>
-                        </a:rPr>
-                        <a:t>,%A</a:t>
-                      </a:r>
-                      <a:endParaRPr lang="de-DE" b="1" dirty="0">
-                        <a:solidFill>
-                          <a:schemeClr val="tx1"/>
-                        </a:solidFill>
-                        <a:latin typeface="Courier New"/>
-                        <a:cs typeface="Courier New"/>
-                      </a:endParaRPr>
-                    </a:p>
-                    <a:p>
-                      <a:r>
-                        <a:rPr lang="de-DE" b="1" dirty="0">
-                          <a:solidFill>
-                            <a:schemeClr val="tx1"/>
-                          </a:solidFill>
-                          <a:latin typeface="Courier New"/>
-                          <a:cs typeface="Courier New"/>
-                        </a:rPr>
-                        <a:t>    </a:t>
-                      </a:r>
-                      <a:r>
-                        <a:rPr lang="de-DE" b="1" dirty="0" err="1">
-                          <a:solidFill>
-                            <a:schemeClr val="tx1"/>
-                          </a:solidFill>
-                          <a:latin typeface="Courier New"/>
-                          <a:cs typeface="Courier New"/>
-                        </a:rPr>
-                        <a:t>movw</a:t>
-                      </a:r>
-                      <a:r>
-                        <a:rPr lang="de-DE" b="1" dirty="0">
-                          <a:solidFill>
-                            <a:schemeClr val="tx1"/>
-                          </a:solidFill>
-                          <a:latin typeface="Courier New"/>
-                          <a:cs typeface="Courier New"/>
-                        </a:rPr>
-                        <a:t> (%A),%D</a:t>
+                        <a:t>    movw (%A),%D</a:t>
                       </a:r>
                     </a:p>
                     <a:p>
@@ -24482,37 +22496,27 @@
                         <a:defRPr/>
                       </a:pPr>
                       <a:r>
-                        <a:rPr lang="de-DE" b="1" dirty="0">
+                        <a:rPr lang="en-US" b="1" noProof="1">
                           <a:solidFill>
                             <a:schemeClr val="tx1"/>
                           </a:solidFill>
                           <a:latin typeface="Courier New"/>
                           <a:cs typeface="Courier New"/>
                         </a:rPr>
-                        <a:t>    </a:t>
-                      </a:r>
-                      <a:r>
-                        <a:rPr lang="de-DE" b="1" dirty="0" err="1">
+                        <a:t>    leaw</a:t>
+                      </a:r>
+                      <a:r>
+                        <a:rPr lang="en-US" b="1" baseline="0" noProof="1">
                           <a:solidFill>
                             <a:schemeClr val="tx1"/>
                           </a:solidFill>
                           <a:latin typeface="Courier New"/>
                           <a:cs typeface="Courier New"/>
                         </a:rPr>
-                        <a:t>leaw</a:t>
-                      </a:r>
-                      <a:r>
-                        <a:rPr lang="de-DE" b="1" baseline="0" dirty="0">
-                          <a:solidFill>
-                            <a:schemeClr val="tx1"/>
-                          </a:solidFill>
-                          <a:latin typeface="Courier New"/>
-                          <a:cs typeface="Courier New"/>
-                        </a:rPr>
                         <a:t> $</a:t>
                       </a:r>
                       <a:r>
-                        <a:rPr lang="de-DE" b="1" dirty="0">
+                        <a:rPr lang="en-US" b="1" noProof="1">
                           <a:solidFill>
                             <a:srgbClr val="FF0000"/>
                           </a:solidFill>
@@ -24522,7 +22526,7 @@
                         <a:t>R0</a:t>
                       </a:r>
                       <a:r>
-                        <a:rPr lang="de-DE" b="1" dirty="0">
+                        <a:rPr lang="en-US" b="1" noProof="1">
                           <a:solidFill>
                             <a:schemeClr val="tx1"/>
                           </a:solidFill>
@@ -24551,27 +22555,17 @@
                         <a:defRPr/>
                       </a:pPr>
                       <a:r>
-                        <a:rPr lang="de-DE" b="1" dirty="0">
+                        <a:rPr lang="en-US" b="1" noProof="1">
                           <a:solidFill>
                             <a:schemeClr val="tx1"/>
                           </a:solidFill>
                           <a:latin typeface="Courier New"/>
                           <a:cs typeface="Courier New"/>
                         </a:rPr>
-                        <a:t>    </a:t>
-                      </a:r>
-                      <a:r>
-                        <a:rPr lang="de-DE" b="1" dirty="0" err="1">
-                          <a:solidFill>
-                            <a:schemeClr val="tx1"/>
-                          </a:solidFill>
-                          <a:latin typeface="Courier New"/>
-                          <a:cs typeface="Courier New"/>
-                        </a:rPr>
-                        <a:t>subw</a:t>
-                      </a:r>
-                      <a:r>
-                        <a:rPr lang="de-DE" b="1" baseline="0" dirty="0">
+                        <a:t>    subw</a:t>
+                      </a:r>
+                      <a:r>
+                        <a:rPr lang="en-US" b="1" baseline="0" noProof="1">
                           <a:solidFill>
                             <a:schemeClr val="tx1"/>
                           </a:solidFill>
@@ -24600,56 +22594,36 @@
                         <a:defRPr/>
                       </a:pPr>
                       <a:r>
-                        <a:rPr lang="de-DE" b="1" baseline="0" dirty="0">
+                        <a:rPr lang="en-US" b="1" baseline="0" noProof="1">
                           <a:solidFill>
                             <a:schemeClr val="tx1"/>
                           </a:solidFill>
                           <a:latin typeface="Courier New"/>
                           <a:cs typeface="Courier New"/>
                         </a:rPr>
-                        <a:t>    </a:t>
-                      </a:r>
-                      <a:r>
-                        <a:rPr lang="de-DE" b="1" baseline="0" dirty="0" err="1">
+                        <a:t>    leaw $</a:t>
+                      </a:r>
+                      <a:r>
+                        <a:rPr lang="en-US" b="1" baseline="0" noProof="1">
+                          <a:solidFill>
+                            <a:srgbClr val="FF0000"/>
+                          </a:solidFill>
+                          <a:latin typeface="Courier New"/>
+                          <a:cs typeface="Courier New"/>
+                        </a:rPr>
+                        <a:t>LOOP</a:t>
+                      </a:r>
+                      <a:r>
+                        <a:rPr lang="en-US" b="1" baseline="0" noProof="1">
                           <a:solidFill>
                             <a:schemeClr val="tx1"/>
                           </a:solidFill>
                           <a:latin typeface="Courier New"/>
                           <a:cs typeface="Courier New"/>
                         </a:rPr>
-                        <a:t>leaw</a:t>
-                      </a:r>
-                      <a:r>
-                        <a:rPr lang="de-DE" b="1" baseline="0" dirty="0">
-                          <a:solidFill>
-                            <a:schemeClr val="tx1"/>
-                          </a:solidFill>
-                          <a:latin typeface="Courier New"/>
-                          <a:cs typeface="Courier New"/>
-                        </a:rPr>
-                        <a:t> $</a:t>
-                      </a:r>
-                      <a:r>
-                        <a:rPr lang="de-DE" b="1" baseline="0" dirty="0">
-                          <a:solidFill>
-                            <a:srgbClr val="FF0000"/>
-                          </a:solidFill>
-                          <a:latin typeface="Courier New"/>
-                          <a:cs typeface="Courier New"/>
-                        </a:rPr>
-                        <a:t>LOOP</a:t>
-                      </a:r>
-                      <a:r>
-                        <a:rPr lang="de-DE" b="1" baseline="0" dirty="0">
-                          <a:solidFill>
-                            <a:schemeClr val="tx1"/>
-                          </a:solidFill>
-                          <a:latin typeface="Courier New"/>
-                          <a:cs typeface="Courier New"/>
-                        </a:rPr>
                         <a:t>,%A</a:t>
                       </a:r>
-                      <a:endParaRPr lang="de-DE" b="1" dirty="0">
+                      <a:endParaRPr lang="en-US" b="1" noProof="1">
                         <a:solidFill>
                           <a:schemeClr val="tx1"/>
                         </a:solidFill>
@@ -24659,32 +22633,15 @@
                     </a:p>
                     <a:p>
                       <a:r>
-                        <a:rPr lang="de-DE" b="1" dirty="0">
+                        <a:rPr lang="en-US" b="1" noProof="1">
                           <a:solidFill>
                             <a:schemeClr val="tx1"/>
                           </a:solidFill>
                           <a:latin typeface="Courier New"/>
                           <a:cs typeface="Courier New"/>
                         </a:rPr>
-                        <a:t>    </a:t>
-                      </a:r>
-                      <a:r>
-                        <a:rPr lang="de-DE" b="1" dirty="0" err="1">
-                          <a:solidFill>
-                            <a:schemeClr val="tx1"/>
-                          </a:solidFill>
-                          <a:latin typeface="Courier New"/>
-                          <a:cs typeface="Courier New"/>
-                        </a:rPr>
-                        <a:t>jg</a:t>
-                      </a:r>
-                      <a:endParaRPr lang="pt-BR" b="1" dirty="0">
-                        <a:solidFill>
-                          <a:schemeClr val="tx1"/>
-                        </a:solidFill>
-                        <a:latin typeface="Courier New"/>
-                        <a:cs typeface="Courier New"/>
-                      </a:endParaRPr>
+                        <a:t>    jg %D</a:t>
+                      </a:r>
                     </a:p>
                   </a:txBody>
                   <a:tcPr>
@@ -24739,6 +22696,42 @@
           </a:graphicData>
         </a:graphic>
       </p:graphicFrame>
+      <p:sp>
+        <p:nvSpPr>
+          <p:cNvPr id="8" name="TextBox 7">
+            <a:extLst>
+              <a:ext uri="{FF2B5EF4-FFF2-40B4-BE49-F238E27FC236}">
+                <a16:creationId xmlns:a16="http://schemas.microsoft.com/office/drawing/2014/main" id="{B13F8744-89BE-87B4-4996-1472EE2BF190}"/>
+              </a:ext>
+            </a:extLst>
+          </p:cNvPr>
+          <p:cNvSpPr txBox="1"/>
+          <p:nvPr/>
+        </p:nvSpPr>
+        <p:spPr>
+          <a:xfrm>
+            <a:off x="6400800" y="6338063"/>
+            <a:ext cx="1645920" cy="369332"/>
+          </a:xfrm>
+          <a:prstGeom prst="rect">
+            <a:avLst/>
+          </a:prstGeom>
+          <a:noFill/>
+        </p:spPr>
+        <p:txBody>
+          <a:bodyPr wrap="square">
+            <a:spAutoFit/>
+          </a:bodyPr>
+          <a:lstStyle/>
+          <a:p>
+            <a:r>
+              <a:rPr lang="en-BR" b="1" dirty="0"/>
+              <a:t>Arquitetura Z0</a:t>
+            </a:r>
+            <a:endParaRPr lang="en-US" b="1" dirty="0"/>
+          </a:p>
+        </p:txBody>
+      </p:sp>
     </p:spTree>
     <p:extLst>
       <p:ext uri="{BB962C8B-B14F-4D97-AF65-F5344CB8AC3E}">
